--- a/reports/presentation/CIS1921_Final_Presentation.pptx
+++ b/reports/presentation/CIS1921_Final_Presentation.pptx
@@ -14,7 +14,6 @@
     <p:sldId id="262" r:id="rId13"/>
     <p:sldId id="263" r:id="rId14"/>
     <p:sldId id="264" r:id="rId15"/>
-    <p:sldId id="265" r:id="rId16"/>
   </p:sldIdLst>
   <p:sldSz cx="12191695" cy="6858000" type="screen4x3"/>
   <p:notesSz cx="6858000" cy="9144000"/>
@@ -3207,7 +3206,7 @@
           <a:p>
             <a:pPr algn="l">
               <a:lnSpc>
-                <a:spcPct val="115000"/>
+                <a:spcPct val="120000"/>
               </a:lnSpc>
             </a:pPr>
             <a:r>
@@ -3287,7 +3286,7 @@
           <a:p>
             <a:pPr algn="l">
               <a:lnSpc>
-                <a:spcPct val="115000"/>
+                <a:spcPct val="120000"/>
               </a:lnSpc>
             </a:pPr>
             <a:r>
@@ -3297,7 +3296,7 @@
                 </a:solidFill>
                 <a:latin typeface="Helvetica Neue"/>
               </a:rPr>
-              <a:t>A weekly fitness + nutrition optimizer with four directly comparable LP/MIP &amp; CP-SAT formulations.</a:t>
+              <a:t>Planning a student's whole week — workouts, meals, sleep, hydration — as one optimization problem.</a:t>
             </a:r>
           </a:p>
         </p:txBody>
@@ -3326,7 +3325,7 @@
           <a:p>
             <a:pPr algn="l">
               <a:lnSpc>
-                <a:spcPct val="115000"/>
+                <a:spcPct val="120000"/>
               </a:lnSpc>
             </a:pPr>
             <a:r>
@@ -3365,7 +3364,7 @@
           <a:p>
             <a:pPr algn="l">
               <a:lnSpc>
-                <a:spcPct val="115000"/>
+                <a:spcPct val="120000"/>
               </a:lnSpc>
             </a:pPr>
             <a:r>
@@ -3376,1098 +3375,6 @@
                 <a:latin typeface="Helvetica Neue"/>
               </a:rPr>
               <a:t>April 28, 2026</a:t>
-            </a:r>
-          </a:p>
-        </p:txBody>
-      </p:sp>
-    </p:spTree>
-  </p:cSld>
-  <p:clrMapOvr>
-    <a:masterClrMapping/>
-  </p:clrMapOvr>
-</p:sld>
-</file>
-
-<file path=ppt/slides/slide10.xml><?xml version="1.0" encoding="utf-8"?>
-<p:sld xmlns:a="http://schemas.openxmlformats.org/drawingml/2006/main" xmlns:p="http://schemas.openxmlformats.org/presentationml/2006/main" xmlns:r="http://schemas.openxmlformats.org/officeDocument/2006/relationships">
-  <p:cSld>
-    <p:spTree>
-      <p:nvGrpSpPr>
-        <p:cNvPr id="1" name=""/>
-        <p:cNvGrpSpPr/>
-        <p:nvPr/>
-      </p:nvGrpSpPr>
-      <p:grpSpPr/>
-      <p:sp>
-        <p:nvSpPr>
-          <p:cNvPr id="2" name="Rectangle 1"/>
-          <p:cNvSpPr/>
-          <p:nvPr/>
-        </p:nvSpPr>
-        <p:spPr>
-          <a:xfrm>
-            <a:off x="0" y="0"/>
-            <a:ext cx="12191695" cy="6858000"/>
-          </a:xfrm>
-          <a:prstGeom prst="rect">
-            <a:avLst/>
-          </a:prstGeom>
-          <a:solidFill>
-            <a:srgbClr val="FAFAF7"/>
-          </a:solidFill>
-          <a:ln>
-            <a:noFill/>
-          </a:ln>
-        </p:spPr>
-        <p:style>
-          <a:lnRef idx="1">
-            <a:schemeClr val="accent1"/>
-          </a:lnRef>
-          <a:fillRef idx="3">
-            <a:schemeClr val="accent1"/>
-          </a:fillRef>
-          <a:effectRef idx="2">
-            <a:schemeClr val="accent1"/>
-          </a:effectRef>
-          <a:fontRef idx="minor">
-            <a:schemeClr val="lt1"/>
-          </a:fontRef>
-        </p:style>
-        <p:txBody>
-          <a:bodyPr rtlCol="0" anchor="ctr"/>
-          <a:lstStyle/>
-          <a:p>
-            <a:pPr algn="ctr"/>
-          </a:p>
-        </p:txBody>
-      </p:sp>
-      <p:sp>
-        <p:nvSpPr>
-          <p:cNvPr id="3" name="TextBox 2"/>
-          <p:cNvSpPr txBox="1"/>
-          <p:nvPr/>
-        </p:nvSpPr>
-        <p:spPr>
-          <a:xfrm>
-            <a:off x="548640" y="411480"/>
-            <a:ext cx="10972800" cy="274320"/>
-          </a:xfrm>
-          <a:prstGeom prst="rect">
-            <a:avLst/>
-          </a:prstGeom>
-          <a:noFill/>
-        </p:spPr>
-        <p:txBody>
-          <a:bodyPr wrap="square" lIns="0" rIns="0" tIns="0" bIns="0" anchor="t">
-            <a:spAutoFit/>
-          </a:bodyPr>
-          <a:lstStyle/>
-          <a:p>
-            <a:pPr algn="l">
-              <a:lnSpc>
-                <a:spcPct val="115000"/>
-              </a:lnSpc>
-            </a:pPr>
-            <a:r>
-              <a:rPr sz="1100" b="1" i="0">
-                <a:solidFill>
-                  <a:srgbClr val="E06B1F"/>
-                </a:solidFill>
-                <a:latin typeface="Helvetica Neue"/>
-              </a:rPr>
-              <a:t>5 · WRAP</a:t>
-            </a:r>
-          </a:p>
-        </p:txBody>
-      </p:sp>
-      <p:sp>
-        <p:nvSpPr>
-          <p:cNvPr id="4" name="TextBox 3"/>
-          <p:cNvSpPr txBox="1"/>
-          <p:nvPr/>
-        </p:nvSpPr>
-        <p:spPr>
-          <a:xfrm>
-            <a:off x="548640" y="685800"/>
-            <a:ext cx="10972800" cy="640080"/>
-          </a:xfrm>
-          <a:prstGeom prst="rect">
-            <a:avLst/>
-          </a:prstGeom>
-          <a:noFill/>
-        </p:spPr>
-        <p:txBody>
-          <a:bodyPr wrap="square" lIns="0" rIns="0" tIns="0" bIns="0" anchor="t">
-            <a:spAutoFit/>
-          </a:bodyPr>
-          <a:lstStyle/>
-          <a:p>
-            <a:pPr algn="l">
-              <a:lnSpc>
-                <a:spcPct val="115000"/>
-              </a:lnSpc>
-            </a:pPr>
-            <a:r>
-              <a:rPr sz="3000" b="1" i="0">
-                <a:solidFill>
-                  <a:srgbClr val="181F2B"/>
-                </a:solidFill>
-                <a:latin typeface="Helvetica Neue"/>
-              </a:rPr>
-              <a:t>Future work, repo, thanks.</a:t>
-            </a:r>
-          </a:p>
-        </p:txBody>
-      </p:sp>
-      <p:cxnSp>
-        <p:nvCxnSpPr>
-          <p:cNvPr id="5" name="Connector 4"/>
-          <p:cNvCxnSpPr/>
-          <p:nvPr/>
-        </p:nvCxnSpPr>
-        <p:spPr>
-          <a:xfrm>
-            <a:off x="548640" y="1417320"/>
-            <a:ext cx="11091672" cy="0"/>
-          </a:xfrm>
-          <a:prstGeom prst="line">
-            <a:avLst/>
-          </a:prstGeom>
-          <a:ln w="9525">
-            <a:solidFill>
-              <a:srgbClr val="E5E3DC"/>
-            </a:solidFill>
-          </a:ln>
-        </p:spPr>
-        <p:style>
-          <a:lnRef idx="2">
-            <a:schemeClr val="accent1"/>
-          </a:lnRef>
-          <a:fillRef idx="0">
-            <a:schemeClr val="accent1"/>
-          </a:fillRef>
-          <a:effectRef idx="1">
-            <a:schemeClr val="accent1"/>
-          </a:effectRef>
-          <a:fontRef idx="minor">
-            <a:schemeClr val="tx1"/>
-          </a:fontRef>
-        </p:style>
-      </p:cxnSp>
-      <p:sp>
-        <p:nvSpPr>
-          <p:cNvPr id="6" name="TextBox 5"/>
-          <p:cNvSpPr txBox="1"/>
-          <p:nvPr/>
-        </p:nvSpPr>
-        <p:spPr>
-          <a:xfrm>
-            <a:off x="10515600" y="6446520"/>
-            <a:ext cx="1188720" cy="274320"/>
-          </a:xfrm>
-          <a:prstGeom prst="rect">
-            <a:avLst/>
-          </a:prstGeom>
-          <a:noFill/>
-        </p:spPr>
-        <p:txBody>
-          <a:bodyPr wrap="square" lIns="0" rIns="0" tIns="0" bIns="0" anchor="t">
-            <a:spAutoFit/>
-          </a:bodyPr>
-          <a:lstStyle/>
-          <a:p>
-            <a:pPr algn="r">
-              <a:lnSpc>
-                <a:spcPct val="115000"/>
-              </a:lnSpc>
-            </a:pPr>
-            <a:r>
-              <a:rPr sz="900" b="0" i="0">
-                <a:solidFill>
-                  <a:srgbClr val="555F6D"/>
-                </a:solidFill>
-                <a:latin typeface="Helvetica Neue"/>
-              </a:rPr>
-              <a:t>10 / 10</a:t>
-            </a:r>
-          </a:p>
-        </p:txBody>
-      </p:sp>
-      <p:sp>
-        <p:nvSpPr>
-          <p:cNvPr id="7" name="Rounded Rectangle 6"/>
-          <p:cNvSpPr/>
-          <p:nvPr/>
-        </p:nvSpPr>
-        <p:spPr>
-          <a:xfrm>
-            <a:off x="548640" y="1691640"/>
-            <a:ext cx="5394960" cy="3566160"/>
-          </a:xfrm>
-          <a:prstGeom prst="roundRect">
-            <a:avLst>
-              <a:gd name="adj" fmla="val 6000"/>
-            </a:avLst>
-          </a:prstGeom>
-          <a:solidFill>
-            <a:srgbClr val="F1EEE6"/>
-          </a:solidFill>
-          <a:ln>
-            <a:noFill/>
-          </a:ln>
-          <a:effectLst/>
-        </p:spPr>
-        <p:style>
-          <a:lnRef idx="1">
-            <a:schemeClr val="accent1"/>
-          </a:lnRef>
-          <a:fillRef idx="3">
-            <a:schemeClr val="accent1"/>
-          </a:fillRef>
-          <a:effectRef idx="2">
-            <a:schemeClr val="accent1"/>
-          </a:effectRef>
-          <a:fontRef idx="minor">
-            <a:schemeClr val="lt1"/>
-          </a:fontRef>
-        </p:style>
-        <p:txBody>
-          <a:bodyPr rtlCol="0" anchor="ctr"/>
-          <a:lstStyle/>
-          <a:p>
-            <a:pPr algn="ctr"/>
-          </a:p>
-        </p:txBody>
-      </p:sp>
-      <p:sp>
-        <p:nvSpPr>
-          <p:cNvPr id="8" name="TextBox 7"/>
-          <p:cNvSpPr txBox="1"/>
-          <p:nvPr/>
-        </p:nvSpPr>
-        <p:spPr>
-          <a:xfrm>
-            <a:off x="822960" y="1874520"/>
-            <a:ext cx="5394960" cy="365760"/>
-          </a:xfrm>
-          <a:prstGeom prst="rect">
-            <a:avLst/>
-          </a:prstGeom>
-          <a:noFill/>
-        </p:spPr>
-        <p:txBody>
-          <a:bodyPr wrap="square" lIns="0" rIns="0" tIns="0" bIns="0" anchor="t">
-            <a:spAutoFit/>
-          </a:bodyPr>
-          <a:lstStyle/>
-          <a:p>
-            <a:pPr algn="l">
-              <a:lnSpc>
-                <a:spcPct val="115000"/>
-              </a:lnSpc>
-            </a:pPr>
-            <a:r>
-              <a:rPr sz="1100" b="1" i="0">
-                <a:solidFill>
-                  <a:srgbClr val="E06B1F"/>
-                </a:solidFill>
-                <a:latin typeface="Helvetica Neue"/>
-              </a:rPr>
-              <a:t>FUTURE WORK</a:t>
-            </a:r>
-          </a:p>
-        </p:txBody>
-      </p:sp>
-      <p:sp>
-        <p:nvSpPr>
-          <p:cNvPr id="9" name="TextBox 8"/>
-          <p:cNvSpPr txBox="1"/>
-          <p:nvPr/>
-        </p:nvSpPr>
-        <p:spPr>
-          <a:xfrm>
-            <a:off x="822960" y="2286000"/>
-            <a:ext cx="4846320" cy="310896"/>
-          </a:xfrm>
-          <a:prstGeom prst="rect">
-            <a:avLst/>
-          </a:prstGeom>
-          <a:noFill/>
-        </p:spPr>
-        <p:txBody>
-          <a:bodyPr wrap="square" lIns="0" rIns="0" tIns="0" bIns="0" anchor="t">
-            <a:spAutoFit/>
-          </a:bodyPr>
-          <a:lstStyle/>
-          <a:p>
-            <a:pPr algn="l">
-              <a:lnSpc>
-                <a:spcPct val="115000"/>
-              </a:lnSpc>
-            </a:pPr>
-            <a:r>
-              <a:rPr sz="1300" b="1" i="0">
-                <a:solidFill>
-                  <a:srgbClr val="181F2B"/>
-                </a:solidFill>
-                <a:latin typeface="Helvetica Neue"/>
-              </a:rPr>
-              <a:t>Solver scaling</a:t>
-            </a:r>
-          </a:p>
-        </p:txBody>
-      </p:sp>
-      <p:sp>
-        <p:nvSpPr>
-          <p:cNvPr id="10" name="TextBox 9"/>
-          <p:cNvSpPr txBox="1"/>
-          <p:nvPr/>
-        </p:nvSpPr>
-        <p:spPr>
-          <a:xfrm>
-            <a:off x="822960" y="2578608"/>
-            <a:ext cx="4846320" cy="411480"/>
-          </a:xfrm>
-          <a:prstGeom prst="rect">
-            <a:avLst/>
-          </a:prstGeom>
-          <a:noFill/>
-        </p:spPr>
-        <p:txBody>
-          <a:bodyPr wrap="square" lIns="0" rIns="0" tIns="0" bIns="0" anchor="t">
-            <a:spAutoFit/>
-          </a:bodyPr>
-          <a:lstStyle/>
-          <a:p>
-            <a:pPr algn="l">
-              <a:lnSpc>
-                <a:spcPct val="135000"/>
-              </a:lnSpc>
-            </a:pPr>
-            <a:r>
-              <a:rPr sz="1100" b="0" i="0">
-                <a:solidFill>
-                  <a:srgbClr val="555F6D"/>
-                </a:solidFill>
-                <a:latin typeface="Helvetica Neue"/>
-              </a:rPr>
-              <a:t>Column generation / Benders-style decomposition past 200 foods.</a:t>
-            </a:r>
-          </a:p>
-        </p:txBody>
-      </p:sp>
-      <p:sp>
-        <p:nvSpPr>
-          <p:cNvPr id="11" name="TextBox 10"/>
-          <p:cNvSpPr txBox="1"/>
-          <p:nvPr/>
-        </p:nvSpPr>
-        <p:spPr>
-          <a:xfrm>
-            <a:off x="822960" y="2999232"/>
-            <a:ext cx="4846320" cy="310896"/>
-          </a:xfrm>
-          <a:prstGeom prst="rect">
-            <a:avLst/>
-          </a:prstGeom>
-          <a:noFill/>
-        </p:spPr>
-        <p:txBody>
-          <a:bodyPr wrap="square" lIns="0" rIns="0" tIns="0" bIns="0" anchor="t">
-            <a:spAutoFit/>
-          </a:bodyPr>
-          <a:lstStyle/>
-          <a:p>
-            <a:pPr algn="l">
-              <a:lnSpc>
-                <a:spcPct val="115000"/>
-              </a:lnSpc>
-            </a:pPr>
-            <a:r>
-              <a:rPr sz="1300" b="1" i="0">
-                <a:solidFill>
-                  <a:srgbClr val="181F2B"/>
-                </a:solidFill>
-                <a:latin typeface="Helvetica Neue"/>
-              </a:rPr>
-              <a:t>Online re-optimization</a:t>
-            </a:r>
-          </a:p>
-        </p:txBody>
-      </p:sp>
-      <p:sp>
-        <p:nvSpPr>
-          <p:cNvPr id="12" name="TextBox 11"/>
-          <p:cNvSpPr txBox="1"/>
-          <p:nvPr/>
-        </p:nvSpPr>
-        <p:spPr>
-          <a:xfrm>
-            <a:off x="822960" y="3291840"/>
-            <a:ext cx="4846320" cy="411480"/>
-          </a:xfrm>
-          <a:prstGeom prst="rect">
-            <a:avLst/>
-          </a:prstGeom>
-          <a:noFill/>
-        </p:spPr>
-        <p:txBody>
-          <a:bodyPr wrap="square" lIns="0" rIns="0" tIns="0" bIns="0" anchor="t">
-            <a:spAutoFit/>
-          </a:bodyPr>
-          <a:lstStyle/>
-          <a:p>
-            <a:pPr algn="l">
-              <a:lnSpc>
-                <a:spcPct val="135000"/>
-              </a:lnSpc>
-            </a:pPr>
-            <a:r>
-              <a:rPr sz="1100" b="0" i="0">
-                <a:solidFill>
-                  <a:srgbClr val="555F6D"/>
-                </a:solidFill>
-                <a:latin typeface="Helvetica Neue"/>
-              </a:rPr>
-              <a:t>Missed workout triggers a partial re-solve over remaining days.</a:t>
-            </a:r>
-          </a:p>
-        </p:txBody>
-      </p:sp>
-      <p:sp>
-        <p:nvSpPr>
-          <p:cNvPr id="13" name="TextBox 12"/>
-          <p:cNvSpPr txBox="1"/>
-          <p:nvPr/>
-        </p:nvSpPr>
-        <p:spPr>
-          <a:xfrm>
-            <a:off x="822960" y="3712464"/>
-            <a:ext cx="4846320" cy="310896"/>
-          </a:xfrm>
-          <a:prstGeom prst="rect">
-            <a:avLst/>
-          </a:prstGeom>
-          <a:noFill/>
-        </p:spPr>
-        <p:txBody>
-          <a:bodyPr wrap="square" lIns="0" rIns="0" tIns="0" bIns="0" anchor="t">
-            <a:spAutoFit/>
-          </a:bodyPr>
-          <a:lstStyle/>
-          <a:p>
-            <a:pPr algn="l">
-              <a:lnSpc>
-                <a:spcPct val="115000"/>
-              </a:lnSpc>
-            </a:pPr>
-            <a:r>
-              <a:rPr sz="1300" b="1" i="0">
-                <a:solidFill>
-                  <a:srgbClr val="181F2B"/>
-                </a:solidFill>
-                <a:latin typeface="Helvetica Neue"/>
-              </a:rPr>
-              <a:t>Real Penn Dining scrape</a:t>
-            </a:r>
-          </a:p>
-        </p:txBody>
-      </p:sp>
-      <p:sp>
-        <p:nvSpPr>
-          <p:cNvPr id="14" name="TextBox 13"/>
-          <p:cNvSpPr txBox="1"/>
-          <p:nvPr/>
-        </p:nvSpPr>
-        <p:spPr>
-          <a:xfrm>
-            <a:off x="822960" y="4005072"/>
-            <a:ext cx="4846320" cy="411480"/>
-          </a:xfrm>
-          <a:prstGeom prst="rect">
-            <a:avLst/>
-          </a:prstGeom>
-          <a:noFill/>
-        </p:spPr>
-        <p:txBody>
-          <a:bodyPr wrap="square" lIns="0" rIns="0" tIns="0" bIns="0" anchor="t">
-            <a:spAutoFit/>
-          </a:bodyPr>
-          <a:lstStyle/>
-          <a:p>
-            <a:pPr algn="l">
-              <a:lnSpc>
-                <a:spcPct val="135000"/>
-              </a:lnSpc>
-            </a:pPr>
-            <a:r>
-              <a:rPr sz="1100" b="0" i="0">
-                <a:solidFill>
-                  <a:srgbClr val="555F6D"/>
-                </a:solidFill>
-                <a:latin typeface="Helvetica Neue"/>
-              </a:rPr>
-              <a:t>Cookie-aware Playwright fetcher behind a feature flag.</a:t>
-            </a:r>
-          </a:p>
-        </p:txBody>
-      </p:sp>
-      <p:sp>
-        <p:nvSpPr>
-          <p:cNvPr id="15" name="TextBox 14"/>
-          <p:cNvSpPr txBox="1"/>
-          <p:nvPr/>
-        </p:nvSpPr>
-        <p:spPr>
-          <a:xfrm>
-            <a:off x="822960" y="4425696"/>
-            <a:ext cx="4846320" cy="310896"/>
-          </a:xfrm>
-          <a:prstGeom prst="rect">
-            <a:avLst/>
-          </a:prstGeom>
-          <a:noFill/>
-        </p:spPr>
-        <p:txBody>
-          <a:bodyPr wrap="square" lIns="0" rIns="0" tIns="0" bIns="0" anchor="t">
-            <a:spAutoFit/>
-          </a:bodyPr>
-          <a:lstStyle/>
-          <a:p>
-            <a:pPr algn="l">
-              <a:lnSpc>
-                <a:spcPct val="115000"/>
-              </a:lnSpc>
-            </a:pPr>
-            <a:r>
-              <a:rPr sz="1300" b="1" i="0">
-                <a:solidFill>
-                  <a:srgbClr val="181F2B"/>
-                </a:solidFill>
-                <a:latin typeface="Helvetica Neue"/>
-              </a:rPr>
-              <a:t>Hard per-meal protein floor</a:t>
-            </a:r>
-          </a:p>
-        </p:txBody>
-      </p:sp>
-      <p:sp>
-        <p:nvSpPr>
-          <p:cNvPr id="16" name="TextBox 15"/>
-          <p:cNvSpPr txBox="1"/>
-          <p:nvPr/>
-        </p:nvSpPr>
-        <p:spPr>
-          <a:xfrm>
-            <a:off x="822960" y="4718304"/>
-            <a:ext cx="4846320" cy="411480"/>
-          </a:xfrm>
-          <a:prstGeom prst="rect">
-            <a:avLst/>
-          </a:prstGeom>
-          <a:noFill/>
-        </p:spPr>
-        <p:txBody>
-          <a:bodyPr wrap="square" lIns="0" rIns="0" tIns="0" bIns="0" anchor="t">
-            <a:spAutoFit/>
-          </a:bodyPr>
-          <a:lstStyle/>
-          <a:p>
-            <a:pPr algn="l">
-              <a:lnSpc>
-                <a:spcPct val="135000"/>
-              </a:lnSpc>
-            </a:pPr>
-            <a:r>
-              <a:rPr sz="1100" b="0" i="0">
-                <a:solidFill>
-                  <a:srgbClr val="555F6D"/>
-                </a:solidFill>
-                <a:latin typeface="Helvetica Neue"/>
-              </a:rPr>
-              <a:t>Currently soft; promote in pantry mode for athlete users.</a:t>
-            </a:r>
-          </a:p>
-        </p:txBody>
-      </p:sp>
-      <p:sp>
-        <p:nvSpPr>
-          <p:cNvPr id="17" name="Rounded Rectangle 16"/>
-          <p:cNvSpPr/>
-          <p:nvPr/>
-        </p:nvSpPr>
-        <p:spPr>
-          <a:xfrm>
-            <a:off x="6245352" y="1691640"/>
-            <a:ext cx="5394960" cy="3566160"/>
-          </a:xfrm>
-          <a:prstGeom prst="roundRect">
-            <a:avLst>
-              <a:gd name="adj" fmla="val 6000"/>
-            </a:avLst>
-          </a:prstGeom>
-          <a:solidFill>
-            <a:srgbClr val="F1EEE6"/>
-          </a:solidFill>
-          <a:ln>
-            <a:noFill/>
-          </a:ln>
-          <a:effectLst/>
-        </p:spPr>
-        <p:style>
-          <a:lnRef idx="1">
-            <a:schemeClr val="accent1"/>
-          </a:lnRef>
-          <a:fillRef idx="3">
-            <a:schemeClr val="accent1"/>
-          </a:fillRef>
-          <a:effectRef idx="2">
-            <a:schemeClr val="accent1"/>
-          </a:effectRef>
-          <a:fontRef idx="minor">
-            <a:schemeClr val="lt1"/>
-          </a:fontRef>
-        </p:style>
-        <p:txBody>
-          <a:bodyPr rtlCol="0" anchor="ctr"/>
-          <a:lstStyle/>
-          <a:p>
-            <a:pPr algn="ctr"/>
-          </a:p>
-        </p:txBody>
-      </p:sp>
-      <p:sp>
-        <p:nvSpPr>
-          <p:cNvPr id="18" name="TextBox 17"/>
-          <p:cNvSpPr txBox="1"/>
-          <p:nvPr/>
-        </p:nvSpPr>
-        <p:spPr>
-          <a:xfrm>
-            <a:off x="6519672" y="1874520"/>
-            <a:ext cx="5394960" cy="365760"/>
-          </a:xfrm>
-          <a:prstGeom prst="rect">
-            <a:avLst/>
-          </a:prstGeom>
-          <a:noFill/>
-        </p:spPr>
-        <p:txBody>
-          <a:bodyPr wrap="square" lIns="0" rIns="0" tIns="0" bIns="0" anchor="t">
-            <a:spAutoFit/>
-          </a:bodyPr>
-          <a:lstStyle/>
-          <a:p>
-            <a:pPr algn="l">
-              <a:lnSpc>
-                <a:spcPct val="115000"/>
-              </a:lnSpc>
-            </a:pPr>
-            <a:r>
-              <a:rPr sz="1100" b="1" i="0">
-                <a:solidFill>
-                  <a:srgbClr val="1F6FB0"/>
-                </a:solidFill>
-                <a:latin typeface="Helvetica Neue"/>
-              </a:rPr>
-              <a:t>WHAT’S IN THE BOX</a:t>
-            </a:r>
-          </a:p>
-        </p:txBody>
-      </p:sp>
-      <p:sp>
-        <p:nvSpPr>
-          <p:cNvPr id="19" name="TextBox 18"/>
-          <p:cNvSpPr txBox="1"/>
-          <p:nvPr/>
-        </p:nvSpPr>
-        <p:spPr>
-          <a:xfrm>
-            <a:off x="6519672" y="2331720"/>
-            <a:ext cx="4846320" cy="365760"/>
-          </a:xfrm>
-          <a:prstGeom prst="rect">
-            <a:avLst/>
-          </a:prstGeom>
-          <a:noFill/>
-        </p:spPr>
-        <p:txBody>
-          <a:bodyPr wrap="square" lIns="0" rIns="0" tIns="0" bIns="0" anchor="t">
-            <a:spAutoFit/>
-          </a:bodyPr>
-          <a:lstStyle/>
-          <a:p>
-            <a:pPr algn="l">
-              <a:lnSpc>
-                <a:spcPct val="115000"/>
-              </a:lnSpc>
-            </a:pPr>
-            <a:r>
-              <a:rPr sz="1200" b="0" i="0">
-                <a:solidFill>
-                  <a:srgbClr val="181F2B"/>
-                </a:solidFill>
-                <a:latin typeface="Helvetica Neue"/>
-              </a:rPr>
-              <a:t>•  5,176 LOC src/  (≈ 2,000 LOC pure solver code)</a:t>
-            </a:r>
-          </a:p>
-        </p:txBody>
-      </p:sp>
-      <p:sp>
-        <p:nvSpPr>
-          <p:cNvPr id="20" name="TextBox 19"/>
-          <p:cNvSpPr txBox="1"/>
-          <p:nvPr/>
-        </p:nvSpPr>
-        <p:spPr>
-          <a:xfrm>
-            <a:off x="6519672" y="2697480"/>
-            <a:ext cx="4846320" cy="365760"/>
-          </a:xfrm>
-          <a:prstGeom prst="rect">
-            <a:avLst/>
-          </a:prstGeom>
-          <a:noFill/>
-        </p:spPr>
-        <p:txBody>
-          <a:bodyPr wrap="square" lIns="0" rIns="0" tIns="0" bIns="0" anchor="t">
-            <a:spAutoFit/>
-          </a:bodyPr>
-          <a:lstStyle/>
-          <a:p>
-            <a:pPr algn="l">
-              <a:lnSpc>
-                <a:spcPct val="115000"/>
-              </a:lnSpc>
-            </a:pPr>
-            <a:r>
-              <a:rPr sz="1200" b="0" i="0">
-                <a:solidFill>
-                  <a:srgbClr val="181F2B"/>
-                </a:solidFill>
-                <a:latin typeface="Helvetica Neue"/>
-              </a:rPr>
-              <a:t>•  37 unit tests, all passing</a:t>
-            </a:r>
-          </a:p>
-        </p:txBody>
-      </p:sp>
-      <p:sp>
-        <p:nvSpPr>
-          <p:cNvPr id="21" name="TextBox 20"/>
-          <p:cNvSpPr txBox="1"/>
-          <p:nvPr/>
-        </p:nvSpPr>
-        <p:spPr>
-          <a:xfrm>
-            <a:off x="6519672" y="3063240"/>
-            <a:ext cx="4846320" cy="365760"/>
-          </a:xfrm>
-          <a:prstGeom prst="rect">
-            <a:avLst/>
-          </a:prstGeom>
-          <a:noFill/>
-        </p:spPr>
-        <p:txBody>
-          <a:bodyPr wrap="square" lIns="0" rIns="0" tIns="0" bIns="0" anchor="t">
-            <a:spAutoFit/>
-          </a:bodyPr>
-          <a:lstStyle/>
-          <a:p>
-            <a:pPr algn="l">
-              <a:lnSpc>
-                <a:spcPct val="115000"/>
-              </a:lnSpc>
-            </a:pPr>
-            <a:r>
-              <a:rPr sz="1200" b="0" i="0">
-                <a:solidFill>
-                  <a:srgbClr val="181F2B"/>
-                </a:solidFill>
-                <a:latin typeface="Helvetica Neue"/>
-              </a:rPr>
-              <a:t>•  Parameterized instance generator (10 → 200 foods)</a:t>
-            </a:r>
-          </a:p>
-        </p:txBody>
-      </p:sp>
-      <p:sp>
-        <p:nvSpPr>
-          <p:cNvPr id="22" name="TextBox 21"/>
-          <p:cNvSpPr txBox="1"/>
-          <p:nvPr/>
-        </p:nvSpPr>
-        <p:spPr>
-          <a:xfrm>
-            <a:off x="6519672" y="3429000"/>
-            <a:ext cx="4846320" cy="365760"/>
-          </a:xfrm>
-          <a:prstGeom prst="rect">
-            <a:avLst/>
-          </a:prstGeom>
-          <a:noFill/>
-        </p:spPr>
-        <p:txBody>
-          <a:bodyPr wrap="square" lIns="0" rIns="0" tIns="0" bIns="0" anchor="t">
-            <a:spAutoFit/>
-          </a:bodyPr>
-          <a:lstStyle/>
-          <a:p>
-            <a:pPr algn="l">
-              <a:lnSpc>
-                <a:spcPct val="115000"/>
-              </a:lnSpc>
-            </a:pPr>
-            <a:r>
-              <a:rPr sz="1200" b="0" i="0">
-                <a:solidFill>
-                  <a:srgbClr val="181F2B"/>
-                </a:solidFill>
-                <a:latin typeface="Helvetica Neue"/>
-              </a:rPr>
-              <a:t>•  5 figure types × 3 sweep prefixes</a:t>
-            </a:r>
-          </a:p>
-        </p:txBody>
-      </p:sp>
-      <p:sp>
-        <p:nvSpPr>
-          <p:cNvPr id="23" name="TextBox 22"/>
-          <p:cNvSpPr txBox="1"/>
-          <p:nvPr/>
-        </p:nvSpPr>
-        <p:spPr>
-          <a:xfrm>
-            <a:off x="6519672" y="3794760"/>
-            <a:ext cx="4846320" cy="365760"/>
-          </a:xfrm>
-          <a:prstGeom prst="rect">
-            <a:avLst/>
-          </a:prstGeom>
-          <a:noFill/>
-        </p:spPr>
-        <p:txBody>
-          <a:bodyPr wrap="square" lIns="0" rIns="0" tIns="0" bIns="0" anchor="t">
-            <a:spAutoFit/>
-          </a:bodyPr>
-          <a:lstStyle/>
-          <a:p>
-            <a:pPr algn="l">
-              <a:lnSpc>
-                <a:spcPct val="115000"/>
-              </a:lnSpc>
-            </a:pPr>
-            <a:r>
-              <a:rPr sz="1200" b="0" i="0">
-                <a:solidFill>
-                  <a:srgbClr val="181F2B"/>
-                </a:solidFill>
-                <a:latin typeface="Helvetica Neue"/>
-              </a:rPr>
-              <a:t>•  Penn Dining + USDA + curated sample data</a:t>
-            </a:r>
-          </a:p>
-        </p:txBody>
-      </p:sp>
-      <p:sp>
-        <p:nvSpPr>
-          <p:cNvPr id="24" name="TextBox 23"/>
-          <p:cNvSpPr txBox="1"/>
-          <p:nvPr/>
-        </p:nvSpPr>
-        <p:spPr>
-          <a:xfrm>
-            <a:off x="6519672" y="4160520"/>
-            <a:ext cx="4846320" cy="365760"/>
-          </a:xfrm>
-          <a:prstGeom prst="rect">
-            <a:avLst/>
-          </a:prstGeom>
-          <a:noFill/>
-        </p:spPr>
-        <p:txBody>
-          <a:bodyPr wrap="square" lIns="0" rIns="0" tIns="0" bIns="0" anchor="t">
-            <a:spAutoFit/>
-          </a:bodyPr>
-          <a:lstStyle/>
-          <a:p>
-            <a:pPr algn="l">
-              <a:lnSpc>
-                <a:spcPct val="115000"/>
-              </a:lnSpc>
-            </a:pPr>
-            <a:r>
-              <a:rPr sz="1200" b="0" i="0">
-                <a:solidFill>
-                  <a:srgbClr val="181F2B"/>
-                </a:solidFill>
-                <a:latin typeface="Helvetica Neue"/>
-              </a:rPr>
-              <a:t>•  Streamlit UI + CLI + JSON presets</a:t>
-            </a:r>
-          </a:p>
-        </p:txBody>
-      </p:sp>
-      <p:sp>
-        <p:nvSpPr>
-          <p:cNvPr id="25" name="TextBox 24"/>
-          <p:cNvSpPr txBox="1"/>
-          <p:nvPr/>
-        </p:nvSpPr>
-        <p:spPr>
-          <a:xfrm>
-            <a:off x="6519672" y="4526280"/>
-            <a:ext cx="4846320" cy="365760"/>
-          </a:xfrm>
-          <a:prstGeom prst="rect">
-            <a:avLst/>
-          </a:prstGeom>
-          <a:noFill/>
-        </p:spPr>
-        <p:txBody>
-          <a:bodyPr wrap="square" lIns="0" rIns="0" tIns="0" bIns="0" anchor="t">
-            <a:spAutoFit/>
-          </a:bodyPr>
-          <a:lstStyle/>
-          <a:p>
-            <a:pPr algn="l">
-              <a:lnSpc>
-                <a:spcPct val="115000"/>
-              </a:lnSpc>
-            </a:pPr>
-            <a:r>
-              <a:rPr sz="1200" b="0" i="0">
-                <a:solidFill>
-                  <a:srgbClr val="181F2B"/>
-                </a:solidFill>
-                <a:latin typeface="Helvetica Neue"/>
-              </a:rPr>
-              <a:t>•  Final report — 456 lines of analysis</a:t>
-            </a:r>
-          </a:p>
-        </p:txBody>
-      </p:sp>
-      <p:sp>
-        <p:nvSpPr>
-          <p:cNvPr id="26" name="Rounded Rectangle 25"/>
-          <p:cNvSpPr/>
-          <p:nvPr/>
-        </p:nvSpPr>
-        <p:spPr>
-          <a:xfrm>
-            <a:off x="548640" y="5532120"/>
-            <a:ext cx="11091672" cy="1005840"/>
-          </a:xfrm>
-          <a:prstGeom prst="roundRect">
-            <a:avLst>
-              <a:gd name="adj" fmla="val 6000"/>
-            </a:avLst>
-          </a:prstGeom>
-          <a:solidFill>
-            <a:srgbClr val="181F2B"/>
-          </a:solidFill>
-          <a:ln>
-            <a:noFill/>
-          </a:ln>
-          <a:effectLst/>
-        </p:spPr>
-        <p:style>
-          <a:lnRef idx="1">
-            <a:schemeClr val="accent1"/>
-          </a:lnRef>
-          <a:fillRef idx="3">
-            <a:schemeClr val="accent1"/>
-          </a:fillRef>
-          <a:effectRef idx="2">
-            <a:schemeClr val="accent1"/>
-          </a:effectRef>
-          <a:fontRef idx="minor">
-            <a:schemeClr val="lt1"/>
-          </a:fontRef>
-        </p:style>
-        <p:txBody>
-          <a:bodyPr rtlCol="0" anchor="ctr"/>
-          <a:lstStyle/>
-          <a:p>
-            <a:pPr algn="ctr"/>
-          </a:p>
-        </p:txBody>
-      </p:sp>
-      <p:sp>
-        <p:nvSpPr>
-          <p:cNvPr id="27" name="TextBox 26"/>
-          <p:cNvSpPr txBox="1"/>
-          <p:nvPr/>
-        </p:nvSpPr>
-        <p:spPr>
-          <a:xfrm>
-            <a:off x="548640" y="5696712"/>
-            <a:ext cx="11091672" cy="365760"/>
-          </a:xfrm>
-          <a:prstGeom prst="rect">
-            <a:avLst/>
-          </a:prstGeom>
-          <a:noFill/>
-        </p:spPr>
-        <p:txBody>
-          <a:bodyPr wrap="square" lIns="0" rIns="0" tIns="0" bIns="0" anchor="t">
-            <a:spAutoFit/>
-          </a:bodyPr>
-          <a:lstStyle/>
-          <a:p>
-            <a:pPr algn="ctr">
-              <a:lnSpc>
-                <a:spcPct val="115000"/>
-              </a:lnSpc>
-            </a:pPr>
-            <a:r>
-              <a:rPr sz="2200" b="1" i="0">
-                <a:solidFill>
-                  <a:srgbClr val="FAFAF7"/>
-                </a:solidFill>
-                <a:latin typeface="Helvetica Neue"/>
-              </a:rPr>
-              <a:t>Thank you  —  questions?</a:t>
-            </a:r>
-          </a:p>
-        </p:txBody>
-      </p:sp>
-      <p:sp>
-        <p:nvSpPr>
-          <p:cNvPr id="28" name="TextBox 27"/>
-          <p:cNvSpPr txBox="1"/>
-          <p:nvPr/>
-        </p:nvSpPr>
-        <p:spPr>
-          <a:xfrm>
-            <a:off x="548640" y="6126480"/>
-            <a:ext cx="11091672" cy="365760"/>
-          </a:xfrm>
-          <a:prstGeom prst="rect">
-            <a:avLst/>
-          </a:prstGeom>
-          <a:noFill/>
-        </p:spPr>
-        <p:txBody>
-          <a:bodyPr wrap="square" lIns="0" rIns="0" tIns="0" bIns="0" anchor="t">
-            <a:spAutoFit/>
-          </a:bodyPr>
-          <a:lstStyle/>
-          <a:p>
-            <a:pPr algn="ctr">
-              <a:lnSpc>
-                <a:spcPct val="115000"/>
-              </a:lnSpc>
-            </a:pPr>
-            <a:r>
-              <a:rPr sz="1200" b="0" i="0">
-                <a:solidFill>
-                  <a:srgbClr val="CFCFCF"/>
-                </a:solidFill>
-                <a:latin typeface="Helvetica Neue"/>
-              </a:rPr>
-              <a:t>github.com/aryan-jeena/CIS1921Project   ·   Aryan Jeena &amp; Aadithya Srinivasan</a:t>
             </a:r>
           </a:p>
         </p:txBody>
@@ -4557,7 +3464,7 @@
           <a:p>
             <a:pPr algn="l">
               <a:lnSpc>
-                <a:spcPct val="115000"/>
+                <a:spcPct val="120000"/>
               </a:lnSpc>
             </a:pPr>
             <a:r>
@@ -4581,7 +3488,7 @@
         <p:spPr>
           <a:xfrm>
             <a:off x="548640" y="685800"/>
-            <a:ext cx="10972800" cy="640080"/>
+            <a:ext cx="11091672" cy="822960"/>
           </a:xfrm>
           <a:prstGeom prst="rect">
             <a:avLst/>
@@ -4596,17 +3503,17 @@
           <a:p>
             <a:pPr algn="l">
               <a:lnSpc>
-                <a:spcPct val="115000"/>
-              </a:lnSpc>
-            </a:pPr>
-            <a:r>
-              <a:rPr sz="3000" b="1" i="0">
+                <a:spcPct val="110000"/>
+              </a:lnSpc>
+            </a:pPr>
+            <a:r>
+              <a:rPr sz="2800" b="1" i="0">
                 <a:solidFill>
                   <a:srgbClr val="181F2B"/>
                 </a:solidFill>
                 <a:latin typeface="Helvetica Neue"/>
               </a:rPr>
-              <a:t>Real students don’t plan one dimension at a time.</a:t>
+              <a:t>Real students don’t plan one thing at a time.</a:t>
             </a:r>
           </a:p>
         </p:txBody>
@@ -4619,7 +3526,7 @@
         </p:nvCxnSpPr>
         <p:spPr>
           <a:xfrm>
-            <a:off x="548640" y="1417320"/>
+            <a:off x="548640" y="1508760"/>
             <a:ext cx="11091672" cy="0"/>
           </a:xfrm>
           <a:prstGeom prst="line">
@@ -4670,7 +3577,7 @@
           <a:p>
             <a:pPr algn="r">
               <a:lnSpc>
-                <a:spcPct val="115000"/>
+                <a:spcPct val="120000"/>
               </a:lnSpc>
             </a:pPr>
             <a:r>
@@ -4680,7 +3587,7 @@
                 </a:solidFill>
                 <a:latin typeface="Helvetica Neue"/>
               </a:rPr>
-              <a:t>2 / 10</a:t>
+              <a:t>2 / 9</a:t>
             </a:r>
           </a:p>
         </p:txBody>
@@ -4693,8 +3600,8 @@
         </p:nvSpPr>
         <p:spPr>
           <a:xfrm>
-            <a:off x="548640" y="1691640"/>
-            <a:ext cx="11155680" cy="2103120"/>
+            <a:off x="548640" y="1828800"/>
+            <a:ext cx="11155680" cy="1828800"/>
           </a:xfrm>
           <a:prstGeom prst="rect">
             <a:avLst/>
@@ -4709,31 +3616,70 @@
           <a:p>
             <a:pPr algn="l">
               <a:lnSpc>
-                <a:spcPct val="135000"/>
-              </a:lnSpc>
-            </a:pPr>
-            <a:r>
-              <a:rPr sz="2000" b="0" i="0">
+                <a:spcPct val="130000"/>
+              </a:lnSpc>
+            </a:pPr>
+            <a:r>
+              <a:rPr sz="2200" b="1" i="0">
                 <a:solidFill>
                   <a:srgbClr val="181F2B"/>
                 </a:solidFill>
                 <a:latin typeface="Helvetica Neue"/>
               </a:rPr>
-              <a:t>Training adherence depends on more than macros. WHEN you eat, WHEN you lift, and WHEN you sleep all matter — and real students juggle class schedules, dining-hall windows, budgets, and recovery rules at the same time.</a:t>
-            </a:r>
-          </a:p>
-        </p:txBody>
-      </p:sp>
-      <p:sp>
-        <p:nvSpPr>
-          <p:cNvPr id="8" name="Rounded Rectangle 7"/>
+              <a:t>If you actually want to train, you have to plan workouts, meals, and sleep at the same time. They depend on each other.</a:t>
+            </a:r>
+          </a:p>
+        </p:txBody>
+      </p:sp>
+      <p:sp>
+        <p:nvSpPr>
+          <p:cNvPr id="8" name="TextBox 7"/>
+          <p:cNvSpPr txBox="1"/>
+          <p:nvPr/>
+        </p:nvSpPr>
+        <p:spPr>
+          <a:xfrm>
+            <a:off x="548640" y="3749039"/>
+            <a:ext cx="11155680" cy="914400"/>
+          </a:xfrm>
+          <a:prstGeom prst="rect">
+            <a:avLst/>
+          </a:prstGeom>
+          <a:noFill/>
+        </p:spPr>
+        <p:txBody>
+          <a:bodyPr wrap="square" lIns="0" rIns="0" tIns="0" bIns="0" anchor="t">
+            <a:spAutoFit/>
+          </a:bodyPr>
+          <a:lstStyle/>
+          <a:p>
+            <a:pPr algn="l">
+              <a:lnSpc>
+                <a:spcPct val="130000"/>
+              </a:lnSpc>
+            </a:pPr>
+            <a:r>
+              <a:rPr sz="1800" b="0" i="0">
+                <a:solidFill>
+                  <a:srgbClr val="555F6D"/>
+                </a:solidFill>
+                <a:latin typeface="Helvetica Neue"/>
+              </a:rPr>
+              <a:t>But the standard tools split the problem in half.</a:t>
+            </a:r>
+          </a:p>
+        </p:txBody>
+      </p:sp>
+      <p:sp>
+        <p:nvSpPr>
+          <p:cNvPr id="9" name="Rounded Rectangle 8"/>
           <p:cNvSpPr/>
           <p:nvPr/>
         </p:nvSpPr>
         <p:spPr>
           <a:xfrm>
-            <a:off x="548640" y="4023360"/>
-            <a:ext cx="11091672" cy="2103120"/>
+            <a:off x="548640" y="4526280"/>
+            <a:ext cx="11091672" cy="1828800"/>
           </a:xfrm>
           <a:prstGeom prst="roundRect">
             <a:avLst>
@@ -4772,13 +3718,13 @@
       </p:sp>
       <p:sp>
         <p:nvSpPr>
-          <p:cNvPr id="9" name="TextBox 8"/>
-          <p:cNvSpPr txBox="1"/>
-          <p:nvPr/>
-        </p:nvSpPr>
-        <p:spPr>
-          <a:xfrm>
-            <a:off x="868680" y="4251960"/>
+          <p:cNvPr id="10" name="TextBox 9"/>
+          <p:cNvSpPr txBox="1"/>
+          <p:nvPr/>
+        </p:nvSpPr>
+        <p:spPr>
+          <a:xfrm>
+            <a:off x="868680" y="4754880"/>
             <a:ext cx="10515600" cy="457200"/>
           </a:xfrm>
           <a:prstGeom prst="rect">
@@ -4794,7 +3740,7 @@
           <a:p>
             <a:pPr algn="l">
               <a:lnSpc>
-                <a:spcPct val="115000"/>
+                <a:spcPct val="120000"/>
               </a:lnSpc>
             </a:pPr>
             <a:r>
@@ -4804,21 +3750,21 @@
                 </a:solidFill>
                 <a:latin typeface="Helvetica Neue"/>
               </a:rPr>
-              <a:t>The standard “meal planner + calendar app” split</a:t>
-            </a:r>
-          </a:p>
-        </p:txBody>
-      </p:sp>
-      <p:sp>
-        <p:nvSpPr>
-          <p:cNvPr id="10" name="TextBox 9"/>
-          <p:cNvSpPr txBox="1"/>
-          <p:nvPr/>
-        </p:nvSpPr>
-        <p:spPr>
-          <a:xfrm>
-            <a:off x="868680" y="4800600"/>
-            <a:ext cx="10515600" cy="1463040"/>
+              <a:t>What you usually get</a:t>
+            </a:r>
+          </a:p>
+        </p:txBody>
+      </p:sp>
+      <p:sp>
+        <p:nvSpPr>
+          <p:cNvPr id="11" name="TextBox 10"/>
+          <p:cNvSpPr txBox="1"/>
+          <p:nvPr/>
+        </p:nvSpPr>
+        <p:spPr>
+          <a:xfrm>
+            <a:off x="868680" y="5212080"/>
+            <a:ext cx="10515600" cy="1371600"/>
           </a:xfrm>
           <a:prstGeom prst="rect">
             <a:avLst/>
@@ -4843,46 +3789,7 @@
                 </a:solidFill>
                 <a:latin typeface="Helvetica Neue"/>
               </a:rPr>
-              <a:t>Solves each dimension independently and produces plans that are technically compliant but practically useless — e.g. a meal prep that finishes 15 minutes before a heavy squat session, or a schedule that hits macros only by ignoring the dining-hall window.</a:t>
-            </a:r>
-          </a:p>
-        </p:txBody>
-      </p:sp>
-      <p:sp>
-        <p:nvSpPr>
-          <p:cNvPr id="11" name="TextBox 10"/>
-          <p:cNvSpPr txBox="1"/>
-          <p:nvPr/>
-        </p:nvSpPr>
-        <p:spPr>
-          <a:xfrm>
-            <a:off x="868680" y="5806440"/>
-            <a:ext cx="10058400" cy="274320"/>
-          </a:xfrm>
-          <a:prstGeom prst="rect">
-            <a:avLst/>
-          </a:prstGeom>
-          <a:noFill/>
-        </p:spPr>
-        <p:txBody>
-          <a:bodyPr wrap="square" lIns="0" rIns="0" tIns="0" bIns="0" anchor="t">
-            <a:spAutoFit/>
-          </a:bodyPr>
-          <a:lstStyle/>
-          <a:p>
-            <a:pPr algn="l">
-              <a:lnSpc>
-                <a:spcPct val="115000"/>
-              </a:lnSpc>
-            </a:pPr>
-            <a:r>
-              <a:rPr sz="1300" b="1" i="0">
-                <a:solidFill>
-                  <a:srgbClr val="E06B1F"/>
-                </a:solidFill>
-                <a:latin typeface="Helvetica Neue"/>
-              </a:rPr>
-              <a:t>→ The joint formulation is the whole point.</a:t>
+              <a:t>A meal-tracking app picks food. A calendar app schedules events. Neither one knows about the other, so you end up with weeks that look fine on paper — meal prep finishes 15 minutes before a heavy squat session, or your only free hour at the dining hall is right after a hard workout when you can’t eat much. The plan is technically valid but practically useless.</a:t>
             </a:r>
           </a:p>
         </p:txBody>
@@ -4972,7 +3879,7 @@
           <a:p>
             <a:pPr algn="l">
               <a:lnSpc>
-                <a:spcPct val="115000"/>
+                <a:spcPct val="120000"/>
               </a:lnSpc>
             </a:pPr>
             <a:r>
@@ -4982,7 +3889,7 @@
                 </a:solidFill>
                 <a:latin typeface="Helvetica Neue"/>
               </a:rPr>
-              <a:t>2 · PROJECT FORMULATION</a:t>
+              <a:t>2 · WHAT WE BUILT</a:t>
             </a:r>
           </a:p>
         </p:txBody>
@@ -4996,7 +3903,7 @@
         <p:spPr>
           <a:xfrm>
             <a:off x="548640" y="685800"/>
-            <a:ext cx="10972800" cy="640080"/>
+            <a:ext cx="11091672" cy="822960"/>
           </a:xfrm>
           <a:prstGeom prst="rect">
             <a:avLst/>
@@ -5011,17 +3918,17 @@
           <a:p>
             <a:pPr algn="l">
               <a:lnSpc>
-                <a:spcPct val="115000"/>
-              </a:lnSpc>
-            </a:pPr>
-            <a:r>
-              <a:rPr sz="3000" b="1" i="0">
+                <a:spcPct val="110000"/>
+              </a:lnSpc>
+            </a:pPr>
+            <a:r>
+              <a:rPr sz="2800" b="1" i="0">
                 <a:solidFill>
                   <a:srgbClr val="181F2B"/>
                 </a:solidFill>
                 <a:latin typeface="Helvetica Neue"/>
               </a:rPr>
-              <a:t>Time grid, decision variables, hard + soft constraints.</a:t>
+              <a:t>Four optimizers, all on the same problem, so we can compare them fairly.</a:t>
             </a:r>
           </a:p>
         </p:txBody>
@@ -5034,7 +3941,7 @@
         </p:nvCxnSpPr>
         <p:spPr>
           <a:xfrm>
-            <a:off x="548640" y="1417320"/>
+            <a:off x="548640" y="1508760"/>
             <a:ext cx="11091672" cy="0"/>
           </a:xfrm>
           <a:prstGeom prst="line">
@@ -5085,7 +3992,7 @@
           <a:p>
             <a:pPr algn="r">
               <a:lnSpc>
-                <a:spcPct val="115000"/>
+                <a:spcPct val="120000"/>
               </a:lnSpc>
             </a:pPr>
             <a:r>
@@ -5095,21 +4002,60 @@
                 </a:solidFill>
                 <a:latin typeface="Helvetica Neue"/>
               </a:rPr>
-              <a:t>3 / 10</a:t>
-            </a:r>
-          </a:p>
-        </p:txBody>
-      </p:sp>
-      <p:sp>
-        <p:nvSpPr>
-          <p:cNvPr id="7" name="Rounded Rectangle 6"/>
+              <a:t>3 / 9</a:t>
+            </a:r>
+          </a:p>
+        </p:txBody>
+      </p:sp>
+      <p:sp>
+        <p:nvSpPr>
+          <p:cNvPr id="7" name="TextBox 6"/>
+          <p:cNvSpPr txBox="1"/>
+          <p:nvPr/>
+        </p:nvSpPr>
+        <p:spPr>
+          <a:xfrm>
+            <a:off x="548640" y="1783080"/>
+            <a:ext cx="11091672" cy="548640"/>
+          </a:xfrm>
+          <a:prstGeom prst="rect">
+            <a:avLst/>
+          </a:prstGeom>
+          <a:noFill/>
+        </p:spPr>
+        <p:txBody>
+          <a:bodyPr wrap="square" lIns="0" rIns="0" tIns="0" bIns="0" anchor="t">
+            <a:spAutoFit/>
+          </a:bodyPr>
+          <a:lstStyle/>
+          <a:p>
+            <a:pPr algn="l">
+              <a:lnSpc>
+                <a:spcPct val="140000"/>
+              </a:lnSpc>
+            </a:pPr>
+            <a:r>
+              <a:rPr sz="1400" b="0" i="0">
+                <a:solidFill>
+                  <a:srgbClr val="555F6D"/>
+                </a:solidFill>
+                <a:latin typeface="Helvetica Neue"/>
+              </a:rPr>
+              <a:t>Each one accepts the same inputs (the user, the food list, the workout list) and returns the same shape of output.</a:t>
+            </a:r>
+          </a:p>
+        </p:txBody>
+      </p:sp>
+      <p:sp>
+        <p:nvSpPr>
+          <p:cNvPr id="8" name="Rounded Rectangle 7"/>
           <p:cNvSpPr/>
           <p:nvPr/>
         </p:nvSpPr>
         <p:spPr>
           <a:xfrm>
-            <a:off x="548640" y="1691640"/>
-            <a:ext cx="5394960" cy="4572000"/>
+            <a:off x="548640" y="2468880"/>
+            <a:ext cx="2697480" cy="3840480"/>
           </a:xfrm>
           <a:prstGeom prst="roundRect">
             <a:avLst>
@@ -5148,14 +4094,14 @@
       </p:sp>
       <p:sp>
         <p:nvSpPr>
-          <p:cNvPr id="8" name="TextBox 7"/>
-          <p:cNvSpPr txBox="1"/>
-          <p:nvPr/>
-        </p:nvSpPr>
-        <p:spPr>
-          <a:xfrm>
-            <a:off x="822960" y="1874520"/>
-            <a:ext cx="5394960" cy="365760"/>
+          <p:cNvPr id="9" name="TextBox 8"/>
+          <p:cNvSpPr txBox="1"/>
+          <p:nvPr/>
+        </p:nvSpPr>
+        <p:spPr>
+          <a:xfrm>
+            <a:off x="777240" y="2651760"/>
+            <a:ext cx="2697480" cy="365760"/>
           </a:xfrm>
           <a:prstGeom prst="rect">
             <a:avLst/>
@@ -5170,31 +4116,109 @@
           <a:p>
             <a:pPr algn="l">
               <a:lnSpc>
-                <a:spcPct val="115000"/>
-              </a:lnSpc>
-            </a:pPr>
-            <a:r>
-              <a:rPr sz="1100" b="1" i="0">
+                <a:spcPct val="120000"/>
+              </a:lnSpc>
+            </a:pPr>
+            <a:r>
+              <a:rPr sz="2200" b="1" i="0">
+                <a:solidFill>
+                  <a:srgbClr val="E06B1F"/>
+                </a:solidFill>
+                <a:latin typeface="Helvetica Neue"/>
+              </a:rPr>
+              <a:t>1.</a:t>
+            </a:r>
+          </a:p>
+        </p:txBody>
+      </p:sp>
+      <p:sp>
+        <p:nvSpPr>
+          <p:cNvPr id="10" name="TextBox 9"/>
+          <p:cNvSpPr txBox="1"/>
+          <p:nvPr/>
+        </p:nvSpPr>
+        <p:spPr>
+          <a:xfrm>
+            <a:off x="777240" y="3108960"/>
+            <a:ext cx="2423160" cy="457200"/>
+          </a:xfrm>
+          <a:prstGeom prst="rect">
+            <a:avLst/>
+          </a:prstGeom>
+          <a:noFill/>
+        </p:spPr>
+        <p:txBody>
+          <a:bodyPr wrap="square" lIns="0" rIns="0" tIns="0" bIns="0" anchor="t">
+            <a:spAutoFit/>
+          </a:bodyPr>
+          <a:lstStyle/>
+          <a:p>
+            <a:pPr algn="l">
+              <a:lnSpc>
+                <a:spcPct val="120000"/>
+              </a:lnSpc>
+            </a:pPr>
+            <a:r>
+              <a:rPr sz="1500" b="1" i="0">
+                <a:solidFill>
+                  <a:srgbClr val="181F2B"/>
+                </a:solidFill>
+                <a:latin typeface="Helvetica Neue"/>
+              </a:rPr>
+              <a:t>Nutrition only</a:t>
+            </a:r>
+          </a:p>
+        </p:txBody>
+      </p:sp>
+      <p:sp>
+        <p:nvSpPr>
+          <p:cNvPr id="11" name="TextBox 10"/>
+          <p:cNvSpPr txBox="1"/>
+          <p:nvPr/>
+        </p:nvSpPr>
+        <p:spPr>
+          <a:xfrm>
+            <a:off x="777240" y="3520440"/>
+            <a:ext cx="2423160" cy="365760"/>
+          </a:xfrm>
+          <a:prstGeom prst="rect">
+            <a:avLst/>
+          </a:prstGeom>
+          <a:noFill/>
+        </p:spPr>
+        <p:txBody>
+          <a:bodyPr wrap="square" lIns="0" rIns="0" tIns="0" bIns="0" anchor="t">
+            <a:spAutoFit/>
+          </a:bodyPr>
+          <a:lstStyle/>
+          <a:p>
+            <a:pPr algn="l">
+              <a:lnSpc>
+                <a:spcPct val="120000"/>
+              </a:lnSpc>
+            </a:pPr>
+            <a:r>
+              <a:rPr sz="1000" b="0" i="1">
                 <a:solidFill>
                   <a:srgbClr val="1F6FB0"/>
                 </a:solidFill>
                 <a:latin typeface="Helvetica Neue"/>
               </a:rPr>
-              <a:t>DOMAIN</a:t>
-            </a:r>
-          </a:p>
-        </p:txBody>
-      </p:sp>
-      <p:sp>
-        <p:nvSpPr>
-          <p:cNvPr id="9" name="TextBox 8"/>
-          <p:cNvSpPr txBox="1"/>
-          <p:nvPr/>
-        </p:nvSpPr>
-        <p:spPr>
-          <a:xfrm>
-            <a:off x="822960" y="2194560"/>
-            <a:ext cx="5394960" cy="457200"/>
+              <a:t>LP / MIP</a:t>
+            </a:r>
+          </a:p>
+        </p:txBody>
+      </p:sp>
+      <p:sp>
+        <p:nvSpPr>
+          <p:cNvPr id="12" name="TextBox 11"/>
+          <p:cNvSpPr txBox="1"/>
+          <p:nvPr/>
+        </p:nvSpPr>
+        <p:spPr>
+          <a:xfrm>
+            <a:off x="777240" y="3886200"/>
+            <a:ext cx="2423160" cy="2286000"/>
           </a:xfrm>
           <a:prstGeom prst="rect">
             <a:avLst/>
@@ -5209,304 +4233,31 @@
           <a:p>
             <a:pPr algn="l">
               <a:lnSpc>
-                <a:spcPct val="115000"/>
-              </a:lnSpc>
-            </a:pPr>
-            <a:r>
-              <a:rPr sz="1500" b="1" i="0">
-                <a:solidFill>
-                  <a:srgbClr val="181F2B"/>
-                </a:solidFill>
-                <a:latin typeface="Helvetica Neue"/>
-              </a:rPr>
-              <a:t>7 days × 48 half-hour slots = 336 slots/week</a:t>
-            </a:r>
-          </a:p>
-        </p:txBody>
-      </p:sp>
-      <p:sp>
-        <p:nvSpPr>
-          <p:cNvPr id="10" name="TextBox 9"/>
-          <p:cNvSpPr txBox="1"/>
-          <p:nvPr/>
-        </p:nvSpPr>
-        <p:spPr>
-          <a:xfrm>
-            <a:off x="822960" y="2743200"/>
-            <a:ext cx="4846320" cy="1280160"/>
-          </a:xfrm>
-          <a:prstGeom prst="rect">
-            <a:avLst/>
-          </a:prstGeom>
-          <a:noFill/>
-        </p:spPr>
-        <p:txBody>
-          <a:bodyPr wrap="square" lIns="0" rIns="0" tIns="0" bIns="0" anchor="t">
-            <a:spAutoFit/>
-          </a:bodyPr>
-          <a:lstStyle/>
-          <a:p>
-            <a:pPr algn="l">
-              <a:lnSpc>
-                <a:spcPct val="140000"/>
-              </a:lnSpc>
-            </a:pPr>
-            <a:r>
-              <a:rPr sz="1300" b="0" i="0">
+                <a:spcPct val="145000"/>
+              </a:lnSpc>
+            </a:pPr>
+            <a:r>
+              <a:rPr sz="1100" b="0" i="0">
                 <a:solidFill>
                   <a:srgbClr val="555F6D"/>
                 </a:solidFill>
                 <a:latin typeface="Helvetica Neue"/>
               </a:rPr>
-              <a:t>Everything in integers (cents, grams, slots). CP-SAT requires integer coefficients and integer arithmetic also keeps the unit tests reproducible across runs.</a:t>
-            </a:r>
-          </a:p>
-        </p:txBody>
-      </p:sp>
-      <p:sp>
-        <p:nvSpPr>
-          <p:cNvPr id="11" name="TextBox 10"/>
-          <p:cNvSpPr txBox="1"/>
-          <p:nvPr/>
-        </p:nvSpPr>
-        <p:spPr>
-          <a:xfrm>
-            <a:off x="822960" y="4069080"/>
-            <a:ext cx="5394960" cy="365760"/>
-          </a:xfrm>
-          <a:prstGeom prst="rect">
-            <a:avLst/>
-          </a:prstGeom>
-          <a:noFill/>
-        </p:spPr>
-        <p:txBody>
-          <a:bodyPr wrap="square" lIns="0" rIns="0" tIns="0" bIns="0" anchor="t">
-            <a:spAutoFit/>
-          </a:bodyPr>
-          <a:lstStyle/>
-          <a:p>
-            <a:pPr algn="l">
-              <a:lnSpc>
-                <a:spcPct val="115000"/>
-              </a:lnSpc>
-            </a:pPr>
-            <a:r>
-              <a:rPr sz="1100" b="1" i="0">
-                <a:solidFill>
-                  <a:srgbClr val="1F6FB0"/>
-                </a:solidFill>
-                <a:latin typeface="Helvetica Neue"/>
-              </a:rPr>
-              <a:t>DECISION VARIABLES (joint model)</a:t>
-            </a:r>
-          </a:p>
-        </p:txBody>
-      </p:sp>
-      <p:sp>
-        <p:nvSpPr>
-          <p:cNvPr id="12" name="TextBox 11"/>
-          <p:cNvSpPr txBox="1"/>
-          <p:nvPr/>
-        </p:nvSpPr>
-        <p:spPr>
-          <a:xfrm>
-            <a:off x="822960" y="4389120"/>
-            <a:ext cx="4846320" cy="310896"/>
-          </a:xfrm>
-          <a:prstGeom prst="rect">
-            <a:avLst/>
-          </a:prstGeom>
-          <a:noFill/>
-        </p:spPr>
-        <p:txBody>
-          <a:bodyPr wrap="square" lIns="0" rIns="0" tIns="0" bIns="0" anchor="t">
-            <a:spAutoFit/>
-          </a:bodyPr>
-          <a:lstStyle/>
-          <a:p>
-            <a:pPr algn="l">
-              <a:lnSpc>
-                <a:spcPct val="115000"/>
-              </a:lnSpc>
-            </a:pPr>
-            <a:r>
-              <a:rPr sz="1200" b="0" i="0">
-                <a:solidFill>
-                  <a:srgbClr val="181F2B"/>
-                </a:solidFill>
-                <a:latin typeface="Helvetica Neue"/>
-              </a:rPr>
-              <a:t>•  serve[d, m, f] — int servings of food f in meal m on day d</a:t>
-            </a:r>
-          </a:p>
-        </p:txBody>
-      </p:sp>
-      <p:sp>
-        <p:nvSpPr>
-          <p:cNvPr id="13" name="TextBox 12"/>
-          <p:cNvSpPr txBox="1"/>
-          <p:nvPr/>
-        </p:nvSpPr>
-        <p:spPr>
-          <a:xfrm>
-            <a:off x="822960" y="4700016"/>
-            <a:ext cx="4846320" cy="310896"/>
-          </a:xfrm>
-          <a:prstGeom prst="rect">
-            <a:avLst/>
-          </a:prstGeom>
-          <a:noFill/>
-        </p:spPr>
-        <p:txBody>
-          <a:bodyPr wrap="square" lIns="0" rIns="0" tIns="0" bIns="0" anchor="t">
-            <a:spAutoFit/>
-          </a:bodyPr>
-          <a:lstStyle/>
-          <a:p>
-            <a:pPr algn="l">
-              <a:lnSpc>
-                <a:spcPct val="115000"/>
-              </a:lnSpc>
-            </a:pPr>
-            <a:r>
-              <a:rPr sz="1200" b="0" i="0">
-                <a:solidFill>
-                  <a:srgbClr val="181F2B"/>
-                </a:solidFill>
-                <a:latin typeface="Helvetica Neue"/>
-              </a:rPr>
-              <a:t>•  meal_active[d, m] — boolean, reified to total servings ≥ 1</a:t>
-            </a:r>
-          </a:p>
-        </p:txBody>
-      </p:sp>
-      <p:sp>
-        <p:nvSpPr>
-          <p:cNvPr id="14" name="TextBox 13"/>
-          <p:cNvSpPr txBox="1"/>
-          <p:nvPr/>
-        </p:nvSpPr>
-        <p:spPr>
-          <a:xfrm>
-            <a:off x="822960" y="5010912"/>
-            <a:ext cx="4846320" cy="310896"/>
-          </a:xfrm>
-          <a:prstGeom prst="rect">
-            <a:avLst/>
-          </a:prstGeom>
-          <a:noFill/>
-        </p:spPr>
-        <p:txBody>
-          <a:bodyPr wrap="square" lIns="0" rIns="0" tIns="0" bIns="0" anchor="t">
-            <a:spAutoFit/>
-          </a:bodyPr>
-          <a:lstStyle/>
-          <a:p>
-            <a:pPr algn="l">
-              <a:lnSpc>
-                <a:spcPct val="115000"/>
-              </a:lnSpc>
-            </a:pPr>
-            <a:r>
-              <a:rPr sz="1200" b="0" i="0">
-                <a:solidFill>
-                  <a:srgbClr val="181F2B"/>
-                </a:solidFill>
-                <a:latin typeface="Helvetica Neue"/>
-              </a:rPr>
-              <a:t>•  meal_start[d, m] + meal_iv[d, m] — optional CP-SAT interval</a:t>
-            </a:r>
-          </a:p>
-        </p:txBody>
-      </p:sp>
-      <p:sp>
-        <p:nvSpPr>
-          <p:cNvPr id="15" name="TextBox 14"/>
-          <p:cNvSpPr txBox="1"/>
-          <p:nvPr/>
-        </p:nvSpPr>
-        <p:spPr>
-          <a:xfrm>
-            <a:off x="822960" y="5321808"/>
-            <a:ext cx="4846320" cy="310896"/>
-          </a:xfrm>
-          <a:prstGeom prst="rect">
-            <a:avLst/>
-          </a:prstGeom>
-          <a:noFill/>
-        </p:spPr>
-        <p:txBody>
-          <a:bodyPr wrap="square" lIns="0" rIns="0" tIns="0" bIns="0" anchor="t">
-            <a:spAutoFit/>
-          </a:bodyPr>
-          <a:lstStyle/>
-          <a:p>
-            <a:pPr algn="l">
-              <a:lnSpc>
-                <a:spcPct val="115000"/>
-              </a:lnSpc>
-            </a:pPr>
-            <a:r>
-              <a:rPr sz="1200" b="0" i="0">
-                <a:solidFill>
-                  <a:srgbClr val="181F2B"/>
-                </a:solidFill>
-                <a:latin typeface="Helvetica Neue"/>
-              </a:rPr>
-              <a:t>•  wk_sched[d, w], wk_start[d, w], wk_iv[d, w] — workout placement</a:t>
-            </a:r>
-          </a:p>
-        </p:txBody>
-      </p:sp>
-      <p:sp>
-        <p:nvSpPr>
-          <p:cNvPr id="16" name="TextBox 15"/>
-          <p:cNvSpPr txBox="1"/>
-          <p:nvPr/>
-        </p:nvSpPr>
-        <p:spPr>
-          <a:xfrm>
-            <a:off x="822960" y="5632704"/>
-            <a:ext cx="4846320" cy="310896"/>
-          </a:xfrm>
-          <a:prstGeom prst="rect">
-            <a:avLst/>
-          </a:prstGeom>
-          <a:noFill/>
-        </p:spPr>
-        <p:txBody>
-          <a:bodyPr wrap="square" lIns="0" rIns="0" tIns="0" bIns="0" anchor="t">
-            <a:spAutoFit/>
-          </a:bodyPr>
-          <a:lstStyle/>
-          <a:p>
-            <a:pPr algn="l">
-              <a:lnSpc>
-                <a:spcPct val="115000"/>
-              </a:lnSpc>
-            </a:pPr>
-            <a:r>
-              <a:rPr sz="1200" b="0" i="0">
-                <a:solidFill>
-                  <a:srgbClr val="181F2B"/>
-                </a:solidFill>
-                <a:latin typeface="Helvetica Neue"/>
-              </a:rPr>
-              <a:t>•  sleep block per night + per-slot hydration booleans</a:t>
-            </a:r>
-          </a:p>
-        </p:txBody>
-      </p:sp>
-      <p:sp>
-        <p:nvSpPr>
-          <p:cNvPr id="17" name="Rounded Rectangle 16"/>
+              <a:t>Pick foods to hit calorie + protein + budget. Doesn't know about time at all. The classic diet problem.</a:t>
+            </a:r>
+          </a:p>
+        </p:txBody>
+      </p:sp>
+      <p:sp>
+        <p:nvSpPr>
+          <p:cNvPr id="13" name="Rounded Rectangle 12"/>
           <p:cNvSpPr/>
           <p:nvPr/>
         </p:nvSpPr>
         <p:spPr>
           <a:xfrm>
-            <a:off x="6245352" y="1691640"/>
-            <a:ext cx="5394960" cy="4572000"/>
+            <a:off x="3337560" y="2468880"/>
+            <a:ext cx="2697480" cy="3840480"/>
           </a:xfrm>
           <a:prstGeom prst="roundRect">
             <a:avLst>
@@ -5545,14 +4296,14 @@
       </p:sp>
       <p:sp>
         <p:nvSpPr>
-          <p:cNvPr id="18" name="TextBox 17"/>
-          <p:cNvSpPr txBox="1"/>
-          <p:nvPr/>
-        </p:nvSpPr>
-        <p:spPr>
-          <a:xfrm>
-            <a:off x="6519672" y="1874520"/>
-            <a:ext cx="5394960" cy="365760"/>
+          <p:cNvPr id="14" name="TextBox 13"/>
+          <p:cNvSpPr txBox="1"/>
+          <p:nvPr/>
+        </p:nvSpPr>
+        <p:spPr>
+          <a:xfrm>
+            <a:off x="3566160" y="2651760"/>
+            <a:ext cx="2697480" cy="365760"/>
           </a:xfrm>
           <a:prstGeom prst="rect">
             <a:avLst/>
@@ -5567,18 +4318,181 @@
           <a:p>
             <a:pPr algn="l">
               <a:lnSpc>
-                <a:spcPct val="115000"/>
-              </a:lnSpc>
-            </a:pPr>
-            <a:r>
-              <a:rPr sz="1100" b="1" i="0">
+                <a:spcPct val="120000"/>
+              </a:lnSpc>
+            </a:pPr>
+            <a:r>
+              <a:rPr sz="2200" b="1" i="0">
+                <a:solidFill>
+                  <a:srgbClr val="E06B1F"/>
+                </a:solidFill>
+                <a:latin typeface="Helvetica Neue"/>
+              </a:rPr>
+              <a:t>2.</a:t>
+            </a:r>
+          </a:p>
+        </p:txBody>
+      </p:sp>
+      <p:sp>
+        <p:nvSpPr>
+          <p:cNvPr id="15" name="TextBox 14"/>
+          <p:cNvSpPr txBox="1"/>
+          <p:nvPr/>
+        </p:nvSpPr>
+        <p:spPr>
+          <a:xfrm>
+            <a:off x="3566160" y="3108960"/>
+            <a:ext cx="2423160" cy="457200"/>
+          </a:xfrm>
+          <a:prstGeom prst="rect">
+            <a:avLst/>
+          </a:prstGeom>
+          <a:noFill/>
+        </p:spPr>
+        <p:txBody>
+          <a:bodyPr wrap="square" lIns="0" rIns="0" tIns="0" bIns="0" anchor="t">
+            <a:spAutoFit/>
+          </a:bodyPr>
+          <a:lstStyle/>
+          <a:p>
+            <a:pPr algn="l">
+              <a:lnSpc>
+                <a:spcPct val="120000"/>
+              </a:lnSpc>
+            </a:pPr>
+            <a:r>
+              <a:rPr sz="1500" b="1" i="0">
+                <a:solidFill>
+                  <a:srgbClr val="181F2B"/>
+                </a:solidFill>
+                <a:latin typeface="Helvetica Neue"/>
+              </a:rPr>
+              <a:t>Two-stage</a:t>
+            </a:r>
+          </a:p>
+        </p:txBody>
+      </p:sp>
+      <p:sp>
+        <p:nvSpPr>
+          <p:cNvPr id="16" name="TextBox 15"/>
+          <p:cNvSpPr txBox="1"/>
+          <p:nvPr/>
+        </p:nvSpPr>
+        <p:spPr>
+          <a:xfrm>
+            <a:off x="3566160" y="3520440"/>
+            <a:ext cx="2423160" cy="365760"/>
+          </a:xfrm>
+          <a:prstGeom prst="rect">
+            <a:avLst/>
+          </a:prstGeom>
+          <a:noFill/>
+        </p:spPr>
+        <p:txBody>
+          <a:bodyPr wrap="square" lIns="0" rIns="0" tIns="0" bIns="0" anchor="t">
+            <a:spAutoFit/>
+          </a:bodyPr>
+          <a:lstStyle/>
+          <a:p>
+            <a:pPr algn="l">
+              <a:lnSpc>
+                <a:spcPct val="120000"/>
+              </a:lnSpc>
+            </a:pPr>
+            <a:r>
+              <a:rPr sz="1000" b="0" i="1">
                 <a:solidFill>
                   <a:srgbClr val="1F6FB0"/>
                 </a:solidFill>
                 <a:latin typeface="Helvetica Neue"/>
               </a:rPr>
-              <a:t>SHARED SOLVER CONTRACT</a:t>
-            </a:r>
+              <a:t>MIP, then CP-SAT</a:t>
+            </a:r>
+          </a:p>
+        </p:txBody>
+      </p:sp>
+      <p:sp>
+        <p:nvSpPr>
+          <p:cNvPr id="17" name="TextBox 16"/>
+          <p:cNvSpPr txBox="1"/>
+          <p:nvPr/>
+        </p:nvSpPr>
+        <p:spPr>
+          <a:xfrm>
+            <a:off x="3566160" y="3886200"/>
+            <a:ext cx="2423160" cy="2286000"/>
+          </a:xfrm>
+          <a:prstGeom prst="rect">
+            <a:avLst/>
+          </a:prstGeom>
+          <a:noFill/>
+        </p:spPr>
+        <p:txBody>
+          <a:bodyPr wrap="square" lIns="0" rIns="0" tIns="0" bIns="0" anchor="t">
+            <a:spAutoFit/>
+          </a:bodyPr>
+          <a:lstStyle/>
+          <a:p>
+            <a:pPr algn="l">
+              <a:lnSpc>
+                <a:spcPct val="145000"/>
+              </a:lnSpc>
+            </a:pPr>
+            <a:r>
+              <a:rPr sz="1100" b="0" i="0">
+                <a:solidFill>
+                  <a:srgbClr val="555F6D"/>
+                </a:solidFill>
+                <a:latin typeface="Helvetica Neue"/>
+              </a:rPr>
+              <a:t>First pick the foods, then place them on the calendar with workouts and sleep. The standard textbook decomposition.</a:t>
+            </a:r>
+          </a:p>
+        </p:txBody>
+      </p:sp>
+      <p:sp>
+        <p:nvSpPr>
+          <p:cNvPr id="18" name="Rounded Rectangle 17"/>
+          <p:cNvSpPr/>
+          <p:nvPr/>
+        </p:nvSpPr>
+        <p:spPr>
+          <a:xfrm>
+            <a:off x="6126480" y="2468880"/>
+            <a:ext cx="2697480" cy="3840480"/>
+          </a:xfrm>
+          <a:prstGeom prst="roundRect">
+            <a:avLst>
+              <a:gd name="adj" fmla="val 6000"/>
+            </a:avLst>
+          </a:prstGeom>
+          <a:solidFill>
+            <a:srgbClr val="F1EEE6"/>
+          </a:solidFill>
+          <a:ln>
+            <a:noFill/>
+          </a:ln>
+          <a:effectLst/>
+        </p:spPr>
+        <p:style>
+          <a:lnRef idx="1">
+            <a:schemeClr val="accent1"/>
+          </a:lnRef>
+          <a:fillRef idx="3">
+            <a:schemeClr val="accent1"/>
+          </a:fillRef>
+          <a:effectRef idx="2">
+            <a:schemeClr val="accent1"/>
+          </a:effectRef>
+          <a:fontRef idx="minor">
+            <a:schemeClr val="lt1"/>
+          </a:fontRef>
+        </p:style>
+        <p:txBody>
+          <a:bodyPr rtlCol="0" anchor="ctr"/>
+          <a:lstStyle/>
+          <a:p>
+            <a:pPr algn="ctr"/>
           </a:p>
         </p:txBody>
       </p:sp>
@@ -5590,8 +4504,8 @@
         </p:nvSpPr>
         <p:spPr>
           <a:xfrm>
-            <a:off x="6519672" y="2194560"/>
-            <a:ext cx="5394960" cy="457200"/>
+            <a:off x="6355080" y="2651760"/>
+            <a:ext cx="2697480" cy="365760"/>
           </a:xfrm>
           <a:prstGeom prst="rect">
             <a:avLst/>
@@ -5606,7 +4520,46 @@
           <a:p>
             <a:pPr algn="l">
               <a:lnSpc>
-                <a:spcPct val="115000"/>
+                <a:spcPct val="120000"/>
+              </a:lnSpc>
+            </a:pPr>
+            <a:r>
+              <a:rPr sz="2200" b="1" i="0">
+                <a:solidFill>
+                  <a:srgbClr val="E06B1F"/>
+                </a:solidFill>
+                <a:latin typeface="Helvetica Neue"/>
+              </a:rPr>
+              <a:t>3.</a:t>
+            </a:r>
+          </a:p>
+        </p:txBody>
+      </p:sp>
+      <p:sp>
+        <p:nvSpPr>
+          <p:cNvPr id="20" name="TextBox 19"/>
+          <p:cNvSpPr txBox="1"/>
+          <p:nvPr/>
+        </p:nvSpPr>
+        <p:spPr>
+          <a:xfrm>
+            <a:off x="6355080" y="3108960"/>
+            <a:ext cx="2423160" cy="457200"/>
+          </a:xfrm>
+          <a:prstGeom prst="rect">
+            <a:avLst/>
+          </a:prstGeom>
+          <a:noFill/>
+        </p:spPr>
+        <p:txBody>
+          <a:bodyPr wrap="square" lIns="0" rIns="0" tIns="0" bIns="0" anchor="t">
+            <a:spAutoFit/>
+          </a:bodyPr>
+          <a:lstStyle/>
+          <a:p>
+            <a:pPr algn="l">
+              <a:lnSpc>
+                <a:spcPct val="120000"/>
               </a:lnSpc>
             </a:pPr>
             <a:r>
@@ -5616,21 +4569,21 @@
                 </a:solidFill>
                 <a:latin typeface="Helvetica Neue"/>
               </a:rPr>
-              <a:t>All four solvers implement BaseSolver</a:t>
-            </a:r>
-          </a:p>
-        </p:txBody>
-      </p:sp>
-      <p:sp>
-        <p:nvSpPr>
-          <p:cNvPr id="20" name="TextBox 19"/>
-          <p:cNvSpPr txBox="1"/>
-          <p:nvPr/>
-        </p:nvSpPr>
-        <p:spPr>
-          <a:xfrm>
-            <a:off x="6519672" y="2743200"/>
-            <a:ext cx="4846320" cy="365760"/>
+              <a:t>Joint CP-SAT</a:t>
+            </a:r>
+          </a:p>
+        </p:txBody>
+      </p:sp>
+      <p:sp>
+        <p:nvSpPr>
+          <p:cNvPr id="21" name="TextBox 20"/>
+          <p:cNvSpPr txBox="1"/>
+          <p:nvPr/>
+        </p:nvSpPr>
+        <p:spPr>
+          <a:xfrm>
+            <a:off x="6355080" y="3520440"/>
+            <a:ext cx="2423160" cy="365760"/>
           </a:xfrm>
           <a:prstGeom prst="rect">
             <a:avLst/>
@@ -5645,31 +4598,194 @@
           <a:p>
             <a:pPr algn="l">
               <a:lnSpc>
-                <a:spcPct val="115000"/>
-              </a:lnSpc>
-            </a:pPr>
-            <a:r>
-              <a:rPr sz="1200" b="1" i="0">
+                <a:spcPct val="120000"/>
+              </a:lnSpc>
+            </a:pPr>
+            <a:r>
+              <a:rPr sz="1000" b="0" i="1">
+                <a:solidFill>
+                  <a:srgbClr val="1F6FB0"/>
+                </a:solidFill>
+                <a:latin typeface="Helvetica Neue"/>
+              </a:rPr>
+              <a:t>single CP-SAT model</a:t>
+            </a:r>
+          </a:p>
+        </p:txBody>
+      </p:sp>
+      <p:sp>
+        <p:nvSpPr>
+          <p:cNvPr id="22" name="TextBox 21"/>
+          <p:cNvSpPr txBox="1"/>
+          <p:nvPr/>
+        </p:nvSpPr>
+        <p:spPr>
+          <a:xfrm>
+            <a:off x="6355080" y="3886200"/>
+            <a:ext cx="2423160" cy="2286000"/>
+          </a:xfrm>
+          <a:prstGeom prst="rect">
+            <a:avLst/>
+          </a:prstGeom>
+          <a:noFill/>
+        </p:spPr>
+        <p:txBody>
+          <a:bodyPr wrap="square" lIns="0" rIns="0" tIns="0" bIns="0" anchor="t">
+            <a:spAutoFit/>
+          </a:bodyPr>
+          <a:lstStyle/>
+          <a:p>
+            <a:pPr algn="l">
+              <a:lnSpc>
+                <a:spcPct val="145000"/>
+              </a:lnSpc>
+            </a:pPr>
+            <a:r>
+              <a:rPr sz="1100" b="0" i="0">
+                <a:solidFill>
+                  <a:srgbClr val="555F6D"/>
+                </a:solidFill>
+                <a:latin typeface="Helvetica Neue"/>
+              </a:rPr>
+              <a:t>One model decides foods AND placement at the same time. Can trade a small macro miss for a better-timed schedule.</a:t>
+            </a:r>
+          </a:p>
+        </p:txBody>
+      </p:sp>
+      <p:sp>
+        <p:nvSpPr>
+          <p:cNvPr id="23" name="Rounded Rectangle 22"/>
+          <p:cNvSpPr/>
+          <p:nvPr/>
+        </p:nvSpPr>
+        <p:spPr>
+          <a:xfrm>
+            <a:off x="8915400" y="2468880"/>
+            <a:ext cx="2697480" cy="3840480"/>
+          </a:xfrm>
+          <a:prstGeom prst="roundRect">
+            <a:avLst>
+              <a:gd name="adj" fmla="val 6000"/>
+            </a:avLst>
+          </a:prstGeom>
+          <a:solidFill>
+            <a:srgbClr val="F1EEE6"/>
+          </a:solidFill>
+          <a:ln>
+            <a:noFill/>
+          </a:ln>
+          <a:effectLst/>
+        </p:spPr>
+        <p:style>
+          <a:lnRef idx="1">
+            <a:schemeClr val="accent1"/>
+          </a:lnRef>
+          <a:fillRef idx="3">
+            <a:schemeClr val="accent1"/>
+          </a:fillRef>
+          <a:effectRef idx="2">
+            <a:schemeClr val="accent1"/>
+          </a:effectRef>
+          <a:fontRef idx="minor">
+            <a:schemeClr val="lt1"/>
+          </a:fontRef>
+        </p:style>
+        <p:txBody>
+          <a:bodyPr rtlCol="0" anchor="ctr"/>
+          <a:lstStyle/>
+          <a:p>
+            <a:pPr algn="ctr"/>
+          </a:p>
+        </p:txBody>
+      </p:sp>
+      <p:sp>
+        <p:nvSpPr>
+          <p:cNvPr id="24" name="TextBox 23"/>
+          <p:cNvSpPr txBox="1"/>
+          <p:nvPr/>
+        </p:nvSpPr>
+        <p:spPr>
+          <a:xfrm>
+            <a:off x="9144000" y="2651760"/>
+            <a:ext cx="2697480" cy="365760"/>
+          </a:xfrm>
+          <a:prstGeom prst="rect">
+            <a:avLst/>
+          </a:prstGeom>
+          <a:noFill/>
+        </p:spPr>
+        <p:txBody>
+          <a:bodyPr wrap="square" lIns="0" rIns="0" tIns="0" bIns="0" anchor="t">
+            <a:spAutoFit/>
+          </a:bodyPr>
+          <a:lstStyle/>
+          <a:p>
+            <a:pPr algn="l">
+              <a:lnSpc>
+                <a:spcPct val="120000"/>
+              </a:lnSpc>
+            </a:pPr>
+            <a:r>
+              <a:rPr sz="2200" b="1" i="0">
+                <a:solidFill>
+                  <a:srgbClr val="E06B1F"/>
+                </a:solidFill>
+                <a:latin typeface="Helvetica Neue"/>
+              </a:rPr>
+              <a:t>4.</a:t>
+            </a:r>
+          </a:p>
+        </p:txBody>
+      </p:sp>
+      <p:sp>
+        <p:nvSpPr>
+          <p:cNvPr id="25" name="TextBox 24"/>
+          <p:cNvSpPr txBox="1"/>
+          <p:nvPr/>
+        </p:nvSpPr>
+        <p:spPr>
+          <a:xfrm>
+            <a:off x="9144000" y="3108960"/>
+            <a:ext cx="2423160" cy="457200"/>
+          </a:xfrm>
+          <a:prstGeom prst="rect">
+            <a:avLst/>
+          </a:prstGeom>
+          <a:noFill/>
+        </p:spPr>
+        <p:txBody>
+          <a:bodyPr wrap="square" lIns="0" rIns="0" tIns="0" bIns="0" anchor="t">
+            <a:spAutoFit/>
+          </a:bodyPr>
+          <a:lstStyle/>
+          <a:p>
+            <a:pPr algn="l">
+              <a:lnSpc>
+                <a:spcPct val="120000"/>
+              </a:lnSpc>
+            </a:pPr>
+            <a:r>
+              <a:rPr sz="1500" b="1" i="0">
                 <a:solidFill>
                   <a:srgbClr val="181F2B"/>
                 </a:solidFill>
                 <a:latin typeface="Helvetica Neue"/>
               </a:rPr>
-              <a:t>Inputs</a:t>
-            </a:r>
-          </a:p>
-        </p:txBody>
-      </p:sp>
-      <p:sp>
-        <p:nvSpPr>
-          <p:cNvPr id="21" name="TextBox 20"/>
-          <p:cNvSpPr txBox="1"/>
-          <p:nvPr/>
-        </p:nvSpPr>
-        <p:spPr>
-          <a:xfrm>
-            <a:off x="6519672" y="3063240"/>
-            <a:ext cx="4846320" cy="1280160"/>
+              <a:t>Warm-start hybrid</a:t>
+            </a:r>
+          </a:p>
+        </p:txBody>
+      </p:sp>
+      <p:sp>
+        <p:nvSpPr>
+          <p:cNvPr id="26" name="TextBox 25"/>
+          <p:cNvSpPr txBox="1"/>
+          <p:nvPr/>
+        </p:nvSpPr>
+        <p:spPr>
+          <a:xfrm>
+            <a:off x="9144000" y="3520440"/>
+            <a:ext cx="2423160" cy="365760"/>
           </a:xfrm>
           <a:prstGeom prst="rect">
             <a:avLst/>
@@ -5684,137 +4800,56 @@
           <a:p>
             <a:pPr algn="l">
               <a:lnSpc>
+                <a:spcPct val="120000"/>
+              </a:lnSpc>
+            </a:pPr>
+            <a:r>
+              <a:rPr sz="1000" b="0" i="1">
+                <a:solidFill>
+                  <a:srgbClr val="1F6FB0"/>
+                </a:solidFill>
+                <a:latin typeface="Helvetica Neue"/>
+              </a:rPr>
+              <a:t>two-stage seeds joint</a:t>
+            </a:r>
+          </a:p>
+        </p:txBody>
+      </p:sp>
+      <p:sp>
+        <p:nvSpPr>
+          <p:cNvPr id="27" name="TextBox 26"/>
+          <p:cNvSpPr txBox="1"/>
+          <p:nvPr/>
+        </p:nvSpPr>
+        <p:spPr>
+          <a:xfrm>
+            <a:off x="9144000" y="3886200"/>
+            <a:ext cx="2423160" cy="2286000"/>
+          </a:xfrm>
+          <a:prstGeom prst="rect">
+            <a:avLst/>
+          </a:prstGeom>
+          <a:noFill/>
+        </p:spPr>
+        <p:txBody>
+          <a:bodyPr wrap="square" lIns="0" rIns="0" tIns="0" bIns="0" anchor="t">
+            <a:spAutoFit/>
+          </a:bodyPr>
+          <a:lstStyle/>
+          <a:p>
+            <a:pPr algn="l">
+              <a:lnSpc>
                 <a:spcPct val="145000"/>
               </a:lnSpc>
             </a:pPr>
             <a:r>
-              <a:rPr sz="1200" b="0" i="0">
+              <a:rPr sz="1100" b="0" i="0">
                 <a:solidFill>
                   <a:srgbClr val="555F6D"/>
                 </a:solidFill>
                 <a:latin typeface="Helvetica Neue"/>
               </a:rPr>
-              <a:t>•  UserProfile  — macros, budget, exclusions, availability, pantry
-•  list[FoodItem]  — Penn Dining + USDA + curated sample
-•  list[WorkoutTemplate]  — duration, intensity, recovery rules</a:t>
-            </a:r>
-          </a:p>
-        </p:txBody>
-      </p:sp>
-      <p:sp>
-        <p:nvSpPr>
-          <p:cNvPr id="22" name="TextBox 21"/>
-          <p:cNvSpPr txBox="1"/>
-          <p:nvPr/>
-        </p:nvSpPr>
-        <p:spPr>
-          <a:xfrm>
-            <a:off x="6519672" y="4480560"/>
-            <a:ext cx="4846320" cy="365760"/>
-          </a:xfrm>
-          <a:prstGeom prst="rect">
-            <a:avLst/>
-          </a:prstGeom>
-          <a:noFill/>
-        </p:spPr>
-        <p:txBody>
-          <a:bodyPr wrap="square" lIns="0" rIns="0" tIns="0" bIns="0" anchor="t">
-            <a:spAutoFit/>
-          </a:bodyPr>
-          <a:lstStyle/>
-          <a:p>
-            <a:pPr algn="l">
-              <a:lnSpc>
-                <a:spcPct val="115000"/>
-              </a:lnSpc>
-            </a:pPr>
-            <a:r>
-              <a:rPr sz="1200" b="1" i="0">
-                <a:solidFill>
-                  <a:srgbClr val="181F2B"/>
-                </a:solidFill>
-                <a:latin typeface="Helvetica Neue"/>
-              </a:rPr>
-              <a:t>Output</a:t>
-            </a:r>
-          </a:p>
-        </p:txBody>
-      </p:sp>
-      <p:sp>
-        <p:nvSpPr>
-          <p:cNvPr id="23" name="TextBox 22"/>
-          <p:cNvSpPr txBox="1"/>
-          <p:nvPr/>
-        </p:nvSpPr>
-        <p:spPr>
-          <a:xfrm>
-            <a:off x="6519672" y="4800600"/>
-            <a:ext cx="4846320" cy="1280160"/>
-          </a:xfrm>
-          <a:prstGeom prst="rect">
-            <a:avLst/>
-          </a:prstGeom>
-          <a:noFill/>
-        </p:spPr>
-        <p:txBody>
-          <a:bodyPr wrap="square" lIns="0" rIns="0" tIns="0" bIns="0" anchor="t">
-            <a:spAutoFit/>
-          </a:bodyPr>
-          <a:lstStyle/>
-          <a:p>
-            <a:pPr algn="l">
-              <a:lnSpc>
-                <a:spcPct val="145000"/>
-              </a:lnSpc>
-            </a:pPr>
-            <a:r>
-              <a:rPr sz="1200" b="0" i="0">
-                <a:solidFill>
-                  <a:srgbClr val="555F6D"/>
-                </a:solidFill>
-                <a:latin typeface="Helvetica Neue"/>
-              </a:rPr>
-              <a:t>•  SolverResult { status, objective, runtime_s, plan }
-•  Plan with daily meals, workouts, sleep blocks, totals</a:t>
-            </a:r>
-          </a:p>
-        </p:txBody>
-      </p:sp>
-      <p:sp>
-        <p:nvSpPr>
-          <p:cNvPr id="24" name="TextBox 23"/>
-          <p:cNvSpPr txBox="1"/>
-          <p:nvPr/>
-        </p:nvSpPr>
-        <p:spPr>
-          <a:xfrm>
-            <a:off x="6519672" y="5715000"/>
-            <a:ext cx="4846320" cy="457200"/>
-          </a:xfrm>
-          <a:prstGeom prst="rect">
-            <a:avLst/>
-          </a:prstGeom>
-          <a:noFill/>
-        </p:spPr>
-        <p:txBody>
-          <a:bodyPr wrap="square" lIns="0" rIns="0" tIns="0" bIns="0" anchor="t">
-            <a:spAutoFit/>
-          </a:bodyPr>
-          <a:lstStyle/>
-          <a:p>
-            <a:pPr algn="l">
-              <a:lnSpc>
-                <a:spcPct val="140000"/>
-              </a:lnSpc>
-            </a:pPr>
-            <a:r>
-              <a:rPr sz="1100" b="0" i="1">
-                <a:solidFill>
-                  <a:srgbClr val="E06B1F"/>
-                </a:solidFill>
-                <a:latin typeface="Helvetica Neue"/>
-              </a:rPr>
-              <a:t>→ Same input/output across all formulations means the experiment runner produces apples-to-apples runtime, feasibility, and objective comparisons.</a:t>
+              <a:t>Run two-stage first as a hint, then let the joint solver refine it. Same model as #3, just smarter starting point.</a:t>
             </a:r>
           </a:p>
         </p:txBody>
@@ -5904,7 +4939,7 @@
           <a:p>
             <a:pPr algn="l">
               <a:lnSpc>
-                <a:spcPct val="115000"/>
+                <a:spcPct val="120000"/>
               </a:lnSpc>
             </a:pPr>
             <a:r>
@@ -5914,7 +4949,7 @@
                 </a:solidFill>
                 <a:latin typeface="Helvetica Neue"/>
               </a:rPr>
-              <a:t>2 · PROJECT FORMULATION</a:t>
+              <a:t>2 · WHAT WE BUILT</a:t>
             </a:r>
           </a:p>
         </p:txBody>
@@ -5928,7 +4963,7 @@
         <p:spPr>
           <a:xfrm>
             <a:off x="548640" y="685800"/>
-            <a:ext cx="10972800" cy="640080"/>
+            <a:ext cx="11091672" cy="822960"/>
           </a:xfrm>
           <a:prstGeom prst="rect">
             <a:avLst/>
@@ -5943,17 +4978,17 @@
           <a:p>
             <a:pPr algn="l">
               <a:lnSpc>
-                <a:spcPct val="115000"/>
-              </a:lnSpc>
-            </a:pPr>
-            <a:r>
-              <a:rPr sz="3000" b="1" i="0">
+                <a:spcPct val="110000"/>
+              </a:lnSpc>
+            </a:pPr>
+            <a:r>
+              <a:rPr sz="2800" b="1" i="0">
                 <a:solidFill>
                   <a:srgbClr val="181F2B"/>
                 </a:solidFill>
                 <a:latin typeface="Helvetica Neue"/>
               </a:rPr>
-              <a:t>Four directly comparable formulations.</a:t>
+              <a:t>How the model thinks about the week.</a:t>
             </a:r>
           </a:p>
         </p:txBody>
@@ -5966,7 +5001,7 @@
         </p:nvCxnSpPr>
         <p:spPr>
           <a:xfrm>
-            <a:off x="548640" y="1417320"/>
+            <a:off x="548640" y="1508760"/>
             <a:ext cx="11091672" cy="0"/>
           </a:xfrm>
           <a:prstGeom prst="line">
@@ -6017,7 +5052,7 @@
           <a:p>
             <a:pPr algn="r">
               <a:lnSpc>
-                <a:spcPct val="115000"/>
+                <a:spcPct val="120000"/>
               </a:lnSpc>
             </a:pPr>
             <a:r>
@@ -6027,967 +5062,57 @@
                 </a:solidFill>
                 <a:latin typeface="Helvetica Neue"/>
               </a:rPr>
-              <a:t>4 / 10</a:t>
-            </a:r>
-          </a:p>
-        </p:txBody>
-      </p:sp>
-      <p:graphicFrame>
-        <p:nvGraphicFramePr>
-          <p:cNvPr id="7" name="Table 6"/>
-          <p:cNvGraphicFramePr>
-            <a:graphicFrameLocks noGrp="1"/>
-          </p:cNvGraphicFramePr>
-          <p:nvPr/>
-        </p:nvGraphicFramePr>
-        <p:xfrm>
-          <a:off x="548640" y="1691640"/>
-          <a:ext cx="11082528" cy="4297680"/>
-        </p:xfrm>
-        <a:graphic>
-          <a:graphicData uri="http://schemas.openxmlformats.org/drawingml/2006/table">
-            <a:tbl>
-              <a:tblPr firstRow="1" bandRow="1">
-                <a:tableStyleId>{5C22544A-7EE6-4342-B048-85BDC9FD1C3A}</a:tableStyleId>
-              </a:tblPr>
-              <a:tblGrid>
-                <a:gridCol w="3108960"/>
-                <a:gridCol w="1993392"/>
-                <a:gridCol w="1993392"/>
-                <a:gridCol w="1993392"/>
-                <a:gridCol w="1993392"/>
-              </a:tblGrid>
-              <a:tr h="537210">
-                <a:tc>
-                  <a:txBody>
-                    <a:bodyPr/>
-                    <a:lstStyle/>
-                    <a:p>
-                      <a:pPr algn="l"/>
-                    </a:p>
-                  </a:txBody>
-                  <a:tcPr>
-                    <a:solidFill>
-                      <a:srgbClr val="181F2B"/>
-                    </a:solidFill>
-                  </a:tcPr>
-                </a:tc>
-                <a:tc>
-                  <a:txBody>
-                    <a:bodyPr/>
-                    <a:lstStyle/>
-                    <a:p>
-                      <a:pPr algn="ctr"/>
-                      <a:r>
-                        <a:rPr b="1" sz="1300">
-                          <a:solidFill>
-                            <a:srgbClr val="FAFAF7"/>
-                          </a:solidFill>
-                          <a:latin typeface="Helvetica Neue"/>
-                        </a:rPr>
-                        <a:t>nutrition_only</a:t>
-                      </a:r>
-                    </a:p>
-                  </a:txBody>
-                  <a:tcPr>
-                    <a:solidFill>
-                      <a:srgbClr val="181F2B"/>
-                    </a:solidFill>
-                  </a:tcPr>
-                </a:tc>
-                <a:tc>
-                  <a:txBody>
-                    <a:bodyPr/>
-                    <a:lstStyle/>
-                    <a:p>
-                      <a:pPr algn="ctr"/>
-                      <a:r>
-                        <a:rPr b="1" sz="1300">
-                          <a:solidFill>
-                            <a:srgbClr val="FAFAF7"/>
-                          </a:solidFill>
-                          <a:latin typeface="Helvetica Neue"/>
-                        </a:rPr>
-                        <a:t>two_stage</a:t>
-                      </a:r>
-                    </a:p>
-                  </a:txBody>
-                  <a:tcPr>
-                    <a:solidFill>
-                      <a:srgbClr val="181F2B"/>
-                    </a:solidFill>
-                  </a:tcPr>
-                </a:tc>
-                <a:tc>
-                  <a:txBody>
-                    <a:bodyPr/>
-                    <a:lstStyle/>
-                    <a:p>
-                      <a:pPr algn="ctr"/>
-                      <a:r>
-                        <a:rPr b="1" sz="1300">
-                          <a:solidFill>
-                            <a:srgbClr val="FAFAF7"/>
-                          </a:solidFill>
-                          <a:latin typeface="Helvetica Neue"/>
-                        </a:rPr>
-                        <a:t>joint_cpsat</a:t>
-                      </a:r>
-                    </a:p>
-                  </a:txBody>
-                  <a:tcPr>
-                    <a:solidFill>
-                      <a:srgbClr val="181F2B"/>
-                    </a:solidFill>
-                  </a:tcPr>
-                </a:tc>
-                <a:tc>
-                  <a:txBody>
-                    <a:bodyPr/>
-                    <a:lstStyle/>
-                    <a:p>
-                      <a:pPr algn="ctr"/>
-                      <a:r>
-                        <a:rPr b="1" sz="1300">
-                          <a:solidFill>
-                            <a:srgbClr val="FAFAF7"/>
-                          </a:solidFill>
-                          <a:latin typeface="Helvetica Neue"/>
-                        </a:rPr>
-                        <a:t>joint_warmstart</a:t>
-                      </a:r>
-                    </a:p>
-                  </a:txBody>
-                  <a:tcPr>
-                    <a:solidFill>
-                      <a:srgbClr val="181F2B"/>
-                    </a:solidFill>
-                  </a:tcPr>
-                </a:tc>
-              </a:tr>
-              <a:tr h="537210">
-                <a:tc>
-                  <a:txBody>
-                    <a:bodyPr/>
-                    <a:lstStyle/>
-                    <a:p>
-                      <a:pPr algn="l"/>
-                      <a:r>
-                        <a:rPr sz="1300">
-                          <a:solidFill>
-                            <a:srgbClr val="181F2B"/>
-                          </a:solidFill>
-                          <a:latin typeface="Helvetica Neue"/>
-                        </a:rPr>
-                        <a:t>Macros + budget</a:t>
-                      </a:r>
-                    </a:p>
-                  </a:txBody>
-                  <a:tcPr>
-                    <a:solidFill>
-                      <a:srgbClr val="FAFAF7"/>
-                    </a:solidFill>
-                  </a:tcPr>
-                </a:tc>
-                <a:tc>
-                  <a:txBody>
-                    <a:bodyPr/>
-                    <a:lstStyle/>
-                    <a:p>
-                      <a:pPr algn="ctr"/>
-                      <a:r>
-                        <a:rPr sz="1300" b="1">
-                          <a:solidFill>
-                            <a:srgbClr val="16804C"/>
-                          </a:solidFill>
-                          <a:latin typeface="Helvetica Neue"/>
-                        </a:rPr>
-                        <a:t>✓</a:t>
-                      </a:r>
-                    </a:p>
-                  </a:txBody>
-                  <a:tcPr>
-                    <a:solidFill>
-                      <a:srgbClr val="FAFAF7"/>
-                    </a:solidFill>
-                  </a:tcPr>
-                </a:tc>
-                <a:tc>
-                  <a:txBody>
-                    <a:bodyPr/>
-                    <a:lstStyle/>
-                    <a:p>
-                      <a:pPr algn="ctr"/>
-                      <a:r>
-                        <a:rPr sz="1300" b="1">
-                          <a:solidFill>
-                            <a:srgbClr val="16804C"/>
-                          </a:solidFill>
-                          <a:latin typeface="Helvetica Neue"/>
-                        </a:rPr>
-                        <a:t>✓</a:t>
-                      </a:r>
-                    </a:p>
-                  </a:txBody>
-                  <a:tcPr>
-                    <a:solidFill>
-                      <a:srgbClr val="FAFAF7"/>
-                    </a:solidFill>
-                  </a:tcPr>
-                </a:tc>
-                <a:tc>
-                  <a:txBody>
-                    <a:bodyPr/>
-                    <a:lstStyle/>
-                    <a:p>
-                      <a:pPr algn="ctr"/>
-                      <a:r>
-                        <a:rPr sz="1300" b="1">
-                          <a:solidFill>
-                            <a:srgbClr val="16804C"/>
-                          </a:solidFill>
-                          <a:latin typeface="Helvetica Neue"/>
-                        </a:rPr>
-                        <a:t>✓</a:t>
-                      </a:r>
-                    </a:p>
-                  </a:txBody>
-                  <a:tcPr>
-                    <a:solidFill>
-                      <a:srgbClr val="FAFAF7"/>
-                    </a:solidFill>
-                  </a:tcPr>
-                </a:tc>
-                <a:tc>
-                  <a:txBody>
-                    <a:bodyPr/>
-                    <a:lstStyle/>
-                    <a:p>
-                      <a:pPr algn="ctr"/>
-                      <a:r>
-                        <a:rPr sz="1300" b="1">
-                          <a:solidFill>
-                            <a:srgbClr val="16804C"/>
-                          </a:solidFill>
-                          <a:latin typeface="Helvetica Neue"/>
-                        </a:rPr>
-                        <a:t>✓</a:t>
-                      </a:r>
-                    </a:p>
-                  </a:txBody>
-                  <a:tcPr>
-                    <a:solidFill>
-                      <a:srgbClr val="FAFAF7"/>
-                    </a:solidFill>
-                  </a:tcPr>
-                </a:tc>
-              </a:tr>
-              <a:tr h="537210">
-                <a:tc>
-                  <a:txBody>
-                    <a:bodyPr/>
-                    <a:lstStyle/>
-                    <a:p>
-                      <a:pPr algn="l"/>
-                      <a:r>
-                        <a:rPr sz="1300">
-                          <a:solidFill>
-                            <a:srgbClr val="181F2B"/>
-                          </a:solidFill>
-                          <a:latin typeface="Helvetica Neue"/>
-                        </a:rPr>
-                        <a:t>Workout scheduling</a:t>
-                      </a:r>
-                    </a:p>
-                  </a:txBody>
-                  <a:tcPr>
-                    <a:solidFill>
-                      <a:srgbClr val="F1EEE6"/>
-                    </a:solidFill>
-                  </a:tcPr>
-                </a:tc>
-                <a:tc>
-                  <a:txBody>
-                    <a:bodyPr/>
-                    <a:lstStyle/>
-                    <a:p>
-                      <a:pPr algn="ctr"/>
-                      <a:r>
-                        <a:rPr sz="1300" b="1">
-                          <a:solidFill>
-                            <a:srgbClr val="B02A2A"/>
-                          </a:solidFill>
-                          <a:latin typeface="Helvetica Neue"/>
-                        </a:rPr>
-                        <a:t>✗</a:t>
-                      </a:r>
-                    </a:p>
-                  </a:txBody>
-                  <a:tcPr>
-                    <a:solidFill>
-                      <a:srgbClr val="F1EEE6"/>
-                    </a:solidFill>
-                  </a:tcPr>
-                </a:tc>
-                <a:tc>
-                  <a:txBody>
-                    <a:bodyPr/>
-                    <a:lstStyle/>
-                    <a:p>
-                      <a:pPr algn="ctr"/>
-                      <a:r>
-                        <a:rPr sz="1300" b="1">
-                          <a:solidFill>
-                            <a:srgbClr val="16804C"/>
-                          </a:solidFill>
-                          <a:latin typeface="Helvetica Neue"/>
-                        </a:rPr>
-                        <a:t>✓</a:t>
-                      </a:r>
-                    </a:p>
-                  </a:txBody>
-                  <a:tcPr>
-                    <a:solidFill>
-                      <a:srgbClr val="F1EEE6"/>
-                    </a:solidFill>
-                  </a:tcPr>
-                </a:tc>
-                <a:tc>
-                  <a:txBody>
-                    <a:bodyPr/>
-                    <a:lstStyle/>
-                    <a:p>
-                      <a:pPr algn="ctr"/>
-                      <a:r>
-                        <a:rPr sz="1300" b="1">
-                          <a:solidFill>
-                            <a:srgbClr val="16804C"/>
-                          </a:solidFill>
-                          <a:latin typeface="Helvetica Neue"/>
-                        </a:rPr>
-                        <a:t>✓</a:t>
-                      </a:r>
-                    </a:p>
-                  </a:txBody>
-                  <a:tcPr>
-                    <a:solidFill>
-                      <a:srgbClr val="F1EEE6"/>
-                    </a:solidFill>
-                  </a:tcPr>
-                </a:tc>
-                <a:tc>
-                  <a:txBody>
-                    <a:bodyPr/>
-                    <a:lstStyle/>
-                    <a:p>
-                      <a:pPr algn="ctr"/>
-                      <a:r>
-                        <a:rPr sz="1300" b="1">
-                          <a:solidFill>
-                            <a:srgbClr val="16804C"/>
-                          </a:solidFill>
-                          <a:latin typeface="Helvetica Neue"/>
-                        </a:rPr>
-                        <a:t>✓</a:t>
-                      </a:r>
-                    </a:p>
-                  </a:txBody>
-                  <a:tcPr>
-                    <a:solidFill>
-                      <a:srgbClr val="F1EEE6"/>
-                    </a:solidFill>
-                  </a:tcPr>
-                </a:tc>
-              </a:tr>
-              <a:tr h="537210">
-                <a:tc>
-                  <a:txBody>
-                    <a:bodyPr/>
-                    <a:lstStyle/>
-                    <a:p>
-                      <a:pPr algn="l"/>
-                      <a:r>
-                        <a:rPr sz="1300">
-                          <a:solidFill>
-                            <a:srgbClr val="181F2B"/>
-                          </a:solidFill>
-                          <a:latin typeface="Helvetica Neue"/>
-                        </a:rPr>
-                        <a:t>Sleep + recovery spacing</a:t>
-                      </a:r>
-                    </a:p>
-                  </a:txBody>
-                  <a:tcPr>
-                    <a:solidFill>
-                      <a:srgbClr val="FAFAF7"/>
-                    </a:solidFill>
-                  </a:tcPr>
-                </a:tc>
-                <a:tc>
-                  <a:txBody>
-                    <a:bodyPr/>
-                    <a:lstStyle/>
-                    <a:p>
-                      <a:pPr algn="ctr"/>
-                      <a:r>
-                        <a:rPr sz="1300" b="1">
-                          <a:solidFill>
-                            <a:srgbClr val="B02A2A"/>
-                          </a:solidFill>
-                          <a:latin typeface="Helvetica Neue"/>
-                        </a:rPr>
-                        <a:t>✗</a:t>
-                      </a:r>
-                    </a:p>
-                  </a:txBody>
-                  <a:tcPr>
-                    <a:solidFill>
-                      <a:srgbClr val="FAFAF7"/>
-                    </a:solidFill>
-                  </a:tcPr>
-                </a:tc>
-                <a:tc>
-                  <a:txBody>
-                    <a:bodyPr/>
-                    <a:lstStyle/>
-                    <a:p>
-                      <a:pPr algn="ctr"/>
-                      <a:r>
-                        <a:rPr sz="1300" b="1">
-                          <a:solidFill>
-                            <a:srgbClr val="16804C"/>
-                          </a:solidFill>
-                          <a:latin typeface="Helvetica Neue"/>
-                        </a:rPr>
-                        <a:t>✓</a:t>
-                      </a:r>
-                    </a:p>
-                  </a:txBody>
-                  <a:tcPr>
-                    <a:solidFill>
-                      <a:srgbClr val="FAFAF7"/>
-                    </a:solidFill>
-                  </a:tcPr>
-                </a:tc>
-                <a:tc>
-                  <a:txBody>
-                    <a:bodyPr/>
-                    <a:lstStyle/>
-                    <a:p>
-                      <a:pPr algn="ctr"/>
-                      <a:r>
-                        <a:rPr sz="1300" b="1">
-                          <a:solidFill>
-                            <a:srgbClr val="16804C"/>
-                          </a:solidFill>
-                          <a:latin typeface="Helvetica Neue"/>
-                        </a:rPr>
-                        <a:t>✓</a:t>
-                      </a:r>
-                    </a:p>
-                  </a:txBody>
-                  <a:tcPr>
-                    <a:solidFill>
-                      <a:srgbClr val="FAFAF7"/>
-                    </a:solidFill>
-                  </a:tcPr>
-                </a:tc>
-                <a:tc>
-                  <a:txBody>
-                    <a:bodyPr/>
-                    <a:lstStyle/>
-                    <a:p>
-                      <a:pPr algn="ctr"/>
-                      <a:r>
-                        <a:rPr sz="1300" b="1">
-                          <a:solidFill>
-                            <a:srgbClr val="16804C"/>
-                          </a:solidFill>
-                          <a:latin typeface="Helvetica Neue"/>
-                        </a:rPr>
-                        <a:t>✓</a:t>
-                      </a:r>
-                    </a:p>
-                  </a:txBody>
-                  <a:tcPr>
-                    <a:solidFill>
-                      <a:srgbClr val="FAFAF7"/>
-                    </a:solidFill>
-                  </a:tcPr>
-                </a:tc>
-              </a:tr>
-              <a:tr h="537210">
-                <a:tc>
-                  <a:txBody>
-                    <a:bodyPr/>
-                    <a:lstStyle/>
-                    <a:p>
-                      <a:pPr algn="l"/>
-                      <a:r>
-                        <a:rPr sz="1300">
-                          <a:solidFill>
-                            <a:srgbClr val="181F2B"/>
-                          </a:solidFill>
-                          <a:latin typeface="Helvetica Neue"/>
-                        </a:rPr>
-                        <a:t>Peri-workout meal timing</a:t>
-                      </a:r>
-                    </a:p>
-                  </a:txBody>
-                  <a:tcPr>
-                    <a:solidFill>
-                      <a:srgbClr val="F1EEE6"/>
-                    </a:solidFill>
-                  </a:tcPr>
-                </a:tc>
-                <a:tc>
-                  <a:txBody>
-                    <a:bodyPr/>
-                    <a:lstStyle/>
-                    <a:p>
-                      <a:pPr algn="ctr"/>
-                      <a:r>
-                        <a:rPr sz="1300" b="1">
-                          <a:solidFill>
-                            <a:srgbClr val="B02A2A"/>
-                          </a:solidFill>
-                          <a:latin typeface="Helvetica Neue"/>
-                        </a:rPr>
-                        <a:t>✗</a:t>
-                      </a:r>
-                    </a:p>
-                  </a:txBody>
-                  <a:tcPr>
-                    <a:solidFill>
-                      <a:srgbClr val="F1EEE6"/>
-                    </a:solidFill>
-                  </a:tcPr>
-                </a:tc>
-                <a:tc>
-                  <a:txBody>
-                    <a:bodyPr/>
-                    <a:lstStyle/>
-                    <a:p>
-                      <a:pPr algn="ctr"/>
-                      <a:r>
-                        <a:rPr sz="1300">
-                          <a:solidFill>
-                            <a:srgbClr val="181F2B"/>
-                          </a:solidFill>
-                          <a:latin typeface="Helvetica Neue"/>
-                        </a:rPr>
-                        <a:t>partial</a:t>
-                      </a:r>
-                    </a:p>
-                  </a:txBody>
-                  <a:tcPr>
-                    <a:solidFill>
-                      <a:srgbClr val="F1EEE6"/>
-                    </a:solidFill>
-                  </a:tcPr>
-                </a:tc>
-                <a:tc>
-                  <a:txBody>
-                    <a:bodyPr/>
-                    <a:lstStyle/>
-                    <a:p>
-                      <a:pPr algn="ctr"/>
-                      <a:r>
-                        <a:rPr sz="1300" b="1">
-                          <a:solidFill>
-                            <a:srgbClr val="16804C"/>
-                          </a:solidFill>
-                          <a:latin typeface="Helvetica Neue"/>
-                        </a:rPr>
-                        <a:t>✓</a:t>
-                      </a:r>
-                    </a:p>
-                  </a:txBody>
-                  <a:tcPr>
-                    <a:solidFill>
-                      <a:srgbClr val="F1EEE6"/>
-                    </a:solidFill>
-                  </a:tcPr>
-                </a:tc>
-                <a:tc>
-                  <a:txBody>
-                    <a:bodyPr/>
-                    <a:lstStyle/>
-                    <a:p>
-                      <a:pPr algn="ctr"/>
-                      <a:r>
-                        <a:rPr sz="1300" b="1">
-                          <a:solidFill>
-                            <a:srgbClr val="16804C"/>
-                          </a:solidFill>
-                          <a:latin typeface="Helvetica Neue"/>
-                        </a:rPr>
-                        <a:t>✓</a:t>
-                      </a:r>
-                    </a:p>
-                  </a:txBody>
-                  <a:tcPr>
-                    <a:solidFill>
-                      <a:srgbClr val="F1EEE6"/>
-                    </a:solidFill>
-                  </a:tcPr>
-                </a:tc>
-              </a:tr>
-              <a:tr h="537210">
-                <a:tc>
-                  <a:txBody>
-                    <a:bodyPr/>
-                    <a:lstStyle/>
-                    <a:p>
-                      <a:pPr algn="l"/>
-                      <a:r>
-                        <a:rPr sz="1300">
-                          <a:solidFill>
-                            <a:srgbClr val="181F2B"/>
-                          </a:solidFill>
-                          <a:latin typeface="Helvetica Neue"/>
-                        </a:rPr>
-                        <a:t>Trade macro slack ↔ schedule</a:t>
-                      </a:r>
-                    </a:p>
-                  </a:txBody>
-                  <a:tcPr>
-                    <a:solidFill>
-                      <a:srgbClr val="FAFAF7"/>
-                    </a:solidFill>
-                  </a:tcPr>
-                </a:tc>
-                <a:tc>
-                  <a:txBody>
-                    <a:bodyPr/>
-                    <a:lstStyle/>
-                    <a:p>
-                      <a:pPr algn="ctr"/>
-                      <a:r>
-                        <a:rPr sz="1300" b="1">
-                          <a:solidFill>
-                            <a:srgbClr val="B02A2A"/>
-                          </a:solidFill>
-                          <a:latin typeface="Helvetica Neue"/>
-                        </a:rPr>
-                        <a:t>✗</a:t>
-                      </a:r>
-                    </a:p>
-                  </a:txBody>
-                  <a:tcPr>
-                    <a:solidFill>
-                      <a:srgbClr val="FAFAF7"/>
-                    </a:solidFill>
-                  </a:tcPr>
-                </a:tc>
-                <a:tc>
-                  <a:txBody>
-                    <a:bodyPr/>
-                    <a:lstStyle/>
-                    <a:p>
-                      <a:pPr algn="ctr"/>
-                      <a:r>
-                        <a:rPr sz="1300" b="1">
-                          <a:solidFill>
-                            <a:srgbClr val="B02A2A"/>
-                          </a:solidFill>
-                          <a:latin typeface="Helvetica Neue"/>
-                        </a:rPr>
-                        <a:t>✗</a:t>
-                      </a:r>
-                    </a:p>
-                  </a:txBody>
-                  <a:tcPr>
-                    <a:solidFill>
-                      <a:srgbClr val="FAFAF7"/>
-                    </a:solidFill>
-                  </a:tcPr>
-                </a:tc>
-                <a:tc>
-                  <a:txBody>
-                    <a:bodyPr/>
-                    <a:lstStyle/>
-                    <a:p>
-                      <a:pPr algn="ctr"/>
-                      <a:r>
-                        <a:rPr sz="1300" b="1">
-                          <a:solidFill>
-                            <a:srgbClr val="16804C"/>
-                          </a:solidFill>
-                          <a:latin typeface="Helvetica Neue"/>
-                        </a:rPr>
-                        <a:t>✓</a:t>
-                      </a:r>
-                    </a:p>
-                  </a:txBody>
-                  <a:tcPr>
-                    <a:solidFill>
-                      <a:srgbClr val="FAFAF7"/>
-                    </a:solidFill>
-                  </a:tcPr>
-                </a:tc>
-                <a:tc>
-                  <a:txBody>
-                    <a:bodyPr/>
-                    <a:lstStyle/>
-                    <a:p>
-                      <a:pPr algn="ctr"/>
-                      <a:r>
-                        <a:rPr sz="1300" b="1">
-                          <a:solidFill>
-                            <a:srgbClr val="16804C"/>
-                          </a:solidFill>
-                          <a:latin typeface="Helvetica Neue"/>
-                        </a:rPr>
-                        <a:t>✓</a:t>
-                      </a:r>
-                    </a:p>
-                  </a:txBody>
-                  <a:tcPr>
-                    <a:solidFill>
-                      <a:srgbClr val="FAFAF7"/>
-                    </a:solidFill>
-                  </a:tcPr>
-                </a:tc>
-              </a:tr>
-              <a:tr h="537210">
-                <a:tc>
-                  <a:txBody>
-                    <a:bodyPr/>
-                    <a:lstStyle/>
-                    <a:p>
-                      <a:pPr algn="l"/>
-                      <a:r>
-                        <a:rPr sz="1300">
-                          <a:solidFill>
-                            <a:srgbClr val="181F2B"/>
-                          </a:solidFill>
-                          <a:latin typeface="Helvetica Neue"/>
-                        </a:rPr>
-                        <a:t>Warm-start from two-stage</a:t>
-                      </a:r>
-                    </a:p>
-                  </a:txBody>
-                  <a:tcPr>
-                    <a:solidFill>
-                      <a:srgbClr val="F1EEE6"/>
-                    </a:solidFill>
-                  </a:tcPr>
-                </a:tc>
-                <a:tc>
-                  <a:txBody>
-                    <a:bodyPr/>
-                    <a:lstStyle/>
-                    <a:p>
-                      <a:pPr algn="ctr"/>
-                      <a:r>
-                        <a:rPr sz="1300" b="1">
-                          <a:solidFill>
-                            <a:srgbClr val="B02A2A"/>
-                          </a:solidFill>
-                          <a:latin typeface="Helvetica Neue"/>
-                        </a:rPr>
-                        <a:t>✗</a:t>
-                      </a:r>
-                    </a:p>
-                  </a:txBody>
-                  <a:tcPr>
-                    <a:solidFill>
-                      <a:srgbClr val="F1EEE6"/>
-                    </a:solidFill>
-                  </a:tcPr>
-                </a:tc>
-                <a:tc>
-                  <a:txBody>
-                    <a:bodyPr/>
-                    <a:lstStyle/>
-                    <a:p>
-                      <a:pPr algn="ctr"/>
-                      <a:r>
-                        <a:rPr sz="1300" b="1">
-                          <a:solidFill>
-                            <a:srgbClr val="B02A2A"/>
-                          </a:solidFill>
-                          <a:latin typeface="Helvetica Neue"/>
-                        </a:rPr>
-                        <a:t>✗</a:t>
-                      </a:r>
-                    </a:p>
-                  </a:txBody>
-                  <a:tcPr>
-                    <a:solidFill>
-                      <a:srgbClr val="F1EEE6"/>
-                    </a:solidFill>
-                  </a:tcPr>
-                </a:tc>
-                <a:tc>
-                  <a:txBody>
-                    <a:bodyPr/>
-                    <a:lstStyle/>
-                    <a:p>
-                      <a:pPr algn="ctr"/>
-                      <a:r>
-                        <a:rPr sz="1300" b="1">
-                          <a:solidFill>
-                            <a:srgbClr val="B02A2A"/>
-                          </a:solidFill>
-                          <a:latin typeface="Helvetica Neue"/>
-                        </a:rPr>
-                        <a:t>✗</a:t>
-                      </a:r>
-                    </a:p>
-                  </a:txBody>
-                  <a:tcPr>
-                    <a:solidFill>
-                      <a:srgbClr val="F1EEE6"/>
-                    </a:solidFill>
-                  </a:tcPr>
-                </a:tc>
-                <a:tc>
-                  <a:txBody>
-                    <a:bodyPr/>
-                    <a:lstStyle/>
-                    <a:p>
-                      <a:pPr algn="ctr"/>
-                      <a:r>
-                        <a:rPr sz="1300" b="1">
-                          <a:solidFill>
-                            <a:srgbClr val="16804C"/>
-                          </a:solidFill>
-                          <a:latin typeface="Helvetica Neue"/>
-                        </a:rPr>
-                        <a:t>✓</a:t>
-                      </a:r>
-                    </a:p>
-                  </a:txBody>
-                  <a:tcPr>
-                    <a:solidFill>
-                      <a:srgbClr val="F1EEE6"/>
-                    </a:solidFill>
-                  </a:tcPr>
-                </a:tc>
-              </a:tr>
-              <a:tr h="537210">
-                <a:tc>
-                  <a:txBody>
-                    <a:bodyPr/>
-                    <a:lstStyle/>
-                    <a:p>
-                      <a:pPr algn="l"/>
-                      <a:r>
-                        <a:rPr sz="1300">
-                          <a:solidFill>
-                            <a:srgbClr val="181F2B"/>
-                          </a:solidFill>
-                          <a:latin typeface="Helvetica Neue"/>
-                        </a:rPr>
-                        <a:t>Technique</a:t>
-                      </a:r>
-                    </a:p>
-                  </a:txBody>
-                  <a:tcPr>
-                    <a:solidFill>
-                      <a:srgbClr val="FAFAF7"/>
-                    </a:solidFill>
-                  </a:tcPr>
-                </a:tc>
-                <a:tc>
-                  <a:txBody>
-                    <a:bodyPr/>
-                    <a:lstStyle/>
-                    <a:p>
-                      <a:pPr algn="ctr"/>
-                      <a:r>
-                        <a:rPr sz="1300">
-                          <a:solidFill>
-                            <a:srgbClr val="181F2B"/>
-                          </a:solidFill>
-                          <a:latin typeface="Helvetica Neue"/>
-                        </a:rPr>
-                        <a:t>LP / MIP</a:t>
-                      </a:r>
-                    </a:p>
-                  </a:txBody>
-                  <a:tcPr>
-                    <a:solidFill>
-                      <a:srgbClr val="FAFAF7"/>
-                    </a:solidFill>
-                  </a:tcPr>
-                </a:tc>
-                <a:tc>
-                  <a:txBody>
-                    <a:bodyPr/>
-                    <a:lstStyle/>
-                    <a:p>
-                      <a:pPr algn="ctr"/>
-                      <a:r>
-                        <a:rPr sz="1300">
-                          <a:solidFill>
-                            <a:srgbClr val="181F2B"/>
-                          </a:solidFill>
-                          <a:latin typeface="Helvetica Neue"/>
-                        </a:rPr>
-                        <a:t>MIP → CP-SAT</a:t>
-                      </a:r>
-                    </a:p>
-                  </a:txBody>
-                  <a:tcPr>
-                    <a:solidFill>
-                      <a:srgbClr val="FAFAF7"/>
-                    </a:solidFill>
-                  </a:tcPr>
-                </a:tc>
-                <a:tc>
-                  <a:txBody>
-                    <a:bodyPr/>
-                    <a:lstStyle/>
-                    <a:p>
-                      <a:pPr algn="ctr"/>
-                      <a:r>
-                        <a:rPr sz="1300">
-                          <a:solidFill>
-                            <a:srgbClr val="181F2B"/>
-                          </a:solidFill>
-                          <a:latin typeface="Helvetica Neue"/>
-                        </a:rPr>
-                        <a:t>CP-SAT</a:t>
-                      </a:r>
-                    </a:p>
-                  </a:txBody>
-                  <a:tcPr>
-                    <a:solidFill>
-                      <a:srgbClr val="FAFAF7"/>
-                    </a:solidFill>
-                  </a:tcPr>
-                </a:tc>
-                <a:tc>
-                  <a:txBody>
-                    <a:bodyPr/>
-                    <a:lstStyle/>
-                    <a:p>
-                      <a:pPr algn="ctr"/>
-                      <a:r>
-                        <a:rPr sz="1300">
-                          <a:solidFill>
-                            <a:srgbClr val="181F2B"/>
-                          </a:solidFill>
-                          <a:latin typeface="Helvetica Neue"/>
-                        </a:rPr>
-                        <a:t>CP-SAT + AddHint</a:t>
-                      </a:r>
-                    </a:p>
-                  </a:txBody>
-                  <a:tcPr>
-                    <a:solidFill>
-                      <a:srgbClr val="FAFAF7"/>
-                    </a:solidFill>
-                  </a:tcPr>
-                </a:tc>
-              </a:tr>
-            </a:tbl>
-          </a:graphicData>
-        </a:graphic>
-      </p:graphicFrame>
+              <a:t>4 / 9</a:t>
+            </a:r>
+          </a:p>
+        </p:txBody>
+      </p:sp>
+      <p:sp>
+        <p:nvSpPr>
+          <p:cNvPr id="7" name="Rounded Rectangle 6"/>
+          <p:cNvSpPr/>
+          <p:nvPr/>
+        </p:nvSpPr>
+        <p:spPr>
+          <a:xfrm>
+            <a:off x="548640" y="1783080"/>
+            <a:ext cx="5394960" cy="4480560"/>
+          </a:xfrm>
+          <a:prstGeom prst="roundRect">
+            <a:avLst>
+              <a:gd name="adj" fmla="val 6000"/>
+            </a:avLst>
+          </a:prstGeom>
+          <a:solidFill>
+            <a:srgbClr val="F1EEE6"/>
+          </a:solidFill>
+          <a:ln>
+            <a:noFill/>
+          </a:ln>
+          <a:effectLst/>
+        </p:spPr>
+        <p:style>
+          <a:lnRef idx="1">
+            <a:schemeClr val="accent1"/>
+          </a:lnRef>
+          <a:fillRef idx="3">
+            <a:schemeClr val="accent1"/>
+          </a:fillRef>
+          <a:effectRef idx="2">
+            <a:schemeClr val="accent1"/>
+          </a:effectRef>
+          <a:fontRef idx="minor">
+            <a:schemeClr val="lt1"/>
+          </a:fontRef>
+        </p:style>
+        <p:txBody>
+          <a:bodyPr rtlCol="0" anchor="ctr"/>
+          <a:lstStyle/>
+          <a:p>
+            <a:pPr algn="ctr"/>
+          </a:p>
+        </p:txBody>
+      </p:sp>
       <p:sp>
         <p:nvSpPr>
           <p:cNvPr id="8" name="TextBox 7"/>
@@ -6996,8 +5121,8 @@
         </p:nvSpPr>
         <p:spPr>
           <a:xfrm>
-            <a:off x="548640" y="6126480"/>
-            <a:ext cx="11091672" cy="457200"/>
+            <a:off x="822960" y="1965960"/>
+            <a:ext cx="5394960" cy="365760"/>
           </a:xfrm>
           <a:prstGeom prst="rect">
             <a:avLst/>
@@ -7012,17 +5137,258 @@
           <a:p>
             <a:pPr algn="l">
               <a:lnSpc>
+                <a:spcPct val="120000"/>
+              </a:lnSpc>
+            </a:pPr>
+            <a:r>
+              <a:rPr sz="1100" b="1" i="0">
+                <a:solidFill>
+                  <a:srgbClr val="1F6FB0"/>
+                </a:solidFill>
+                <a:latin typeface="Helvetica Neue"/>
+              </a:rPr>
+              <a:t>TIME LIVES IN INTEGERS</a:t>
+            </a:r>
+          </a:p>
+        </p:txBody>
+      </p:sp>
+      <p:sp>
+        <p:nvSpPr>
+          <p:cNvPr id="9" name="TextBox 8"/>
+          <p:cNvSpPr txBox="1"/>
+          <p:nvPr/>
+        </p:nvSpPr>
+        <p:spPr>
+          <a:xfrm>
+            <a:off x="822960" y="2286000"/>
+            <a:ext cx="4846320" cy="548640"/>
+          </a:xfrm>
+          <a:prstGeom prst="rect">
+            <a:avLst/>
+          </a:prstGeom>
+          <a:noFill/>
+        </p:spPr>
+        <p:txBody>
+          <a:bodyPr wrap="square" lIns="0" rIns="0" tIns="0" bIns="0" anchor="t">
+            <a:spAutoFit/>
+          </a:bodyPr>
+          <a:lstStyle/>
+          <a:p>
+            <a:pPr algn="l">
+              <a:lnSpc>
+                <a:spcPct val="130000"/>
+              </a:lnSpc>
+            </a:pPr>
+            <a:r>
+              <a:rPr sz="1500" b="1" i="0">
+                <a:solidFill>
+                  <a:srgbClr val="181F2B"/>
+                </a:solidFill>
+                <a:latin typeface="Helvetica Neue"/>
+              </a:rPr>
+              <a:t>7 days × 48 half-hour slots = 336 slots/week.</a:t>
+            </a:r>
+          </a:p>
+        </p:txBody>
+      </p:sp>
+      <p:sp>
+        <p:nvSpPr>
+          <p:cNvPr id="10" name="TextBox 9"/>
+          <p:cNvSpPr txBox="1"/>
+          <p:nvPr/>
+        </p:nvSpPr>
+        <p:spPr>
+          <a:xfrm>
+            <a:off x="822960" y="2926080"/>
+            <a:ext cx="4846320" cy="3200400"/>
+          </a:xfrm>
+          <a:prstGeom prst="rect">
+            <a:avLst/>
+          </a:prstGeom>
+          <a:noFill/>
+        </p:spPr>
+        <p:txBody>
+          <a:bodyPr wrap="square" lIns="0" rIns="0" tIns="0" bIns="0" anchor="t">
+            <a:spAutoFit/>
+          </a:bodyPr>
+          <a:lstStyle/>
+          <a:p>
+            <a:pPr algn="l">
+              <a:lnSpc>
+                <a:spcPct val="150000"/>
+              </a:lnSpc>
+            </a:pPr>
+            <a:r>
+              <a:rPr sz="1300" b="0" i="0">
+                <a:solidFill>
+                  <a:srgbClr val="555F6D"/>
+                </a:solidFill>
+                <a:latin typeface="Helvetica Neue"/>
+              </a:rPr>
+              <a:t>We work in integer slots, integer cents, and integer grams because CP-SAT needs integer math anyway and it makes the tests easy to write. Half-hour slots are fine enough to express a real schedule (lifts, meals, sleep) and coarse enough that the search stays fast.</a:t>
+            </a:r>
+          </a:p>
+        </p:txBody>
+      </p:sp>
+      <p:sp>
+        <p:nvSpPr>
+          <p:cNvPr id="11" name="Rounded Rectangle 10"/>
+          <p:cNvSpPr/>
+          <p:nvPr/>
+        </p:nvSpPr>
+        <p:spPr>
+          <a:xfrm>
+            <a:off x="6245352" y="1783080"/>
+            <a:ext cx="5394960" cy="4480560"/>
+          </a:xfrm>
+          <a:prstGeom prst="roundRect">
+            <a:avLst>
+              <a:gd name="adj" fmla="val 6000"/>
+            </a:avLst>
+          </a:prstGeom>
+          <a:solidFill>
+            <a:srgbClr val="F1EEE6"/>
+          </a:solidFill>
+          <a:ln>
+            <a:noFill/>
+          </a:ln>
+          <a:effectLst/>
+        </p:spPr>
+        <p:style>
+          <a:lnRef idx="1">
+            <a:schemeClr val="accent1"/>
+          </a:lnRef>
+          <a:fillRef idx="3">
+            <a:schemeClr val="accent1"/>
+          </a:fillRef>
+          <a:effectRef idx="2">
+            <a:schemeClr val="accent1"/>
+          </a:effectRef>
+          <a:fontRef idx="minor">
+            <a:schemeClr val="lt1"/>
+          </a:fontRef>
+        </p:style>
+        <p:txBody>
+          <a:bodyPr rtlCol="0" anchor="ctr"/>
+          <a:lstStyle/>
+          <a:p>
+            <a:pPr algn="ctr"/>
+          </a:p>
+        </p:txBody>
+      </p:sp>
+      <p:sp>
+        <p:nvSpPr>
+          <p:cNvPr id="12" name="TextBox 11"/>
+          <p:cNvSpPr txBox="1"/>
+          <p:nvPr/>
+        </p:nvSpPr>
+        <p:spPr>
+          <a:xfrm>
+            <a:off x="6519672" y="1965960"/>
+            <a:ext cx="5394960" cy="365760"/>
+          </a:xfrm>
+          <a:prstGeom prst="rect">
+            <a:avLst/>
+          </a:prstGeom>
+          <a:noFill/>
+        </p:spPr>
+        <p:txBody>
+          <a:bodyPr wrap="square" lIns="0" rIns="0" tIns="0" bIns="0" anchor="t">
+            <a:spAutoFit/>
+          </a:bodyPr>
+          <a:lstStyle/>
+          <a:p>
+            <a:pPr algn="l">
+              <a:lnSpc>
+                <a:spcPct val="120000"/>
+              </a:lnSpc>
+            </a:pPr>
+            <a:r>
+              <a:rPr sz="1100" b="1" i="0">
+                <a:solidFill>
+                  <a:srgbClr val="1F6FB0"/>
+                </a:solidFill>
+                <a:latin typeface="Helvetica Neue"/>
+              </a:rPr>
+              <a:t>WHAT THE SOLVER DECIDES</a:t>
+            </a:r>
+          </a:p>
+        </p:txBody>
+      </p:sp>
+      <p:sp>
+        <p:nvSpPr>
+          <p:cNvPr id="13" name="TextBox 12"/>
+          <p:cNvSpPr txBox="1"/>
+          <p:nvPr/>
+        </p:nvSpPr>
+        <p:spPr>
+          <a:xfrm>
+            <a:off x="6519672" y="2286000"/>
+            <a:ext cx="4846320" cy="457200"/>
+          </a:xfrm>
+          <a:prstGeom prst="rect">
+            <a:avLst/>
+          </a:prstGeom>
+          <a:noFill/>
+        </p:spPr>
+        <p:txBody>
+          <a:bodyPr wrap="square" lIns="0" rIns="0" tIns="0" bIns="0" anchor="t">
+            <a:spAutoFit/>
+          </a:bodyPr>
+          <a:lstStyle/>
+          <a:p>
+            <a:pPr algn="l">
+              <a:lnSpc>
                 <a:spcPct val="135000"/>
               </a:lnSpc>
             </a:pPr>
             <a:r>
-              <a:rPr sz="1200" b="0" i="1">
+              <a:rPr sz="1400" b="1" i="0">
+                <a:solidFill>
+                  <a:srgbClr val="181F2B"/>
+                </a:solidFill>
+                <a:latin typeface="Helvetica Neue"/>
+              </a:rPr>
+              <a:t>Servings of each food, where each meal sits, when each workout starts, when sleep begins.</a:t>
+            </a:r>
+          </a:p>
+        </p:txBody>
+      </p:sp>
+      <p:sp>
+        <p:nvSpPr>
+          <p:cNvPr id="14" name="TextBox 13"/>
+          <p:cNvSpPr txBox="1"/>
+          <p:nvPr/>
+        </p:nvSpPr>
+        <p:spPr>
+          <a:xfrm>
+            <a:off x="6519672" y="3246120"/>
+            <a:ext cx="4846320" cy="2926080"/>
+          </a:xfrm>
+          <a:prstGeom prst="rect">
+            <a:avLst/>
+          </a:prstGeom>
+          <a:noFill/>
+        </p:spPr>
+        <p:txBody>
+          <a:bodyPr wrap="square" lIns="0" rIns="0" tIns="0" bIns="0" anchor="t">
+            <a:spAutoFit/>
+          </a:bodyPr>
+          <a:lstStyle/>
+          <a:p>
+            <a:pPr algn="l">
+              <a:lnSpc>
+                <a:spcPct val="150000"/>
+              </a:lnSpc>
+            </a:pPr>
+            <a:r>
+              <a:rPr sz="1300" b="0" i="0">
                 <a:solidFill>
                   <a:srgbClr val="555F6D"/>
                 </a:solidFill>
                 <a:latin typeface="Helvetica Neue"/>
               </a:rPr>
-              <a:t>Joint CP-SAT is the marquee model — a single CP-SAT model where the solver can trade a small macro deviation for a better-timed schedule, which neither baseline can do.</a:t>
+              <a:t>It honors hard rules — calorie band, protein floor, weekly budget, no two activities at once, recovery between hard workouts, sleep window — and it minimises a soft cost: macro deviation, money spent, missed peri-workout meals, missed hydration, day preferences. Hard things are constraints. Soft things are the score.</a:t>
             </a:r>
           </a:p>
         </p:txBody>
@@ -7112,7 +5478,7 @@
           <a:p>
             <a:pPr algn="l">
               <a:lnSpc>
-                <a:spcPct val="115000"/>
+                <a:spcPct val="120000"/>
               </a:lnSpc>
             </a:pPr>
             <a:r>
@@ -7122,7 +5488,7 @@
                 </a:solidFill>
                 <a:latin typeface="Helvetica Neue"/>
               </a:rPr>
-              <a:t>2 · PROJECT FORMULATION</a:t>
+              <a:t>3 · LIVE DEMO</a:t>
             </a:r>
           </a:p>
         </p:txBody>
@@ -7136,7 +5502,7 @@
         <p:spPr>
           <a:xfrm>
             <a:off x="548640" y="685800"/>
-            <a:ext cx="10972800" cy="640080"/>
+            <a:ext cx="11091672" cy="822960"/>
           </a:xfrm>
           <a:prstGeom prst="rect">
             <a:avLst/>
@@ -7151,17 +5517,17 @@
           <a:p>
             <a:pPr algn="l">
               <a:lnSpc>
-                <a:spcPct val="115000"/>
-              </a:lnSpc>
-            </a:pPr>
-            <a:r>
-              <a:rPr sz="3000" b="1" i="0">
+                <a:spcPct val="110000"/>
+              </a:lnSpc>
+            </a:pPr>
+            <a:r>
+              <a:rPr sz="2800" b="1" i="0">
                 <a:solidFill>
                   <a:srgbClr val="181F2B"/>
                 </a:solidFill>
                 <a:latin typeface="Helvetica Neue"/>
               </a:rPr>
-              <a:t>Hard constraints vs soft objective, kept explicit in code.</a:t>
+              <a:t>Switching to the terminal — let's run it.</a:t>
             </a:r>
           </a:p>
         </p:txBody>
@@ -7174,7 +5540,7 @@
         </p:nvCxnSpPr>
         <p:spPr>
           <a:xfrm>
-            <a:off x="548640" y="1417320"/>
+            <a:off x="548640" y="1508760"/>
             <a:ext cx="11091672" cy="0"/>
           </a:xfrm>
           <a:prstGeom prst="line">
@@ -7225,7 +5591,7 @@
           <a:p>
             <a:pPr algn="r">
               <a:lnSpc>
-                <a:spcPct val="115000"/>
+                <a:spcPct val="120000"/>
               </a:lnSpc>
             </a:pPr>
             <a:r>
@@ -7235,7 +5601,7 @@
                 </a:solidFill>
                 <a:latin typeface="Helvetica Neue"/>
               </a:rPr>
-              <a:t>5 / 10</a:t>
+              <a:t>5 / 9</a:t>
             </a:r>
           </a:p>
         </p:txBody>
@@ -7248,8 +5614,8 @@
         </p:nvSpPr>
         <p:spPr>
           <a:xfrm>
-            <a:off x="548640" y="1691640"/>
-            <a:ext cx="5394960" cy="4572000"/>
+            <a:off x="548640" y="1828800"/>
+            <a:ext cx="11091672" cy="2331720"/>
           </a:xfrm>
           <a:prstGeom prst="roundRect">
             <a:avLst>
@@ -7257,7 +5623,7 @@
             </a:avLst>
           </a:prstGeom>
           <a:solidFill>
-            <a:srgbClr val="F1EEE6"/>
+            <a:srgbClr val="1B212C"/>
           </a:solidFill>
           <a:ln>
             <a:noFill/>
@@ -7294,8 +5660,8 @@
         </p:nvSpPr>
         <p:spPr>
           <a:xfrm>
-            <a:off x="822960" y="1874520"/>
-            <a:ext cx="5394960" cy="365760"/>
+            <a:off x="868680" y="2011680"/>
+            <a:ext cx="10332720" cy="457200"/>
           </a:xfrm>
           <a:prstGeom prst="rect">
             <a:avLst/>
@@ -7310,17 +5676,17 @@
           <a:p>
             <a:pPr algn="l">
               <a:lnSpc>
-                <a:spcPct val="115000"/>
-              </a:lnSpc>
-            </a:pPr>
-            <a:r>
-              <a:rPr sz="1100" b="1" i="0">
-                <a:solidFill>
-                  <a:srgbClr val="E06B1F"/>
-                </a:solidFill>
-                <a:latin typeface="Helvetica Neue"/>
-              </a:rPr>
-              <a:t>HARD CONSTRAINTS  (the user’s goals)</a:t>
+                <a:spcPct val="120000"/>
+              </a:lnSpc>
+            </a:pPr>
+            <a:r>
+              <a:rPr sz="1200" b="1" i="0">
+                <a:solidFill>
+                  <a:srgbClr val="F6C86E"/>
+                </a:solidFill>
+                <a:latin typeface="Helvetica Neue"/>
+              </a:rPr>
+              <a:t>1.  Run all four solvers on a balanced student</a:t>
             </a:r>
           </a:p>
         </p:txBody>
@@ -7333,8 +5699,8 @@
         </p:nvSpPr>
         <p:spPr>
           <a:xfrm>
-            <a:off x="822960" y="2240280"/>
-            <a:ext cx="5394960" cy="365760"/>
+            <a:off x="868680" y="2377440"/>
+            <a:ext cx="10332720" cy="457200"/>
           </a:xfrm>
           <a:prstGeom prst="rect">
             <a:avLst/>
@@ -7349,17 +5715,17 @@
           <a:p>
             <a:pPr algn="l">
               <a:lnSpc>
-                <a:spcPct val="115000"/>
-              </a:lnSpc>
-            </a:pPr>
-            <a:r>
-              <a:rPr sz="1400" b="1" i="0">
-                <a:solidFill>
-                  <a:srgbClr val="181F2B"/>
-                </a:solidFill>
-                <a:latin typeface="Helvetica Neue"/>
-              </a:rPr>
-              <a:t>Encoded as model constraints</a:t>
+                <a:spcPct val="120000"/>
+              </a:lnSpc>
+            </a:pPr>
+            <a:r>
+              <a:rPr sz="1400" b="0" i="0">
+                <a:solidFill>
+                  <a:srgbClr val="EAEAEA"/>
+                </a:solidFill>
+                <a:latin typeface="Menlo"/>
+              </a:rPr>
+              <a:t>$  .venv/bin/python  scripts/run_demo.py</a:t>
             </a:r>
           </a:p>
         </p:txBody>
@@ -7372,8 +5738,8 @@
         </p:nvSpPr>
         <p:spPr>
           <a:xfrm>
-            <a:off x="822960" y="2697480"/>
-            <a:ext cx="4846320" cy="329184"/>
+            <a:off x="868680" y="2926080"/>
+            <a:ext cx="10332720" cy="457200"/>
           </a:xfrm>
           <a:prstGeom prst="rect">
             <a:avLst/>
@@ -7388,31 +5754,70 @@
           <a:p>
             <a:pPr algn="l">
               <a:lnSpc>
-                <a:spcPct val="115000"/>
+                <a:spcPct val="120000"/>
+              </a:lnSpc>
+            </a:pPr>
+            <a:r>
+              <a:rPr sz="1200" b="1" i="0">
+                <a:solidFill>
+                  <a:srgbClr val="F6C86E"/>
+                </a:solidFill>
+                <a:latin typeface="Helvetica Neue"/>
+              </a:rPr>
+              <a:t>2.  Solve a denser week with the joint optimizer + render the schedule</a:t>
+            </a:r>
+          </a:p>
+        </p:txBody>
+      </p:sp>
+      <p:sp>
+        <p:nvSpPr>
+          <p:cNvPr id="11" name="TextBox 10"/>
+          <p:cNvSpPr txBox="1"/>
+          <p:nvPr/>
+        </p:nvSpPr>
+        <p:spPr>
+          <a:xfrm>
+            <a:off x="868680" y="3291840"/>
+            <a:ext cx="10332720" cy="457200"/>
+          </a:xfrm>
+          <a:prstGeom prst="rect">
+            <a:avLst/>
+          </a:prstGeom>
+          <a:noFill/>
+        </p:spPr>
+        <p:txBody>
+          <a:bodyPr wrap="square" lIns="0" rIns="0" tIns="0" bIns="0" anchor="t">
+            <a:spAutoFit/>
+          </a:bodyPr>
+          <a:lstStyle/>
+          <a:p>
+            <a:pPr algn="l">
+              <a:lnSpc>
+                <a:spcPct val="120000"/>
               </a:lnSpc>
             </a:pPr>
             <a:r>
               <a:rPr sz="1200" b="0" i="0">
                 <a:solidFill>
-                  <a:srgbClr val="181F2B"/>
-                </a:solidFill>
-                <a:latin typeface="Helvetica Neue"/>
-              </a:rPr>
-              <a:t>•  Daily calorie band ± tolerance</a:t>
-            </a:r>
-          </a:p>
-        </p:txBody>
-      </p:sp>
-      <p:sp>
-        <p:nvSpPr>
-          <p:cNvPr id="11" name="TextBox 10"/>
-          <p:cNvSpPr txBox="1"/>
-          <p:nvPr/>
-        </p:nvSpPr>
-        <p:spPr>
-          <a:xfrm>
-            <a:off x="822960" y="3026664"/>
-            <a:ext cx="4846320" cy="329184"/>
+                  <a:srgbClr val="EAEAEA"/>
+                </a:solidFill>
+                <a:latin typeface="Menlo"/>
+              </a:rPr>
+              <a:t>$  .venv/bin/python  -m  src.app.cli  solve  --preset  dense_training  --solver  joint_cpsat  --figure</a:t>
+            </a:r>
+          </a:p>
+        </p:txBody>
+      </p:sp>
+      <p:sp>
+        <p:nvSpPr>
+          <p:cNvPr id="12" name="TextBox 11"/>
+          <p:cNvSpPr txBox="1"/>
+          <p:nvPr/>
+        </p:nvSpPr>
+        <p:spPr>
+          <a:xfrm>
+            <a:off x="868680" y="3703320"/>
+            <a:ext cx="10332720" cy="457200"/>
           </a:xfrm>
           <a:prstGeom prst="rect">
             <a:avLst/>
@@ -7427,31 +5832,31 @@
           <a:p>
             <a:pPr algn="l">
               <a:lnSpc>
-                <a:spcPct val="115000"/>
-              </a:lnSpc>
-            </a:pPr>
-            <a:r>
-              <a:rPr sz="1200" b="0" i="0">
-                <a:solidFill>
-                  <a:srgbClr val="181F2B"/>
-                </a:solidFill>
-                <a:latin typeface="Helvetica Neue"/>
-              </a:rPr>
-              <a:t>•  Daily protein floor</a:t>
-            </a:r>
-          </a:p>
-        </p:txBody>
-      </p:sp>
-      <p:sp>
-        <p:nvSpPr>
-          <p:cNvPr id="12" name="TextBox 11"/>
-          <p:cNvSpPr txBox="1"/>
-          <p:nvPr/>
-        </p:nvSpPr>
-        <p:spPr>
-          <a:xfrm>
-            <a:off x="822960" y="3355848"/>
-            <a:ext cx="4846320" cy="329184"/>
+                <a:spcPct val="120000"/>
+              </a:lnSpc>
+            </a:pPr>
+            <a:r>
+              <a:rPr sz="1200" b="1" i="0">
+                <a:solidFill>
+                  <a:srgbClr val="F6C86E"/>
+                </a:solidFill>
+                <a:latin typeface="Helvetica Neue"/>
+              </a:rPr>
+              <a:t>3.  Open the rendered weekly plan</a:t>
+            </a:r>
+          </a:p>
+        </p:txBody>
+      </p:sp>
+      <p:sp>
+        <p:nvSpPr>
+          <p:cNvPr id="13" name="TextBox 12"/>
+          <p:cNvSpPr txBox="1"/>
+          <p:nvPr/>
+        </p:nvSpPr>
+        <p:spPr>
+          <a:xfrm>
+            <a:off x="868680" y="4069080"/>
+            <a:ext cx="10332720" cy="457200"/>
           </a:xfrm>
           <a:prstGeom prst="rect">
             <a:avLst/>
@@ -7466,31 +5871,31 @@
           <a:p>
             <a:pPr algn="l">
               <a:lnSpc>
-                <a:spcPct val="115000"/>
-              </a:lnSpc>
-            </a:pPr>
-            <a:r>
-              <a:rPr sz="1200" b="0" i="0">
-                <a:solidFill>
-                  <a:srgbClr val="181F2B"/>
-                </a:solidFill>
-                <a:latin typeface="Helvetica Neue"/>
-              </a:rPr>
-              <a:t>•  Weekly budget cap</a:t>
-            </a:r>
-          </a:p>
-        </p:txBody>
-      </p:sp>
-      <p:sp>
-        <p:nvSpPr>
-          <p:cNvPr id="13" name="TextBox 12"/>
-          <p:cNvSpPr txBox="1"/>
-          <p:nvPr/>
-        </p:nvSpPr>
-        <p:spPr>
-          <a:xfrm>
-            <a:off x="822960" y="3685032"/>
-            <a:ext cx="4846320" cy="329184"/>
+                <a:spcPct val="120000"/>
+              </a:lnSpc>
+            </a:pPr>
+            <a:r>
+              <a:rPr sz="1400" b="0" i="0">
+                <a:solidFill>
+                  <a:srgbClr val="EAEAEA"/>
+                </a:solidFill>
+                <a:latin typeface="Menlo"/>
+              </a:rPr>
+              <a:t>$  open  reports/figures/schedule_dense_training_joint_cpsat.png</a:t>
+            </a:r>
+          </a:p>
+        </p:txBody>
+      </p:sp>
+      <p:sp>
+        <p:nvSpPr>
+          <p:cNvPr id="14" name="TextBox 13"/>
+          <p:cNvSpPr txBox="1"/>
+          <p:nvPr/>
+        </p:nvSpPr>
+        <p:spPr>
+          <a:xfrm>
+            <a:off x="548640" y="4434840"/>
+            <a:ext cx="11091672" cy="1828800"/>
           </a:xfrm>
           <a:prstGeom prst="rect">
             <a:avLst/>
@@ -7505,648 +5910,17 @@
           <a:p>
             <a:pPr algn="l">
               <a:lnSpc>
-                <a:spcPct val="115000"/>
-              </a:lnSpc>
-            </a:pPr>
-            <a:r>
-              <a:rPr sz="1200" b="0" i="0">
-                <a:solidFill>
-                  <a:srgbClr val="181F2B"/>
-                </a:solidFill>
-                <a:latin typeface="Helvetica Neue"/>
-              </a:rPr>
-              <a:t>•  Dietary exclusions / pantry restriction</a:t>
-            </a:r>
-          </a:p>
-        </p:txBody>
-      </p:sp>
-      <p:sp>
-        <p:nvSpPr>
-          <p:cNvPr id="14" name="TextBox 13"/>
-          <p:cNvSpPr txBox="1"/>
-          <p:nvPr/>
-        </p:nvSpPr>
-        <p:spPr>
-          <a:xfrm>
-            <a:off x="822960" y="4014216"/>
-            <a:ext cx="4846320" cy="329184"/>
-          </a:xfrm>
-          <a:prstGeom prst="rect">
-            <a:avLst/>
-          </a:prstGeom>
-          <a:noFill/>
-        </p:spPr>
-        <p:txBody>
-          <a:bodyPr wrap="square" lIns="0" rIns="0" tIns="0" bIns="0" anchor="t">
-            <a:spAutoFit/>
-          </a:bodyPr>
-          <a:lstStyle/>
-          <a:p>
-            <a:pPr algn="l">
-              <a:lnSpc>
-                <a:spcPct val="115000"/>
-              </a:lnSpc>
-            </a:pPr>
-            <a:r>
-              <a:rPr sz="1200" b="0" i="0">
-                <a:solidFill>
-                  <a:srgbClr val="181F2B"/>
-                </a:solidFill>
-                <a:latin typeface="Helvetica Neue"/>
-              </a:rPr>
-              <a:t>•  AddNoOverlap on meals + workouts</a:t>
-            </a:r>
-          </a:p>
-        </p:txBody>
-      </p:sp>
-      <p:sp>
-        <p:nvSpPr>
-          <p:cNvPr id="15" name="TextBox 14"/>
-          <p:cNvSpPr txBox="1"/>
-          <p:nvPr/>
-        </p:nvSpPr>
-        <p:spPr>
-          <a:xfrm>
-            <a:off x="822960" y="4343399"/>
-            <a:ext cx="4846320" cy="329184"/>
-          </a:xfrm>
-          <a:prstGeom prst="rect">
-            <a:avLst/>
-          </a:prstGeom>
-          <a:noFill/>
-        </p:spPr>
-        <p:txBody>
-          <a:bodyPr wrap="square" lIns="0" rIns="0" tIns="0" bIns="0" anchor="t">
-            <a:spAutoFit/>
-          </a:bodyPr>
-          <a:lstStyle/>
-          <a:p>
-            <a:pPr algn="l">
-              <a:lnSpc>
-                <a:spcPct val="115000"/>
-              </a:lnSpc>
-            </a:pPr>
-            <a:r>
-              <a:rPr sz="1200" b="0" i="0">
-                <a:solidFill>
-                  <a:srgbClr val="181F2B"/>
-                </a:solidFill>
-                <a:latin typeface="Helvetica Neue"/>
-              </a:rPr>
-              <a:t>•  Recovery spacing between hard workouts</a:t>
-            </a:r>
-          </a:p>
-        </p:txBody>
-      </p:sp>
-      <p:sp>
-        <p:nvSpPr>
-          <p:cNvPr id="16" name="TextBox 15"/>
-          <p:cNvSpPr txBox="1"/>
-          <p:nvPr/>
-        </p:nvSpPr>
-        <p:spPr>
-          <a:xfrm>
-            <a:off x="822960" y="4672584"/>
-            <a:ext cx="4846320" cy="329184"/>
-          </a:xfrm>
-          <a:prstGeom prst="rect">
-            <a:avLst/>
-          </a:prstGeom>
-          <a:noFill/>
-        </p:spPr>
-        <p:txBody>
-          <a:bodyPr wrap="square" lIns="0" rIns="0" tIns="0" bIns="0" anchor="t">
-            <a:spAutoFit/>
-          </a:bodyPr>
-          <a:lstStyle/>
-          <a:p>
-            <a:pPr algn="l">
-              <a:lnSpc>
-                <a:spcPct val="115000"/>
-              </a:lnSpc>
-            </a:pPr>
-            <a:r>
-              <a:rPr sz="1200" b="0" i="0">
-                <a:solidFill>
-                  <a:srgbClr val="181F2B"/>
-                </a:solidFill>
-                <a:latin typeface="Helvetica Neue"/>
-              </a:rPr>
-              <a:t>•  Max consecutive hard days</a:t>
-            </a:r>
-          </a:p>
-        </p:txBody>
-      </p:sp>
-      <p:sp>
-        <p:nvSpPr>
-          <p:cNvPr id="17" name="TextBox 16"/>
-          <p:cNvSpPr txBox="1"/>
-          <p:nvPr/>
-        </p:nvSpPr>
-        <p:spPr>
-          <a:xfrm>
-            <a:off x="822960" y="5001768"/>
-            <a:ext cx="4846320" cy="329184"/>
-          </a:xfrm>
-          <a:prstGeom prst="rect">
-            <a:avLst/>
-          </a:prstGeom>
-          <a:noFill/>
-        </p:spPr>
-        <p:txBody>
-          <a:bodyPr wrap="square" lIns="0" rIns="0" tIns="0" bIns="0" anchor="t">
-            <a:spAutoFit/>
-          </a:bodyPr>
-          <a:lstStyle/>
-          <a:p>
-            <a:pPr algn="l">
-              <a:lnSpc>
-                <a:spcPct val="115000"/>
-              </a:lnSpc>
-            </a:pPr>
-            <a:r>
-              <a:rPr sz="1200" b="0" i="0">
-                <a:solidFill>
-                  <a:srgbClr val="181F2B"/>
-                </a:solidFill>
-                <a:latin typeface="Helvetica Neue"/>
-              </a:rPr>
-              <a:t>•  Workout count range (min, max)</a:t>
-            </a:r>
-          </a:p>
-        </p:txBody>
-      </p:sp>
-      <p:sp>
-        <p:nvSpPr>
-          <p:cNvPr id="18" name="TextBox 17"/>
-          <p:cNvSpPr txBox="1"/>
-          <p:nvPr/>
-        </p:nvSpPr>
-        <p:spPr>
-          <a:xfrm>
-            <a:off x="822960" y="5330952"/>
-            <a:ext cx="4846320" cy="329184"/>
-          </a:xfrm>
-          <a:prstGeom prst="rect">
-            <a:avLst/>
-          </a:prstGeom>
-          <a:noFill/>
-        </p:spPr>
-        <p:txBody>
-          <a:bodyPr wrap="square" lIns="0" rIns="0" tIns="0" bIns="0" anchor="t">
-            <a:spAutoFit/>
-          </a:bodyPr>
-          <a:lstStyle/>
-          <a:p>
-            <a:pPr algn="l">
-              <a:lnSpc>
-                <a:spcPct val="115000"/>
-              </a:lnSpc>
-            </a:pPr>
-            <a:r>
-              <a:rPr sz="1200" b="0" i="0">
-                <a:solidFill>
-                  <a:srgbClr val="181F2B"/>
-                </a:solidFill>
-                <a:latin typeface="Helvetica Neue"/>
-              </a:rPr>
-              <a:t>•  Sleep + availability windows</a:t>
-            </a:r>
-          </a:p>
-        </p:txBody>
-      </p:sp>
-      <p:sp>
-        <p:nvSpPr>
-          <p:cNvPr id="19" name="Rounded Rectangle 18"/>
-          <p:cNvSpPr/>
-          <p:nvPr/>
-        </p:nvSpPr>
-        <p:spPr>
-          <a:xfrm>
-            <a:off x="6245352" y="1691640"/>
-            <a:ext cx="5394960" cy="4572000"/>
-          </a:xfrm>
-          <a:prstGeom prst="roundRect">
-            <a:avLst>
-              <a:gd name="adj" fmla="val 6000"/>
-            </a:avLst>
-          </a:prstGeom>
-          <a:solidFill>
-            <a:srgbClr val="F1EEE6"/>
-          </a:solidFill>
-          <a:ln>
-            <a:noFill/>
-          </a:ln>
-          <a:effectLst/>
-        </p:spPr>
-        <p:style>
-          <a:lnRef idx="1">
-            <a:schemeClr val="accent1"/>
-          </a:lnRef>
-          <a:fillRef idx="3">
-            <a:schemeClr val="accent1"/>
-          </a:fillRef>
-          <a:effectRef idx="2">
-            <a:schemeClr val="accent1"/>
-          </a:effectRef>
-          <a:fontRef idx="minor">
-            <a:schemeClr val="lt1"/>
-          </a:fontRef>
-        </p:style>
-        <p:txBody>
-          <a:bodyPr rtlCol="0" anchor="ctr"/>
-          <a:lstStyle/>
-          <a:p>
-            <a:pPr algn="ctr"/>
-          </a:p>
-        </p:txBody>
-      </p:sp>
-      <p:sp>
-        <p:nvSpPr>
-          <p:cNvPr id="20" name="TextBox 19"/>
-          <p:cNvSpPr txBox="1"/>
-          <p:nvPr/>
-        </p:nvSpPr>
-        <p:spPr>
-          <a:xfrm>
-            <a:off x="6519672" y="1874520"/>
-            <a:ext cx="5394960" cy="365760"/>
-          </a:xfrm>
-          <a:prstGeom prst="rect">
-            <a:avLst/>
-          </a:prstGeom>
-          <a:noFill/>
-        </p:spPr>
-        <p:txBody>
-          <a:bodyPr wrap="square" lIns="0" rIns="0" tIns="0" bIns="0" anchor="t">
-            <a:spAutoFit/>
-          </a:bodyPr>
-          <a:lstStyle/>
-          <a:p>
-            <a:pPr algn="l">
-              <a:lnSpc>
-                <a:spcPct val="115000"/>
-              </a:lnSpc>
-            </a:pPr>
-            <a:r>
-              <a:rPr sz="1100" b="1" i="0">
-                <a:solidFill>
-                  <a:srgbClr val="1F6FB0"/>
-                </a:solidFill>
-                <a:latin typeface="Helvetica Neue"/>
-              </a:rPr>
-              <a:t>SOFT OBJECTIVE  (9 weighted terms)</a:t>
-            </a:r>
-          </a:p>
-        </p:txBody>
-      </p:sp>
-      <p:sp>
-        <p:nvSpPr>
-          <p:cNvPr id="21" name="TextBox 20"/>
-          <p:cNvSpPr txBox="1"/>
-          <p:nvPr/>
-        </p:nvSpPr>
-        <p:spPr>
-          <a:xfrm>
-            <a:off x="6519672" y="2240280"/>
-            <a:ext cx="5394960" cy="365760"/>
-          </a:xfrm>
-          <a:prstGeom prst="rect">
-            <a:avLst/>
-          </a:prstGeom>
-          <a:noFill/>
-        </p:spPr>
-        <p:txBody>
-          <a:bodyPr wrap="square" lIns="0" rIns="0" tIns="0" bIns="0" anchor="t">
-            <a:spAutoFit/>
-          </a:bodyPr>
-          <a:lstStyle/>
-          <a:p>
-            <a:pPr algn="l">
-              <a:lnSpc>
-                <a:spcPct val="115000"/>
-              </a:lnSpc>
-            </a:pPr>
-            <a:r>
-              <a:rPr sz="1400" b="1" i="0">
-                <a:solidFill>
-                  <a:srgbClr val="181F2B"/>
-                </a:solidFill>
-                <a:latin typeface="Helvetica Neue"/>
-              </a:rPr>
-              <a:t>Linearised cost minimised by every solver</a:t>
-            </a:r>
-          </a:p>
-        </p:txBody>
-      </p:sp>
-      <p:sp>
-        <p:nvSpPr>
-          <p:cNvPr id="22" name="TextBox 21"/>
-          <p:cNvSpPr txBox="1"/>
-          <p:nvPr/>
-        </p:nvSpPr>
-        <p:spPr>
-          <a:xfrm>
-            <a:off x="6519672" y="2697480"/>
-            <a:ext cx="4846320" cy="329184"/>
-          </a:xfrm>
-          <a:prstGeom prst="rect">
-            <a:avLst/>
-          </a:prstGeom>
-          <a:noFill/>
-        </p:spPr>
-        <p:txBody>
-          <a:bodyPr wrap="square" lIns="0" rIns="0" tIns="0" bIns="0" anchor="t">
-            <a:spAutoFit/>
-          </a:bodyPr>
-          <a:lstStyle/>
-          <a:p>
-            <a:pPr algn="l">
-              <a:lnSpc>
-                <a:spcPct val="115000"/>
-              </a:lnSpc>
-            </a:pPr>
-            <a:r>
-              <a:rPr sz="1200" b="0" i="0">
-                <a:solidFill>
-                  <a:srgbClr val="181F2B"/>
-                </a:solidFill>
-                <a:latin typeface="Helvetica Neue"/>
-              </a:rPr>
-              <a:t>•  Calorie / carb / fat deviation penalties</a:t>
-            </a:r>
-          </a:p>
-        </p:txBody>
-      </p:sp>
-      <p:sp>
-        <p:nvSpPr>
-          <p:cNvPr id="23" name="TextBox 22"/>
-          <p:cNvSpPr txBox="1"/>
-          <p:nvPr/>
-        </p:nvSpPr>
-        <p:spPr>
-          <a:xfrm>
-            <a:off x="6519672" y="3026664"/>
-            <a:ext cx="4846320" cy="329184"/>
-          </a:xfrm>
-          <a:prstGeom prst="rect">
-            <a:avLst/>
-          </a:prstGeom>
-          <a:noFill/>
-        </p:spPr>
-        <p:txBody>
-          <a:bodyPr wrap="square" lIns="0" rIns="0" tIns="0" bIns="0" anchor="t">
-            <a:spAutoFit/>
-          </a:bodyPr>
-          <a:lstStyle/>
-          <a:p>
-            <a:pPr algn="l">
-              <a:lnSpc>
-                <a:spcPct val="115000"/>
-              </a:lnSpc>
-            </a:pPr>
-            <a:r>
-              <a:rPr sz="1200" b="0" i="0">
-                <a:solidFill>
-                  <a:srgbClr val="181F2B"/>
-                </a:solidFill>
-                <a:latin typeface="Helvetica Neue"/>
-              </a:rPr>
-              <a:t>•  Cost (per cent of food)</a:t>
-            </a:r>
-          </a:p>
-        </p:txBody>
-      </p:sp>
-      <p:sp>
-        <p:nvSpPr>
-          <p:cNvPr id="24" name="TextBox 23"/>
-          <p:cNvSpPr txBox="1"/>
-          <p:nvPr/>
-        </p:nvSpPr>
-        <p:spPr>
-          <a:xfrm>
-            <a:off x="6519672" y="3355848"/>
-            <a:ext cx="4846320" cy="329184"/>
-          </a:xfrm>
-          <a:prstGeom prst="rect">
-            <a:avLst/>
-          </a:prstGeom>
-          <a:noFill/>
-        </p:spPr>
-        <p:txBody>
-          <a:bodyPr wrap="square" lIns="0" rIns="0" tIns="0" bIns="0" anchor="t">
-            <a:spAutoFit/>
-          </a:bodyPr>
-          <a:lstStyle/>
-          <a:p>
-            <a:pPr algn="l">
-              <a:lnSpc>
-                <a:spcPct val="115000"/>
-              </a:lnSpc>
-            </a:pPr>
-            <a:r>
-              <a:rPr sz="1200" b="0" i="0">
-                <a:solidFill>
-                  <a:srgbClr val="181F2B"/>
-                </a:solidFill>
-                <a:latin typeface="Helvetica Neue"/>
-              </a:rPr>
-              <a:t>•  Per-meal protein shortfall</a:t>
-            </a:r>
-          </a:p>
-        </p:txBody>
-      </p:sp>
-      <p:sp>
-        <p:nvSpPr>
-          <p:cNvPr id="25" name="TextBox 24"/>
-          <p:cNvSpPr txBox="1"/>
-          <p:nvPr/>
-        </p:nvSpPr>
-        <p:spPr>
-          <a:xfrm>
-            <a:off x="6519672" y="3685032"/>
-            <a:ext cx="4846320" cy="329184"/>
-          </a:xfrm>
-          <a:prstGeom prst="rect">
-            <a:avLst/>
-          </a:prstGeom>
-          <a:noFill/>
-        </p:spPr>
-        <p:txBody>
-          <a:bodyPr wrap="square" lIns="0" rIns="0" tIns="0" bIns="0" anchor="t">
-            <a:spAutoFit/>
-          </a:bodyPr>
-          <a:lstStyle/>
-          <a:p>
-            <a:pPr algn="l">
-              <a:lnSpc>
-                <a:spcPct val="115000"/>
-              </a:lnSpc>
-            </a:pPr>
-            <a:r>
-              <a:rPr sz="1200" b="0" i="0">
-                <a:solidFill>
-                  <a:srgbClr val="181F2B"/>
-                </a:solidFill>
-                <a:latin typeface="Helvetica Neue"/>
-              </a:rPr>
-              <a:t>•  Peri-workout meal-timing miss</a:t>
-            </a:r>
-          </a:p>
-        </p:txBody>
-      </p:sp>
-      <p:sp>
-        <p:nvSpPr>
-          <p:cNvPr id="26" name="TextBox 25"/>
-          <p:cNvSpPr txBox="1"/>
-          <p:nvPr/>
-        </p:nvSpPr>
-        <p:spPr>
-          <a:xfrm>
-            <a:off x="6519672" y="4014216"/>
-            <a:ext cx="4846320" cy="329184"/>
-          </a:xfrm>
-          <a:prstGeom prst="rect">
-            <a:avLst/>
-          </a:prstGeom>
-          <a:noFill/>
-        </p:spPr>
-        <p:txBody>
-          <a:bodyPr wrap="square" lIns="0" rIns="0" tIns="0" bIns="0" anchor="t">
-            <a:spAutoFit/>
-          </a:bodyPr>
-          <a:lstStyle/>
-          <a:p>
-            <a:pPr algn="l">
-              <a:lnSpc>
-                <a:spcPct val="115000"/>
-              </a:lnSpc>
-            </a:pPr>
-            <a:r>
-              <a:rPr sz="1200" b="0" i="0">
-                <a:solidFill>
-                  <a:srgbClr val="181F2B"/>
-                </a:solidFill>
-                <a:latin typeface="Helvetica Neue"/>
-              </a:rPr>
-              <a:t>•  Hydration shortfall</a:t>
-            </a:r>
-          </a:p>
-        </p:txBody>
-      </p:sp>
-      <p:sp>
-        <p:nvSpPr>
-          <p:cNvPr id="27" name="TextBox 26"/>
-          <p:cNvSpPr txBox="1"/>
-          <p:nvPr/>
-        </p:nvSpPr>
-        <p:spPr>
-          <a:xfrm>
-            <a:off x="6519672" y="4343399"/>
-            <a:ext cx="4846320" cy="329184"/>
-          </a:xfrm>
-          <a:prstGeom prst="rect">
-            <a:avLst/>
-          </a:prstGeom>
-          <a:noFill/>
-        </p:spPr>
-        <p:txBody>
-          <a:bodyPr wrap="square" lIns="0" rIns="0" tIns="0" bIns="0" anchor="t">
-            <a:spAutoFit/>
-          </a:bodyPr>
-          <a:lstStyle/>
-          <a:p>
-            <a:pPr algn="l">
-              <a:lnSpc>
-                <a:spcPct val="115000"/>
-              </a:lnSpc>
-            </a:pPr>
-            <a:r>
-              <a:rPr sz="1200" b="0" i="0">
-                <a:solidFill>
-                  <a:srgbClr val="181F2B"/>
-                </a:solidFill>
-                <a:latin typeface="Helvetica Neue"/>
-              </a:rPr>
-              <a:t>•  Preferred / avoided workout days</a:t>
-            </a:r>
-          </a:p>
-        </p:txBody>
-      </p:sp>
-      <p:sp>
-        <p:nvSpPr>
-          <p:cNvPr id="28" name="TextBox 27"/>
-          <p:cNvSpPr txBox="1"/>
-          <p:nvPr/>
-        </p:nvSpPr>
-        <p:spPr>
-          <a:xfrm>
-            <a:off x="6519672" y="4672584"/>
-            <a:ext cx="4846320" cy="329184"/>
-          </a:xfrm>
-          <a:prstGeom prst="rect">
-            <a:avLst/>
-          </a:prstGeom>
-          <a:noFill/>
-        </p:spPr>
-        <p:txBody>
-          <a:bodyPr wrap="square" lIns="0" rIns="0" tIns="0" bIns="0" anchor="t">
-            <a:spAutoFit/>
-          </a:bodyPr>
-          <a:lstStyle/>
-          <a:p>
-            <a:pPr algn="l">
-              <a:lnSpc>
-                <a:spcPct val="115000"/>
-              </a:lnSpc>
-            </a:pPr>
-            <a:r>
-              <a:rPr sz="1200" b="0" i="0">
-                <a:solidFill>
-                  <a:srgbClr val="181F2B"/>
-                </a:solidFill>
-                <a:latin typeface="Helvetica Neue"/>
-              </a:rPr>
-              <a:t>•  Convenience bonus  (negative term)</a:t>
-            </a:r>
-          </a:p>
-        </p:txBody>
-      </p:sp>
-      <p:sp>
-        <p:nvSpPr>
-          <p:cNvPr id="29" name="TextBox 28"/>
-          <p:cNvSpPr txBox="1"/>
-          <p:nvPr/>
-        </p:nvSpPr>
-        <p:spPr>
-          <a:xfrm>
-            <a:off x="548640" y="6263640"/>
-            <a:ext cx="11091672" cy="365760"/>
-          </a:xfrm>
-          <a:prstGeom prst="rect">
-            <a:avLst/>
-          </a:prstGeom>
-          <a:noFill/>
-        </p:spPr>
-        <p:txBody>
-          <a:bodyPr wrap="square" lIns="0" rIns="0" tIns="0" bIns="0" anchor="t">
-            <a:spAutoFit/>
-          </a:bodyPr>
-          <a:lstStyle/>
-          <a:p>
-            <a:pPr algn="l">
-              <a:lnSpc>
-                <a:spcPct val="115000"/>
-              </a:lnSpc>
-            </a:pPr>
-            <a:r>
-              <a:rPr sz="1200" b="0" i="1">
-                <a:solidFill>
-                  <a:srgbClr val="E06B1F"/>
-                </a:solidFill>
-                <a:latin typeface="Helvetica Neue"/>
-              </a:rPr>
-              <a:t>Adherence is a CONSTRAINT.  Cheapness, macro fit, and schedule pleasantness are the OBJECTIVE.</a:t>
+                <a:spcPct val="145000"/>
+              </a:lnSpc>
+            </a:pPr>
+            <a:r>
+              <a:rPr sz="1400" b="0" i="0">
+                <a:solidFill>
+                  <a:srgbClr val="555F6D"/>
+                </a:solidFill>
+                <a:latin typeface="Helvetica Neue"/>
+              </a:rPr>
+              <a:t>What you'll see: every solver hits its goal in seconds, then we'll look at the actual seven-day plan that comes out — meals in the right windows, seven workouts spread across the week with recovery gaps between hard sessions, sleep blocks each night, hydration spaced through the day. All from one model.</a:t>
             </a:r>
           </a:p>
         </p:txBody>
@@ -8236,7 +6010,7 @@
           <a:p>
             <a:pPr algn="l">
               <a:lnSpc>
-                <a:spcPct val="115000"/>
+                <a:spcPct val="120000"/>
               </a:lnSpc>
             </a:pPr>
             <a:r>
@@ -8246,7 +6020,7 @@
                 </a:solidFill>
                 <a:latin typeface="Helvetica Neue"/>
               </a:rPr>
-              <a:t>3 · LIVE DEMO</a:t>
+              <a:t>4 · KEY RESULTS</a:t>
             </a:r>
           </a:p>
         </p:txBody>
@@ -8260,7 +6034,7 @@
         <p:spPr>
           <a:xfrm>
             <a:off x="548640" y="685800"/>
-            <a:ext cx="10972800" cy="640080"/>
+            <a:ext cx="11091672" cy="822960"/>
           </a:xfrm>
           <a:prstGeom prst="rect">
             <a:avLst/>
@@ -8275,17 +6049,17 @@
           <a:p>
             <a:pPr algn="l">
               <a:lnSpc>
-                <a:spcPct val="115000"/>
-              </a:lnSpc>
-            </a:pPr>
-            <a:r>
-              <a:rPr sz="3000" b="1" i="0">
+                <a:spcPct val="110000"/>
+              </a:lnSpc>
+            </a:pPr>
+            <a:r>
+              <a:rPr sz="2800" b="1" i="0">
                 <a:solidFill>
                   <a:srgbClr val="181F2B"/>
                 </a:solidFill>
                 <a:latin typeface="Helvetica Neue"/>
               </a:rPr>
-              <a:t>Switching to the terminal — all four solvers, balanced scenario.</a:t>
+              <a:t>How fast does it run as the food list grows?</a:t>
             </a:r>
           </a:p>
         </p:txBody>
@@ -8298,7 +6072,7 @@
         </p:nvCxnSpPr>
         <p:spPr>
           <a:xfrm>
-            <a:off x="548640" y="1417320"/>
+            <a:off x="548640" y="1508760"/>
             <a:ext cx="11091672" cy="0"/>
           </a:xfrm>
           <a:prstGeom prst="line">
@@ -8349,7 +6123,7 @@
           <a:p>
             <a:pPr algn="r">
               <a:lnSpc>
-                <a:spcPct val="115000"/>
+                <a:spcPct val="120000"/>
               </a:lnSpc>
             </a:pPr>
             <a:r>
@@ -8359,57 +6133,35 @@
                 </a:solidFill>
                 <a:latin typeface="Helvetica Neue"/>
               </a:rPr>
-              <a:t>6 / 10</a:t>
-            </a:r>
-          </a:p>
-        </p:txBody>
-      </p:sp>
-      <p:sp>
-        <p:nvSpPr>
-          <p:cNvPr id="7" name="Rounded Rectangle 6"/>
-          <p:cNvSpPr/>
-          <p:nvPr/>
-        </p:nvSpPr>
-        <p:spPr>
-          <a:xfrm>
-            <a:off x="548640" y="1691640"/>
-            <a:ext cx="11091672" cy="4206240"/>
-          </a:xfrm>
-          <a:prstGeom prst="roundRect">
-            <a:avLst>
-              <a:gd name="adj" fmla="val 6000"/>
-            </a:avLst>
-          </a:prstGeom>
-          <a:solidFill>
-            <a:srgbClr val="1B212C"/>
-          </a:solidFill>
-          <a:ln>
-            <a:noFill/>
-          </a:ln>
-          <a:effectLst/>
-        </p:spPr>
-        <p:style>
-          <a:lnRef idx="1">
-            <a:schemeClr val="accent1"/>
-          </a:lnRef>
-          <a:fillRef idx="3">
-            <a:schemeClr val="accent1"/>
-          </a:fillRef>
-          <a:effectRef idx="2">
-            <a:schemeClr val="accent1"/>
-          </a:effectRef>
-          <a:fontRef idx="minor">
-            <a:schemeClr val="lt1"/>
-          </a:fontRef>
-        </p:style>
-        <p:txBody>
-          <a:bodyPr rtlCol="0" anchor="ctr"/>
-          <a:lstStyle/>
-          <a:p>
-            <a:pPr algn="ctr"/>
-          </a:p>
-        </p:txBody>
-      </p:sp>
+              <a:t>6 / 9</a:t>
+            </a:r>
+          </a:p>
+        </p:txBody>
+      </p:sp>
+      <p:pic>
+        <p:nvPicPr>
+          <p:cNvPr id="7" name="Picture 6" descr="final_runtime_scaling.png"/>
+          <p:cNvPicPr>
+            <a:picLocks noChangeAspect="1"/>
+          </p:cNvPicPr>
+          <p:nvPr/>
+        </p:nvPicPr>
+        <p:blipFill>
+          <a:blip r:embed="rId2"/>
+          <a:stretch>
+            <a:fillRect/>
+          </a:stretch>
+        </p:blipFill>
+        <p:spPr>
+          <a:xfrm>
+            <a:off x="548640" y="1783080"/>
+            <a:ext cx="9956800" cy="4480560"/>
+          </a:xfrm>
+          <a:prstGeom prst="rect">
+            <a:avLst/>
+          </a:prstGeom>
+        </p:spPr>
+      </p:pic>
       <p:sp>
         <p:nvSpPr>
           <p:cNvPr id="8" name="TextBox 7"/>
@@ -8418,8 +6170,8 @@
         </p:nvSpPr>
         <p:spPr>
           <a:xfrm>
-            <a:off x="868680" y="1920240"/>
-            <a:ext cx="10058400" cy="365760"/>
+            <a:off x="8046720" y="1783080"/>
+            <a:ext cx="3657600" cy="365760"/>
           </a:xfrm>
           <a:prstGeom prst="rect">
             <a:avLst/>
@@ -8434,17 +6186,17 @@
           <a:p>
             <a:pPr algn="l">
               <a:lnSpc>
-                <a:spcPct val="115000"/>
-              </a:lnSpc>
-            </a:pPr>
-            <a:r>
-              <a:rPr sz="1400" b="1" i="0">
-                <a:solidFill>
-                  <a:srgbClr val="F6C86E"/>
-                </a:solidFill>
-                <a:latin typeface="Menlo"/>
-              </a:rPr>
-              <a:t>$ python scripts/run_demo.py</a:t>
+                <a:spcPct val="120000"/>
+              </a:lnSpc>
+            </a:pPr>
+            <a:r>
+              <a:rPr sz="1100" b="1" i="0">
+                <a:solidFill>
+                  <a:srgbClr val="E06B1F"/>
+                </a:solidFill>
+                <a:latin typeface="Helvetica Neue"/>
+              </a:rPr>
+              <a:t>TAKEAWAYS</a:t>
             </a:r>
           </a:p>
         </p:txBody>
@@ -8457,8 +6209,8 @@
         </p:nvSpPr>
         <p:spPr>
           <a:xfrm>
-            <a:off x="868680" y="2331720"/>
-            <a:ext cx="10332720" cy="3200400"/>
+            <a:off x="8046720" y="2103120"/>
+            <a:ext cx="3657600" cy="4114800"/>
           </a:xfrm>
           <a:prstGeom prst="rect">
             <a:avLst/>
@@ -8473,100 +6225,19 @@
           <a:p>
             <a:pPr algn="l">
               <a:lnSpc>
-                <a:spcPct val="135000"/>
-              </a:lnSpc>
-            </a:pPr>
-            <a:r>
-              <a:rPr sz="1400" b="0" i="0">
-                <a:solidFill>
-                  <a:srgbClr val="EAEAEA"/>
-                </a:solidFill>
-                <a:latin typeface="Menlo"/>
-              </a:rPr>
-              <a:t>
-Demo run on scenario='balanced_1921' (56 foods, 10 workouts)
---- nutrition_only ---  status=OPTIMAL  runtime=0.09s   obj=-266
---- two_stage      ---  status=OPTIMAL  runtime=0.21s   obj=   0
---- joint_cpsat    ---  status=OPTIMAL  runtime=1.33s   obj=-266
---- joint_warmstart---  status=OPTIMAL  runtime=1.52s   obj=-266</a:t>
-            </a:r>
-          </a:p>
-        </p:txBody>
-      </p:sp>
-      <p:sp>
-        <p:nvSpPr>
-          <p:cNvPr id="10" name="TextBox 9"/>
-          <p:cNvSpPr txBox="1"/>
-          <p:nvPr/>
-        </p:nvSpPr>
-        <p:spPr>
-          <a:xfrm>
-            <a:off x="868680" y="5303520"/>
-            <a:ext cx="10332720" cy="365760"/>
-          </a:xfrm>
-          <a:prstGeom prst="rect">
-            <a:avLst/>
-          </a:prstGeom>
-          <a:noFill/>
-        </p:spPr>
-        <p:txBody>
-          <a:bodyPr wrap="square" lIns="0" rIns="0" tIns="0" bIns="0" anchor="t">
-            <a:spAutoFit/>
-          </a:bodyPr>
-          <a:lstStyle/>
-          <a:p>
-            <a:pPr algn="l">
-              <a:lnSpc>
-                <a:spcPct val="115000"/>
-              </a:lnSpc>
-            </a:pPr>
-            <a:r>
-              <a:rPr sz="1200" b="1" i="0">
-                <a:solidFill>
-                  <a:srgbClr val="F6C86E"/>
-                </a:solidFill>
-                <a:latin typeface="Menlo"/>
-              </a:rPr>
-              <a:t>$ python -m src.app.cli solve --preset lean_bulk --solver joint_cpsat --figure</a:t>
-            </a:r>
-          </a:p>
-        </p:txBody>
-      </p:sp>
-      <p:sp>
-        <p:nvSpPr>
-          <p:cNvPr id="11" name="TextBox 10"/>
-          <p:cNvSpPr txBox="1"/>
-          <p:nvPr/>
-        </p:nvSpPr>
-        <p:spPr>
-          <a:xfrm>
-            <a:off x="548640" y="6080760"/>
-            <a:ext cx="11091672" cy="457200"/>
-          </a:xfrm>
-          <a:prstGeom prst="rect">
-            <a:avLst/>
-          </a:prstGeom>
-          <a:noFill/>
-        </p:spPr>
-        <p:txBody>
-          <a:bodyPr wrap="square" lIns="0" rIns="0" tIns="0" bIns="0" anchor="t">
-            <a:spAutoFit/>
-          </a:bodyPr>
-          <a:lstStyle/>
-          <a:p>
-            <a:pPr algn="l">
-              <a:lnSpc>
-                <a:spcPct val="135000"/>
-              </a:lnSpc>
-            </a:pPr>
-            <a:r>
-              <a:rPr sz="1200" b="0" i="1">
-                <a:solidFill>
-                  <a:srgbClr val="555F6D"/>
-                </a:solidFill>
-                <a:latin typeface="Helvetica Neue"/>
-              </a:rPr>
-              <a:t>Live: a 7-day plan rendered with meals in their availability windows, 3 workouts respecting recovery rules, sleep blocks each night, and 3120 kcal / 202g protein / day matching the lean-bulk targets.</a:t>
+                <a:spcPct val="145000"/>
+              </a:lnSpc>
+            </a:pPr>
+            <a:r>
+              <a:rPr sz="1200" b="0" i="0">
+                <a:solidFill>
+                  <a:srgbClr val="181F2B"/>
+                </a:solidFill>
+                <a:latin typeface="Helvetica Neue"/>
+              </a:rPr>
+              <a:t>•  Nutrition-only stays fast no matter how big the food list gets — it's a textbook diet problem.
+•  Joint CP-SAT is great up to about 80 foods. After that the search space starts to bite.
+•  The warm-start hybrid catches up on the harder, larger instances by giving CP-SAT a feasible plan to start from.</a:t>
             </a:r>
           </a:p>
         </p:txBody>
@@ -8656,7 +6327,7 @@
           <a:p>
             <a:pPr algn="l">
               <a:lnSpc>
-                <a:spcPct val="115000"/>
+                <a:spcPct val="120000"/>
               </a:lnSpc>
             </a:pPr>
             <a:r>
@@ -8680,7 +6351,7 @@
         <p:spPr>
           <a:xfrm>
             <a:off x="548640" y="685800"/>
-            <a:ext cx="10972800" cy="640080"/>
+            <a:ext cx="11091672" cy="822960"/>
           </a:xfrm>
           <a:prstGeom prst="rect">
             <a:avLst/>
@@ -8695,17 +6366,17 @@
           <a:p>
             <a:pPr algn="l">
               <a:lnSpc>
-                <a:spcPct val="115000"/>
-              </a:lnSpc>
-            </a:pPr>
-            <a:r>
-              <a:rPr sz="3000" b="1" i="0">
+                <a:spcPct val="110000"/>
+              </a:lnSpc>
+            </a:pPr>
+            <a:r>
+              <a:rPr sz="2800" b="1" i="0">
                 <a:solidFill>
                   <a:srgbClr val="181F2B"/>
                 </a:solidFill>
                 <a:latin typeface="Helvetica Neue"/>
               </a:rPr>
-              <a:t>Runtime scaling — catalog size 10 → 200 foods.</a:t>
+              <a:t>Where the joint solver beats the baselines.</a:t>
             </a:r>
           </a:p>
         </p:txBody>
@@ -8718,7 +6389,7 @@
         </p:nvCxnSpPr>
         <p:spPr>
           <a:xfrm>
-            <a:off x="548640" y="1417320"/>
+            <a:off x="548640" y="1508760"/>
             <a:ext cx="11091672" cy="0"/>
           </a:xfrm>
           <a:prstGeom prst="line">
@@ -8769,7 +6440,7 @@
           <a:p>
             <a:pPr algn="r">
               <a:lnSpc>
-                <a:spcPct val="115000"/>
+                <a:spcPct val="120000"/>
               </a:lnSpc>
             </a:pPr>
             <a:r>
@@ -8779,14 +6450,14 @@
                 </a:solidFill>
                 <a:latin typeface="Helvetica Neue"/>
               </a:rPr>
-              <a:t>7 / 10</a:t>
+              <a:t>7 / 9</a:t>
             </a:r>
           </a:p>
         </p:txBody>
       </p:sp>
       <p:pic>
         <p:nvPicPr>
-          <p:cNvPr id="7" name="Picture 6" descr="final_runtime_scaling.png"/>
+          <p:cNvPr id="7" name="Picture 6" descr="final_feasibility_heatmap.png"/>
           <p:cNvPicPr>
             <a:picLocks noChangeAspect="1"/>
           </p:cNvPicPr>
@@ -8801,23 +6472,125 @@
         <p:spPr>
           <a:xfrm>
             <a:off x="548640" y="1783080"/>
-            <a:ext cx="9956800" cy="4480560"/>
+            <a:ext cx="7924800" cy="3566160"/>
           </a:xfrm>
           <a:prstGeom prst="rect">
             <a:avLst/>
           </a:prstGeom>
         </p:spPr>
       </p:pic>
-      <p:sp>
-        <p:nvSpPr>
-          <p:cNvPr id="8" name="TextBox 7"/>
-          <p:cNvSpPr txBox="1"/>
-          <p:nvPr/>
-        </p:nvSpPr>
-        <p:spPr>
-          <a:xfrm>
-            <a:off x="8046720" y="1783080"/>
-            <a:ext cx="3657600" cy="365760"/>
+      <p:pic>
+        <p:nvPicPr>
+          <p:cNvPr id="8" name="Picture 7" descr="final_objective_breakdown.png"/>
+          <p:cNvPicPr>
+            <a:picLocks noChangeAspect="1"/>
+          </p:cNvPicPr>
+          <p:nvPr/>
+        </p:nvPicPr>
+        <p:blipFill>
+          <a:blip r:embed="rId3"/>
+          <a:stretch>
+            <a:fillRect/>
+          </a:stretch>
+        </p:blipFill>
+        <p:spPr>
+          <a:xfrm>
+            <a:off x="6400800" y="1783080"/>
+            <a:ext cx="6240780" cy="3566160"/>
+          </a:xfrm>
+          <a:prstGeom prst="rect">
+            <a:avLst/>
+          </a:prstGeom>
+        </p:spPr>
+      </p:pic>
+      <p:sp>
+        <p:nvSpPr>
+          <p:cNvPr id="9" name="TextBox 8"/>
+          <p:cNvSpPr txBox="1"/>
+          <p:nvPr/>
+        </p:nvSpPr>
+        <p:spPr>
+          <a:xfrm>
+            <a:off x="548640" y="5532120"/>
+            <a:ext cx="5486400" cy="365760"/>
+          </a:xfrm>
+          <a:prstGeom prst="rect">
+            <a:avLst/>
+          </a:prstGeom>
+          <a:noFill/>
+        </p:spPr>
+        <p:txBody>
+          <a:bodyPr wrap="square" lIns="0" rIns="0" tIns="0" bIns="0" anchor="t">
+            <a:spAutoFit/>
+          </a:bodyPr>
+          <a:lstStyle/>
+          <a:p>
+            <a:pPr algn="ctr">
+              <a:lnSpc>
+                <a:spcPct val="120000"/>
+              </a:lnSpc>
+            </a:pPr>
+            <a:r>
+              <a:rPr sz="1000" b="1" i="0">
+                <a:solidFill>
+                  <a:srgbClr val="555F6D"/>
+                </a:solidFill>
+                <a:latin typeface="Helvetica Neue"/>
+              </a:rPr>
+              <a:t>Which solvers find a feasible plan for which instance</a:t>
+            </a:r>
+          </a:p>
+        </p:txBody>
+      </p:sp>
+      <p:sp>
+        <p:nvSpPr>
+          <p:cNvPr id="10" name="TextBox 9"/>
+          <p:cNvSpPr txBox="1"/>
+          <p:nvPr/>
+        </p:nvSpPr>
+        <p:spPr>
+          <a:xfrm>
+            <a:off x="6400800" y="5532120"/>
+            <a:ext cx="5486400" cy="365760"/>
+          </a:xfrm>
+          <a:prstGeom prst="rect">
+            <a:avLst/>
+          </a:prstGeom>
+          <a:noFill/>
+        </p:spPr>
+        <p:txBody>
+          <a:bodyPr wrap="square" lIns="0" rIns="0" tIns="0" bIns="0" anchor="t">
+            <a:spAutoFit/>
+          </a:bodyPr>
+          <a:lstStyle/>
+          <a:p>
+            <a:pPr algn="ctr">
+              <a:lnSpc>
+                <a:spcPct val="120000"/>
+              </a:lnSpc>
+            </a:pPr>
+            <a:r>
+              <a:rPr sz="1000" b="1" i="0">
+                <a:solidFill>
+                  <a:srgbClr val="555F6D"/>
+                </a:solidFill>
+                <a:latin typeface="Helvetica Neue"/>
+              </a:rPr>
+              <a:t>What the solver is actually paying penalty for</a:t>
+            </a:r>
+          </a:p>
+        </p:txBody>
+      </p:sp>
+      <p:sp>
+        <p:nvSpPr>
+          <p:cNvPr id="11" name="TextBox 10"/>
+          <p:cNvSpPr txBox="1"/>
+          <p:nvPr/>
+        </p:nvSpPr>
+        <p:spPr>
+          <a:xfrm>
+            <a:off x="548640" y="5989320"/>
+            <a:ext cx="11091672" cy="777240"/>
           </a:xfrm>
           <a:prstGeom prst="rect">
             <a:avLst/>
@@ -8832,67 +6605,17 @@
           <a:p>
             <a:pPr algn="l">
               <a:lnSpc>
-                <a:spcPct val="115000"/>
-              </a:lnSpc>
-            </a:pPr>
-            <a:r>
-              <a:rPr sz="1100" b="1" i="0">
-                <a:solidFill>
-                  <a:srgbClr val="E06B1F"/>
-                </a:solidFill>
-                <a:latin typeface="Helvetica Neue"/>
-              </a:rPr>
-              <a:t>WHAT THIS SHOWS</a:t>
-            </a:r>
-          </a:p>
-        </p:txBody>
-      </p:sp>
-      <p:sp>
-        <p:nvSpPr>
-          <p:cNvPr id="9" name="TextBox 8"/>
-          <p:cNvSpPr txBox="1"/>
-          <p:nvPr/>
-        </p:nvSpPr>
-        <p:spPr>
-          <a:xfrm>
-            <a:off x="8046720" y="2103120"/>
-            <a:ext cx="3657600" cy="3931920"/>
-          </a:xfrm>
-          <a:prstGeom prst="rect">
-            <a:avLst/>
-          </a:prstGeom>
-          <a:noFill/>
-        </p:spPr>
-        <p:txBody>
-          <a:bodyPr wrap="square" lIns="0" rIns="0" tIns="0" bIns="0" anchor="t">
-            <a:spAutoFit/>
-          </a:bodyPr>
-          <a:lstStyle/>
-          <a:p>
-            <a:pPr algn="l">
-              <a:lnSpc>
-                <a:spcPct val="135000"/>
-              </a:lnSpc>
-            </a:pPr>
-            <a:r>
-              <a:rPr sz="1200" b="0" i="0">
-                <a:solidFill>
-                  <a:srgbClr val="181F2B"/>
-                </a:solidFill>
-                <a:latin typeface="Helvetica Neue"/>
-              </a:rPr>
-              <a:t>•  nutrition_only stays sub-second
-   across the entire sweep — it’s
-   a textbook diet MIP.
-•  Joint CP-SAT remains practical
-   up to ~80 foods. Past that the
-   (food × meal × day)
-   combinatorics start to bite.
-•  Warm-start narrows the gap on
-   big catalogs by seeding the
-   joint model from a feasible
-   two-stage plan via
-   model.AddHint(...).</a:t>
+                <a:spcPct val="140000"/>
+              </a:lnSpc>
+            </a:pPr>
+            <a:r>
+              <a:rPr sz="1300" b="0" i="0">
+                <a:solidFill>
+                  <a:srgbClr val="555F6D"/>
+                </a:solidFill>
+                <a:latin typeface="Helvetica Neue"/>
+              </a:rPr>
+              <a:t>When the schedule gets tight, the two-stage decomposition can commit to foods that the calendar can't fit. The joint solver handles those cases by trading a small macro miss for a feasible week. On loose problems both solvers tie — that's expected.</a:t>
             </a:r>
           </a:p>
         </p:txBody>
@@ -8982,7 +6705,7 @@
           <a:p>
             <a:pPr algn="l">
               <a:lnSpc>
-                <a:spcPct val="115000"/>
+                <a:spcPct val="120000"/>
               </a:lnSpc>
             </a:pPr>
             <a:r>
@@ -9006,7 +6729,7 @@
         <p:spPr>
           <a:xfrm>
             <a:off x="548640" y="685800"/>
-            <a:ext cx="10972800" cy="640080"/>
+            <a:ext cx="11091672" cy="822960"/>
           </a:xfrm>
           <a:prstGeom prst="rect">
             <a:avLst/>
@@ -9021,17 +6744,17 @@
           <a:p>
             <a:pPr algn="l">
               <a:lnSpc>
-                <a:spcPct val="115000"/>
-              </a:lnSpc>
-            </a:pPr>
-            <a:r>
-              <a:rPr sz="3000" b="1" i="0">
+                <a:spcPct val="110000"/>
+              </a:lnSpc>
+            </a:pPr>
+            <a:r>
+              <a:rPr sz="2800" b="1" i="0">
                 <a:solidFill>
                   <a:srgbClr val="181F2B"/>
                 </a:solidFill>
                 <a:latin typeface="Helvetica Neue"/>
               </a:rPr>
-              <a:t>Feasibility heatmap and objective breakdown.</a:t>
+              <a:t>What we learned.</a:t>
             </a:r>
           </a:p>
         </p:txBody>
@@ -9044,7 +6767,7 @@
         </p:nvCxnSpPr>
         <p:spPr>
           <a:xfrm>
-            <a:off x="548640" y="1417320"/>
+            <a:off x="548640" y="1508760"/>
             <a:ext cx="11091672" cy="0"/>
           </a:xfrm>
           <a:prstGeom prst="line">
@@ -9095,7 +6818,7 @@
           <a:p>
             <a:pPr algn="r">
               <a:lnSpc>
-                <a:spcPct val="115000"/>
+                <a:spcPct val="120000"/>
               </a:lnSpc>
             </a:pPr>
             <a:r>
@@ -9105,59 +6828,89 @@
                 </a:solidFill>
                 <a:latin typeface="Helvetica Neue"/>
               </a:rPr>
-              <a:t>8 / 10</a:t>
-            </a:r>
-          </a:p>
-        </p:txBody>
-      </p:sp>
-      <p:pic>
-        <p:nvPicPr>
-          <p:cNvPr id="7" name="Picture 6" descr="final_feasibility_heatmap.png"/>
-          <p:cNvPicPr>
-            <a:picLocks noChangeAspect="1"/>
-          </p:cNvPicPr>
-          <p:nvPr/>
-        </p:nvPicPr>
-        <p:blipFill>
-          <a:blip r:embed="rId2"/>
-          <a:stretch>
-            <a:fillRect/>
-          </a:stretch>
-        </p:blipFill>
-        <p:spPr>
-          <a:xfrm>
-            <a:off x="548640" y="1691640"/>
-            <a:ext cx="7924800" cy="3566160"/>
-          </a:xfrm>
-          <a:prstGeom prst="rect">
-            <a:avLst/>
-          </a:prstGeom>
-        </p:spPr>
-      </p:pic>
-      <p:pic>
-        <p:nvPicPr>
-          <p:cNvPr id="8" name="Picture 7" descr="final_objective_breakdown.png"/>
-          <p:cNvPicPr>
-            <a:picLocks noChangeAspect="1"/>
-          </p:cNvPicPr>
-          <p:nvPr/>
-        </p:nvPicPr>
-        <p:blipFill>
-          <a:blip r:embed="rId3"/>
-          <a:stretch>
-            <a:fillRect/>
-          </a:stretch>
-        </p:blipFill>
-        <p:spPr>
-          <a:xfrm>
-            <a:off x="6400800" y="1691640"/>
-            <a:ext cx="6240780" cy="3566160"/>
-          </a:xfrm>
-          <a:prstGeom prst="rect">
-            <a:avLst/>
-          </a:prstGeom>
-        </p:spPr>
-      </p:pic>
+              <a:t>8 / 9</a:t>
+            </a:r>
+          </a:p>
+        </p:txBody>
+      </p:sp>
+      <p:sp>
+        <p:nvSpPr>
+          <p:cNvPr id="7" name="TextBox 6"/>
+          <p:cNvSpPr txBox="1"/>
+          <p:nvPr/>
+        </p:nvSpPr>
+        <p:spPr>
+          <a:xfrm>
+            <a:off x="548640" y="1783080"/>
+            <a:ext cx="10972800" cy="365760"/>
+          </a:xfrm>
+          <a:prstGeom prst="rect">
+            <a:avLst/>
+          </a:prstGeom>
+          <a:noFill/>
+        </p:spPr>
+        <p:txBody>
+          <a:bodyPr wrap="square" lIns="0" rIns="0" tIns="0" bIns="0" anchor="t">
+            <a:spAutoFit/>
+          </a:bodyPr>
+          <a:lstStyle/>
+          <a:p>
+            <a:pPr algn="l">
+              <a:lnSpc>
+                <a:spcPct val="120000"/>
+              </a:lnSpc>
+            </a:pPr>
+            <a:r>
+              <a:rPr sz="1500" b="1" i="0">
+                <a:solidFill>
+                  <a:srgbClr val="181F2B"/>
+                </a:solidFill>
+                <a:latin typeface="Helvetica Neue"/>
+              </a:rPr>
+              <a:t>Joint beats two-stage when the schedule is tight.</a:t>
+            </a:r>
+          </a:p>
+        </p:txBody>
+      </p:sp>
+      <p:sp>
+        <p:nvSpPr>
+          <p:cNvPr id="8" name="TextBox 7"/>
+          <p:cNvSpPr txBox="1"/>
+          <p:nvPr/>
+        </p:nvSpPr>
+        <p:spPr>
+          <a:xfrm>
+            <a:off x="548640" y="2148840"/>
+            <a:ext cx="11091672" cy="777240"/>
+          </a:xfrm>
+          <a:prstGeom prst="rect">
+            <a:avLst/>
+          </a:prstGeom>
+          <a:noFill/>
+        </p:spPr>
+        <p:txBody>
+          <a:bodyPr wrap="square" lIns="0" rIns="0" tIns="0" bIns="0" anchor="t">
+            <a:spAutoFit/>
+          </a:bodyPr>
+          <a:lstStyle/>
+          <a:p>
+            <a:pPr algn="l">
+              <a:lnSpc>
+                <a:spcPct val="140000"/>
+              </a:lnSpc>
+            </a:pPr>
+            <a:r>
+              <a:rPr sz="1200" b="0" i="0">
+                <a:solidFill>
+                  <a:srgbClr val="555F6D"/>
+                </a:solidFill>
+                <a:latin typeface="Helvetica Neue"/>
+              </a:rPr>
+              <a:t>If the user has limited free hours and lots of workouts, two-stage picks foods first and then realises the calendar can't fit them. The joint solver doesn't get into that bind because it sees both decisions at once.</a:t>
+            </a:r>
+          </a:p>
+        </p:txBody>
+      </p:sp>
       <p:sp>
         <p:nvSpPr>
           <p:cNvPr id="9" name="TextBox 8"/>
@@ -9166,85 +6919,202 @@
         </p:nvSpPr>
         <p:spPr>
           <a:xfrm>
-            <a:off x="548640" y="5440680"/>
-            <a:ext cx="5486400" cy="365760"/>
-          </a:xfrm>
-          <a:prstGeom prst="rect">
-            <a:avLst/>
-          </a:prstGeom>
-          <a:noFill/>
-        </p:spPr>
-        <p:txBody>
-          <a:bodyPr wrap="square" lIns="0" rIns="0" tIns="0" bIns="0" anchor="t">
-            <a:spAutoFit/>
-          </a:bodyPr>
-          <a:lstStyle/>
-          <a:p>
-            <a:pPr algn="ctr">
-              <a:lnSpc>
-                <a:spcPct val="115000"/>
-              </a:lnSpc>
-            </a:pPr>
-            <a:r>
-              <a:rPr sz="1100" b="1" i="0">
+            <a:off x="548640" y="2971800"/>
+            <a:ext cx="10972800" cy="365760"/>
+          </a:xfrm>
+          <a:prstGeom prst="rect">
+            <a:avLst/>
+          </a:prstGeom>
+          <a:noFill/>
+        </p:spPr>
+        <p:txBody>
+          <a:bodyPr wrap="square" lIns="0" rIns="0" tIns="0" bIns="0" anchor="t">
+            <a:spAutoFit/>
+          </a:bodyPr>
+          <a:lstStyle/>
+          <a:p>
+            <a:pPr algn="l">
+              <a:lnSpc>
+                <a:spcPct val="120000"/>
+              </a:lnSpc>
+            </a:pPr>
+            <a:r>
+              <a:rPr sz="1500" b="1" i="0">
+                <a:solidFill>
+                  <a:srgbClr val="181F2B"/>
+                </a:solidFill>
+                <a:latin typeface="Helvetica Neue"/>
+              </a:rPr>
+              <a:t>Warm-starting helps on the hard cases, not the easy ones.</a:t>
+            </a:r>
+          </a:p>
+        </p:txBody>
+      </p:sp>
+      <p:sp>
+        <p:nvSpPr>
+          <p:cNvPr id="10" name="TextBox 9"/>
+          <p:cNvSpPr txBox="1"/>
+          <p:nvPr/>
+        </p:nvSpPr>
+        <p:spPr>
+          <a:xfrm>
+            <a:off x="548640" y="3337560"/>
+            <a:ext cx="11091672" cy="777240"/>
+          </a:xfrm>
+          <a:prstGeom prst="rect">
+            <a:avLst/>
+          </a:prstGeom>
+          <a:noFill/>
+        </p:spPr>
+        <p:txBody>
+          <a:bodyPr wrap="square" lIns="0" rIns="0" tIns="0" bIns="0" anchor="t">
+            <a:spAutoFit/>
+          </a:bodyPr>
+          <a:lstStyle/>
+          <a:p>
+            <a:pPr algn="l">
+              <a:lnSpc>
+                <a:spcPct val="140000"/>
+              </a:lnSpc>
+            </a:pPr>
+            <a:r>
+              <a:rPr sz="1200" b="0" i="0">
                 <a:solidFill>
                   <a:srgbClr val="555F6D"/>
                 </a:solidFill>
                 <a:latin typeface="Helvetica Neue"/>
               </a:rPr>
-              <a:t>Feasibility per (instance × solver)</a:t>
-            </a:r>
-          </a:p>
-        </p:txBody>
-      </p:sp>
-      <p:sp>
-        <p:nvSpPr>
-          <p:cNvPr id="10" name="TextBox 9"/>
-          <p:cNvSpPr txBox="1"/>
-          <p:nvPr/>
-        </p:nvSpPr>
-        <p:spPr>
-          <a:xfrm>
-            <a:off x="6400800" y="5440680"/>
-            <a:ext cx="5486400" cy="365760"/>
-          </a:xfrm>
-          <a:prstGeom prst="rect">
-            <a:avLst/>
-          </a:prstGeom>
-          <a:noFill/>
-        </p:spPr>
-        <p:txBody>
-          <a:bodyPr wrap="square" lIns="0" rIns="0" tIns="0" bIns="0" anchor="t">
-            <a:spAutoFit/>
-          </a:bodyPr>
-          <a:lstStyle/>
-          <a:p>
-            <a:pPr algn="ctr">
-              <a:lnSpc>
-                <a:spcPct val="115000"/>
-              </a:lnSpc>
-            </a:pPr>
-            <a:r>
-              <a:rPr sz="1100" b="1" i="0">
+              <a:t>Big food lists with tight constraints — the joint solver is much faster from a hint. Small loose instances — running two-stage first is wasted time.</a:t>
+            </a:r>
+          </a:p>
+        </p:txBody>
+      </p:sp>
+      <p:sp>
+        <p:nvSpPr>
+          <p:cNvPr id="11" name="TextBox 10"/>
+          <p:cNvSpPr txBox="1"/>
+          <p:nvPr/>
+        </p:nvSpPr>
+        <p:spPr>
+          <a:xfrm>
+            <a:off x="548640" y="4160520"/>
+            <a:ext cx="10972800" cy="365760"/>
+          </a:xfrm>
+          <a:prstGeom prst="rect">
+            <a:avLst/>
+          </a:prstGeom>
+          <a:noFill/>
+        </p:spPr>
+        <p:txBody>
+          <a:bodyPr wrap="square" lIns="0" rIns="0" tIns="0" bIns="0" anchor="t">
+            <a:spAutoFit/>
+          </a:bodyPr>
+          <a:lstStyle/>
+          <a:p>
+            <a:pPr algn="l">
+              <a:lnSpc>
+                <a:spcPct val="120000"/>
+              </a:lnSpc>
+            </a:pPr>
+            <a:r>
+              <a:rPr sz="1500" b="1" i="0">
+                <a:solidFill>
+                  <a:srgbClr val="181F2B"/>
+                </a:solidFill>
+                <a:latin typeface="Helvetica Neue"/>
+              </a:rPr>
+              <a:t>When the problem is infeasible, our solver tells you why.</a:t>
+            </a:r>
+          </a:p>
+        </p:txBody>
+      </p:sp>
+      <p:sp>
+        <p:nvSpPr>
+          <p:cNvPr id="12" name="TextBox 11"/>
+          <p:cNvSpPr txBox="1"/>
+          <p:nvPr/>
+        </p:nvSpPr>
+        <p:spPr>
+          <a:xfrm>
+            <a:off x="548640" y="4526280"/>
+            <a:ext cx="11091672" cy="777240"/>
+          </a:xfrm>
+          <a:prstGeom prst="rect">
+            <a:avLst/>
+          </a:prstGeom>
+          <a:noFill/>
+        </p:spPr>
+        <p:txBody>
+          <a:bodyPr wrap="square" lIns="0" rIns="0" tIns="0" bIns="0" anchor="t">
+            <a:spAutoFit/>
+          </a:bodyPr>
+          <a:lstStyle/>
+          <a:p>
+            <a:pPr algn="l">
+              <a:lnSpc>
+                <a:spcPct val="140000"/>
+              </a:lnSpc>
+            </a:pPr>
+            <a:r>
+              <a:rPr sz="1200" b="0" i="0">
                 <a:solidFill>
                   <a:srgbClr val="555F6D"/>
                 </a:solidFill>
                 <a:latin typeface="Helvetica Neue"/>
               </a:rPr>
-              <a:t>Stacked objective by penalty term</a:t>
-            </a:r>
-          </a:p>
-        </p:txBody>
-      </p:sp>
-      <p:sp>
-        <p:nvSpPr>
-          <p:cNvPr id="11" name="TextBox 10"/>
-          <p:cNvSpPr txBox="1"/>
-          <p:nvPr/>
-        </p:nvSpPr>
-        <p:spPr>
-          <a:xfrm>
-            <a:off x="548640" y="5897880"/>
+              <a:t>We use CP-SAT's assumption literals to point at the smallest set of constraints the user has to relax — calorie band, budget, workouts, or scheduling overlaps. Saves users from staring at an empty plan.</a:t>
+            </a:r>
+          </a:p>
+        </p:txBody>
+      </p:sp>
+      <p:sp>
+        <p:nvSpPr>
+          <p:cNvPr id="13" name="TextBox 12"/>
+          <p:cNvSpPr txBox="1"/>
+          <p:nvPr/>
+        </p:nvSpPr>
+        <p:spPr>
+          <a:xfrm>
+            <a:off x="548640" y="5349240"/>
+            <a:ext cx="10972800" cy="365760"/>
+          </a:xfrm>
+          <a:prstGeom prst="rect">
+            <a:avLst/>
+          </a:prstGeom>
+          <a:noFill/>
+        </p:spPr>
+        <p:txBody>
+          <a:bodyPr wrap="square" lIns="0" rIns="0" tIns="0" bIns="0" anchor="t">
+            <a:spAutoFit/>
+          </a:bodyPr>
+          <a:lstStyle/>
+          <a:p>
+            <a:pPr algn="l">
+              <a:lnSpc>
+                <a:spcPct val="120000"/>
+              </a:lnSpc>
+            </a:pPr>
+            <a:r>
+              <a:rPr sz="1500" b="1" i="0">
+                <a:solidFill>
+                  <a:srgbClr val="181F2B"/>
+                </a:solidFill>
+                <a:latin typeface="Helvetica Neue"/>
+              </a:rPr>
+              <a:t>Hydration was almost free.</a:t>
+            </a:r>
+          </a:p>
+        </p:txBody>
+      </p:sp>
+      <p:sp>
+        <p:nvSpPr>
+          <p:cNvPr id="14" name="TextBox 13"/>
+          <p:cNvSpPr txBox="1"/>
+          <p:nvPr/>
+        </p:nvSpPr>
+        <p:spPr>
+          <a:xfrm>
+            <a:off x="548640" y="5715000"/>
             <a:ext cx="11091672" cy="777240"/>
           </a:xfrm>
           <a:prstGeom prst="rect">
@@ -9260,17 +7130,17 @@
           <a:p>
             <a:pPr algn="l">
               <a:lnSpc>
-                <a:spcPct val="135000"/>
-              </a:lnSpc>
-            </a:pPr>
-            <a:r>
-              <a:rPr sz="1200" b="0" i="1">
+                <a:spcPct val="140000"/>
+              </a:lnSpc>
+            </a:pPr>
+            <a:r>
+              <a:rPr sz="1200" b="0" i="0">
                 <a:solidFill>
                   <a:srgbClr val="555F6D"/>
                 </a:solidFill>
                 <a:latin typeface="Helvetica Neue"/>
               </a:rPr>
-              <a:t>Where the joint pays off: instances where the two-stage commits to food choices the scheduler then cannot fit. Where it doesn’t: small loose instances where the MIP-then-schedule baseline reaches OPTIMAL faster than the joint can presolve.</a:t>
+              <a:t>We added it as a soft objective with sliding-window spacing. It never blew up the runtime, even on the largest instances.</a:t>
             </a:r>
           </a:p>
         </p:txBody>
@@ -9360,7 +7230,7 @@
           <a:p>
             <a:pPr algn="l">
               <a:lnSpc>
-                <a:spcPct val="115000"/>
+                <a:spcPct val="120000"/>
               </a:lnSpc>
             </a:pPr>
             <a:r>
@@ -9370,7 +7240,7 @@
                 </a:solidFill>
                 <a:latin typeface="Helvetica Neue"/>
               </a:rPr>
-              <a:t>4 · KEY RESULTS</a:t>
+              <a:t>5 · WRAP</a:t>
             </a:r>
           </a:p>
         </p:txBody>
@@ -9384,7 +7254,7 @@
         <p:spPr>
           <a:xfrm>
             <a:off x="548640" y="685800"/>
-            <a:ext cx="10972800" cy="640080"/>
+            <a:ext cx="11091672" cy="822960"/>
           </a:xfrm>
           <a:prstGeom prst="rect">
             <a:avLst/>
@@ -9399,17 +7269,17 @@
           <a:p>
             <a:pPr algn="l">
               <a:lnSpc>
-                <a:spcPct val="115000"/>
-              </a:lnSpc>
-            </a:pPr>
-            <a:r>
-              <a:rPr sz="3000" b="1" i="0">
+                <a:spcPct val="110000"/>
+              </a:lnSpc>
+            </a:pPr>
+            <a:r>
+              <a:rPr sz="2800" b="1" i="0">
                 <a:solidFill>
                   <a:srgbClr val="181F2B"/>
                 </a:solidFill>
                 <a:latin typeface="Helvetica Neue"/>
               </a:rPr>
-              <a:t>What we learned.</a:t>
+              <a:t>Future work, what's in the box, thank you.</a:t>
             </a:r>
           </a:p>
         </p:txBody>
@@ -9422,7 +7292,7 @@
         </p:nvCxnSpPr>
         <p:spPr>
           <a:xfrm>
-            <a:off x="548640" y="1417320"/>
+            <a:off x="548640" y="1508760"/>
             <a:ext cx="11091672" cy="0"/>
           </a:xfrm>
           <a:prstGeom prst="line">
@@ -9473,7 +7343,7 @@
           <a:p>
             <a:pPr algn="r">
               <a:lnSpc>
-                <a:spcPct val="115000"/>
+                <a:spcPct val="120000"/>
               </a:lnSpc>
             </a:pPr>
             <a:r>
@@ -9483,21 +7353,67 @@
                 </a:solidFill>
                 <a:latin typeface="Helvetica Neue"/>
               </a:rPr>
-              <a:t>9 / 10</a:t>
-            </a:r>
-          </a:p>
-        </p:txBody>
-      </p:sp>
-      <p:sp>
-        <p:nvSpPr>
-          <p:cNvPr id="7" name="TextBox 6"/>
-          <p:cNvSpPr txBox="1"/>
-          <p:nvPr/>
-        </p:nvSpPr>
-        <p:spPr>
-          <a:xfrm>
-            <a:off x="548640" y="1691640"/>
-            <a:ext cx="10972800" cy="365760"/>
+              <a:t>9 / 9</a:t>
+            </a:r>
+          </a:p>
+        </p:txBody>
+      </p:sp>
+      <p:sp>
+        <p:nvSpPr>
+          <p:cNvPr id="7" name="Rounded Rectangle 6"/>
+          <p:cNvSpPr/>
+          <p:nvPr/>
+        </p:nvSpPr>
+        <p:spPr>
+          <a:xfrm>
+            <a:off x="548640" y="1783080"/>
+            <a:ext cx="5394960" cy="3611880"/>
+          </a:xfrm>
+          <a:prstGeom prst="roundRect">
+            <a:avLst>
+              <a:gd name="adj" fmla="val 6000"/>
+            </a:avLst>
+          </a:prstGeom>
+          <a:solidFill>
+            <a:srgbClr val="F1EEE6"/>
+          </a:solidFill>
+          <a:ln>
+            <a:noFill/>
+          </a:ln>
+          <a:effectLst/>
+        </p:spPr>
+        <p:style>
+          <a:lnRef idx="1">
+            <a:schemeClr val="accent1"/>
+          </a:lnRef>
+          <a:fillRef idx="3">
+            <a:schemeClr val="accent1"/>
+          </a:fillRef>
+          <a:effectRef idx="2">
+            <a:schemeClr val="accent1"/>
+          </a:effectRef>
+          <a:fontRef idx="minor">
+            <a:schemeClr val="lt1"/>
+          </a:fontRef>
+        </p:style>
+        <p:txBody>
+          <a:bodyPr rtlCol="0" anchor="ctr"/>
+          <a:lstStyle/>
+          <a:p>
+            <a:pPr algn="ctr"/>
+          </a:p>
+        </p:txBody>
+      </p:sp>
+      <p:sp>
+        <p:nvSpPr>
+          <p:cNvPr id="8" name="TextBox 7"/>
+          <p:cNvSpPr txBox="1"/>
+          <p:nvPr/>
+        </p:nvSpPr>
+        <p:spPr>
+          <a:xfrm>
+            <a:off x="822960" y="1965960"/>
+            <a:ext cx="5394960" cy="365760"/>
           </a:xfrm>
           <a:prstGeom prst="rect">
             <a:avLst/>
@@ -9512,31 +7428,70 @@
           <a:p>
             <a:pPr algn="l">
               <a:lnSpc>
-                <a:spcPct val="115000"/>
-              </a:lnSpc>
-            </a:pPr>
-            <a:r>
-              <a:rPr sz="1500" b="1" i="0">
+                <a:spcPct val="120000"/>
+              </a:lnSpc>
+            </a:pPr>
+            <a:r>
+              <a:rPr sz="1100" b="1" i="0">
+                <a:solidFill>
+                  <a:srgbClr val="E06B1F"/>
+                </a:solidFill>
+                <a:latin typeface="Helvetica Neue"/>
+              </a:rPr>
+              <a:t>WHERE WE'D GO NEXT</a:t>
+            </a:r>
+          </a:p>
+        </p:txBody>
+      </p:sp>
+      <p:sp>
+        <p:nvSpPr>
+          <p:cNvPr id="9" name="TextBox 8"/>
+          <p:cNvSpPr txBox="1"/>
+          <p:nvPr/>
+        </p:nvSpPr>
+        <p:spPr>
+          <a:xfrm>
+            <a:off x="822960" y="2423160"/>
+            <a:ext cx="4846320" cy="310896"/>
+          </a:xfrm>
+          <a:prstGeom prst="rect">
+            <a:avLst/>
+          </a:prstGeom>
+          <a:noFill/>
+        </p:spPr>
+        <p:txBody>
+          <a:bodyPr wrap="square" lIns="0" rIns="0" tIns="0" bIns="0" anchor="t">
+            <a:spAutoFit/>
+          </a:bodyPr>
+          <a:lstStyle/>
+          <a:p>
+            <a:pPr algn="l">
+              <a:lnSpc>
+                <a:spcPct val="120000"/>
+              </a:lnSpc>
+            </a:pPr>
+            <a:r>
+              <a:rPr sz="1300" b="1" i="0">
                 <a:solidFill>
                   <a:srgbClr val="181F2B"/>
                 </a:solidFill>
                 <a:latin typeface="Helvetica Neue"/>
               </a:rPr>
-              <a:t>Joint &gt; two-stage when constraints are tight</a:t>
-            </a:r>
-          </a:p>
-        </p:txBody>
-      </p:sp>
-      <p:sp>
-        <p:nvSpPr>
-          <p:cNvPr id="8" name="TextBox 7"/>
-          <p:cNvSpPr txBox="1"/>
-          <p:nvPr/>
-        </p:nvSpPr>
-        <p:spPr>
-          <a:xfrm>
-            <a:off x="548640" y="2011680"/>
-            <a:ext cx="11091672" cy="777240"/>
+              <a:t>Scale past 200 foods.</a:t>
+            </a:r>
+          </a:p>
+        </p:txBody>
+      </p:sp>
+      <p:sp>
+        <p:nvSpPr>
+          <p:cNvPr id="10" name="TextBox 9"/>
+          <p:cNvSpPr txBox="1"/>
+          <p:nvPr/>
+        </p:nvSpPr>
+        <p:spPr>
+          <a:xfrm>
+            <a:off x="822960" y="2715768"/>
+            <a:ext cx="4846320" cy="502920"/>
           </a:xfrm>
           <a:prstGeom prst="rect">
             <a:avLst/>
@@ -9555,27 +7510,307 @@
               </a:lnSpc>
             </a:pPr>
             <a:r>
+              <a:rPr sz="1100" b="0" i="0">
+                <a:solidFill>
+                  <a:srgbClr val="555F6D"/>
+                </a:solidFill>
+                <a:latin typeface="Helvetica Neue"/>
+              </a:rPr>
+              <a:t>Column generation or a Benders-style decomposition would handle bigger food lists.</a:t>
+            </a:r>
+          </a:p>
+        </p:txBody>
+      </p:sp>
+      <p:sp>
+        <p:nvSpPr>
+          <p:cNvPr id="11" name="TextBox 10"/>
+          <p:cNvSpPr txBox="1"/>
+          <p:nvPr/>
+        </p:nvSpPr>
+        <p:spPr>
+          <a:xfrm>
+            <a:off x="822960" y="3291840"/>
+            <a:ext cx="4846320" cy="310896"/>
+          </a:xfrm>
+          <a:prstGeom prst="rect">
+            <a:avLst/>
+          </a:prstGeom>
+          <a:noFill/>
+        </p:spPr>
+        <p:txBody>
+          <a:bodyPr wrap="square" lIns="0" rIns="0" tIns="0" bIns="0" anchor="t">
+            <a:spAutoFit/>
+          </a:bodyPr>
+          <a:lstStyle/>
+          <a:p>
+            <a:pPr algn="l">
+              <a:lnSpc>
+                <a:spcPct val="120000"/>
+              </a:lnSpc>
+            </a:pPr>
+            <a:r>
+              <a:rPr sz="1300" b="1" i="0">
+                <a:solidFill>
+                  <a:srgbClr val="181F2B"/>
+                </a:solidFill>
+                <a:latin typeface="Helvetica Neue"/>
+              </a:rPr>
+              <a:t>Re-plan during the week.</a:t>
+            </a:r>
+          </a:p>
+        </p:txBody>
+      </p:sp>
+      <p:sp>
+        <p:nvSpPr>
+          <p:cNvPr id="12" name="TextBox 11"/>
+          <p:cNvSpPr txBox="1"/>
+          <p:nvPr/>
+        </p:nvSpPr>
+        <p:spPr>
+          <a:xfrm>
+            <a:off x="822960" y="3584448"/>
+            <a:ext cx="4846320" cy="502920"/>
+          </a:xfrm>
+          <a:prstGeom prst="rect">
+            <a:avLst/>
+          </a:prstGeom>
+          <a:noFill/>
+        </p:spPr>
+        <p:txBody>
+          <a:bodyPr wrap="square" lIns="0" rIns="0" tIns="0" bIns="0" anchor="t">
+            <a:spAutoFit/>
+          </a:bodyPr>
+          <a:lstStyle/>
+          <a:p>
+            <a:pPr algn="l">
+              <a:lnSpc>
+                <a:spcPct val="140000"/>
+              </a:lnSpc>
+            </a:pPr>
+            <a:r>
+              <a:rPr sz="1100" b="0" i="0">
+                <a:solidFill>
+                  <a:srgbClr val="555F6D"/>
+                </a:solidFill>
+                <a:latin typeface="Helvetica Neue"/>
+              </a:rPr>
+              <a:t>Missed a workout? Re-solve the remaining days from where you actually are.</a:t>
+            </a:r>
+          </a:p>
+        </p:txBody>
+      </p:sp>
+      <p:sp>
+        <p:nvSpPr>
+          <p:cNvPr id="13" name="TextBox 12"/>
+          <p:cNvSpPr txBox="1"/>
+          <p:nvPr/>
+        </p:nvSpPr>
+        <p:spPr>
+          <a:xfrm>
+            <a:off x="822960" y="4160520"/>
+            <a:ext cx="4846320" cy="310896"/>
+          </a:xfrm>
+          <a:prstGeom prst="rect">
+            <a:avLst/>
+          </a:prstGeom>
+          <a:noFill/>
+        </p:spPr>
+        <p:txBody>
+          <a:bodyPr wrap="square" lIns="0" rIns="0" tIns="0" bIns="0" anchor="t">
+            <a:spAutoFit/>
+          </a:bodyPr>
+          <a:lstStyle/>
+          <a:p>
+            <a:pPr algn="l">
+              <a:lnSpc>
+                <a:spcPct val="120000"/>
+              </a:lnSpc>
+            </a:pPr>
+            <a:r>
+              <a:rPr sz="1300" b="1" i="0">
+                <a:solidFill>
+                  <a:srgbClr val="181F2B"/>
+                </a:solidFill>
+                <a:latin typeface="Helvetica Neue"/>
+              </a:rPr>
+              <a:t>Hook into real Penn Dining.</a:t>
+            </a:r>
+          </a:p>
+        </p:txBody>
+      </p:sp>
+      <p:sp>
+        <p:nvSpPr>
+          <p:cNvPr id="14" name="TextBox 13"/>
+          <p:cNvSpPr txBox="1"/>
+          <p:nvPr/>
+        </p:nvSpPr>
+        <p:spPr>
+          <a:xfrm>
+            <a:off x="822960" y="4453128"/>
+            <a:ext cx="4846320" cy="502920"/>
+          </a:xfrm>
+          <a:prstGeom prst="rect">
+            <a:avLst/>
+          </a:prstGeom>
+          <a:noFill/>
+        </p:spPr>
+        <p:txBody>
+          <a:bodyPr wrap="square" lIns="0" rIns="0" tIns="0" bIns="0" anchor="t">
+            <a:spAutoFit/>
+          </a:bodyPr>
+          <a:lstStyle/>
+          <a:p>
+            <a:pPr algn="l">
+              <a:lnSpc>
+                <a:spcPct val="140000"/>
+              </a:lnSpc>
+            </a:pPr>
+            <a:r>
+              <a:rPr sz="1100" b="0" i="0">
+                <a:solidFill>
+                  <a:srgbClr val="555F6D"/>
+                </a:solidFill>
+                <a:latin typeface="Helvetica Neue"/>
+              </a:rPr>
+              <a:t>Cookie-aware scraper for the live menu — currently using a curated sample.</a:t>
+            </a:r>
+          </a:p>
+        </p:txBody>
+      </p:sp>
+      <p:sp>
+        <p:nvSpPr>
+          <p:cNvPr id="15" name="Rounded Rectangle 14"/>
+          <p:cNvSpPr/>
+          <p:nvPr/>
+        </p:nvSpPr>
+        <p:spPr>
+          <a:xfrm>
+            <a:off x="6245352" y="1783080"/>
+            <a:ext cx="5394960" cy="3611880"/>
+          </a:xfrm>
+          <a:prstGeom prst="roundRect">
+            <a:avLst>
+              <a:gd name="adj" fmla="val 6000"/>
+            </a:avLst>
+          </a:prstGeom>
+          <a:solidFill>
+            <a:srgbClr val="F1EEE6"/>
+          </a:solidFill>
+          <a:ln>
+            <a:noFill/>
+          </a:ln>
+          <a:effectLst/>
+        </p:spPr>
+        <p:style>
+          <a:lnRef idx="1">
+            <a:schemeClr val="accent1"/>
+          </a:lnRef>
+          <a:fillRef idx="3">
+            <a:schemeClr val="accent1"/>
+          </a:fillRef>
+          <a:effectRef idx="2">
+            <a:schemeClr val="accent1"/>
+          </a:effectRef>
+          <a:fontRef idx="minor">
+            <a:schemeClr val="lt1"/>
+          </a:fontRef>
+        </p:style>
+        <p:txBody>
+          <a:bodyPr rtlCol="0" anchor="ctr"/>
+          <a:lstStyle/>
+          <a:p>
+            <a:pPr algn="ctr"/>
+          </a:p>
+        </p:txBody>
+      </p:sp>
+      <p:sp>
+        <p:nvSpPr>
+          <p:cNvPr id="16" name="TextBox 15"/>
+          <p:cNvSpPr txBox="1"/>
+          <p:nvPr/>
+        </p:nvSpPr>
+        <p:spPr>
+          <a:xfrm>
+            <a:off x="6519672" y="1965960"/>
+            <a:ext cx="5394960" cy="365760"/>
+          </a:xfrm>
+          <a:prstGeom prst="rect">
+            <a:avLst/>
+          </a:prstGeom>
+          <a:noFill/>
+        </p:spPr>
+        <p:txBody>
+          <a:bodyPr wrap="square" lIns="0" rIns="0" tIns="0" bIns="0" anchor="t">
+            <a:spAutoFit/>
+          </a:bodyPr>
+          <a:lstStyle/>
+          <a:p>
+            <a:pPr algn="l">
+              <a:lnSpc>
+                <a:spcPct val="120000"/>
+              </a:lnSpc>
+            </a:pPr>
+            <a:r>
+              <a:rPr sz="1100" b="1" i="0">
+                <a:solidFill>
+                  <a:srgbClr val="1F6FB0"/>
+                </a:solidFill>
+                <a:latin typeface="Helvetica Neue"/>
+              </a:rPr>
+              <a:t>WHAT'S IN THE REPO</a:t>
+            </a:r>
+          </a:p>
+        </p:txBody>
+      </p:sp>
+      <p:sp>
+        <p:nvSpPr>
+          <p:cNvPr id="17" name="TextBox 16"/>
+          <p:cNvSpPr txBox="1"/>
+          <p:nvPr/>
+        </p:nvSpPr>
+        <p:spPr>
+          <a:xfrm>
+            <a:off x="6519672" y="2423160"/>
+            <a:ext cx="4846320" cy="384048"/>
+          </a:xfrm>
+          <a:prstGeom prst="rect">
+            <a:avLst/>
+          </a:prstGeom>
+          <a:noFill/>
+        </p:spPr>
+        <p:txBody>
+          <a:bodyPr wrap="square" lIns="0" rIns="0" tIns="0" bIns="0" anchor="t">
+            <a:spAutoFit/>
+          </a:bodyPr>
+          <a:lstStyle/>
+          <a:p>
+            <a:pPr algn="l">
+              <a:lnSpc>
+                <a:spcPct val="120000"/>
+              </a:lnSpc>
+            </a:pPr>
+            <a:r>
               <a:rPr sz="1200" b="0" i="0">
                 <a:solidFill>
-                  <a:srgbClr val="555F6D"/>
-                </a:solidFill>
-                <a:latin typeface="Helvetica Neue"/>
-              </a:rPr>
-              <a:t>The two-stage decomposition can commit to food choices the scheduler then cannot fit. The joint model trades a small macro deviation for a feasible schedule directly — exactly the gap CLAUDE.md predicted.</a:t>
-            </a:r>
-          </a:p>
-        </p:txBody>
-      </p:sp>
-      <p:sp>
-        <p:nvSpPr>
-          <p:cNvPr id="9" name="TextBox 8"/>
-          <p:cNvSpPr txBox="1"/>
-          <p:nvPr/>
-        </p:nvSpPr>
-        <p:spPr>
-          <a:xfrm>
-            <a:off x="548640" y="2834640"/>
-            <a:ext cx="10972800" cy="365760"/>
+                  <a:srgbClr val="181F2B"/>
+                </a:solidFill>
+                <a:latin typeface="Helvetica Neue"/>
+              </a:rPr>
+              <a:t>•  Around 5,000 lines of Python, mostly solver code</a:t>
+            </a:r>
+          </a:p>
+        </p:txBody>
+      </p:sp>
+      <p:sp>
+        <p:nvSpPr>
+          <p:cNvPr id="18" name="TextBox 17"/>
+          <p:cNvSpPr txBox="1"/>
+          <p:nvPr/>
+        </p:nvSpPr>
+        <p:spPr>
+          <a:xfrm>
+            <a:off x="6519672" y="2807208"/>
+            <a:ext cx="4846320" cy="384048"/>
           </a:xfrm>
           <a:prstGeom prst="rect">
             <a:avLst/>
@@ -9590,31 +7825,31 @@
           <a:p>
             <a:pPr algn="l">
               <a:lnSpc>
-                <a:spcPct val="115000"/>
-              </a:lnSpc>
-            </a:pPr>
-            <a:r>
-              <a:rPr sz="1500" b="1" i="0">
+                <a:spcPct val="120000"/>
+              </a:lnSpc>
+            </a:pPr>
+            <a:r>
+              <a:rPr sz="1200" b="0" i="0">
                 <a:solidFill>
                   <a:srgbClr val="181F2B"/>
                 </a:solidFill>
                 <a:latin typeface="Helvetica Neue"/>
               </a:rPr>
-              <a:t>Warm-start helps where it matters</a:t>
-            </a:r>
-          </a:p>
-        </p:txBody>
-      </p:sp>
-      <p:sp>
-        <p:nvSpPr>
-          <p:cNvPr id="10" name="TextBox 9"/>
-          <p:cNvSpPr txBox="1"/>
-          <p:nvPr/>
-        </p:nvSpPr>
-        <p:spPr>
-          <a:xfrm>
-            <a:off x="548640" y="3154680"/>
-            <a:ext cx="11091672" cy="777240"/>
+              <a:t>•  37 unit tests, all passing</a:t>
+            </a:r>
+          </a:p>
+        </p:txBody>
+      </p:sp>
+      <p:sp>
+        <p:nvSpPr>
+          <p:cNvPr id="19" name="TextBox 18"/>
+          <p:cNvSpPr txBox="1"/>
+          <p:nvPr/>
+        </p:nvSpPr>
+        <p:spPr>
+          <a:xfrm>
+            <a:off x="6519672" y="3191256"/>
+            <a:ext cx="4846320" cy="384048"/>
           </a:xfrm>
           <a:prstGeom prst="rect">
             <a:avLst/>
@@ -9629,31 +7864,31 @@
           <a:p>
             <a:pPr algn="l">
               <a:lnSpc>
-                <a:spcPct val="140000"/>
+                <a:spcPct val="120000"/>
               </a:lnSpc>
             </a:pPr>
             <a:r>
               <a:rPr sz="1200" b="0" i="0">
                 <a:solidFill>
-                  <a:srgbClr val="555F6D"/>
-                </a:solidFill>
-                <a:latin typeface="Helvetica Neue"/>
-              </a:rPr>
-              <a:t>On large catalogs the joint solver is faster from a seeded plan via model.AddHint(...). On tiny loose instances the two-stage pre-pass is wasted overhead, so the cold joint wins.</a:t>
-            </a:r>
-          </a:p>
-        </p:txBody>
-      </p:sp>
-      <p:sp>
-        <p:nvSpPr>
-          <p:cNvPr id="11" name="TextBox 10"/>
-          <p:cNvSpPr txBox="1"/>
-          <p:nvPr/>
-        </p:nvSpPr>
-        <p:spPr>
-          <a:xfrm>
-            <a:off x="548640" y="3977640"/>
-            <a:ext cx="10972800" cy="365760"/>
+                  <a:srgbClr val="181F2B"/>
+                </a:solidFill>
+                <a:latin typeface="Helvetica Neue"/>
+              </a:rPr>
+              <a:t>•  Four solver implementations on a shared interface</a:t>
+            </a:r>
+          </a:p>
+        </p:txBody>
+      </p:sp>
+      <p:sp>
+        <p:nvSpPr>
+          <p:cNvPr id="20" name="TextBox 19"/>
+          <p:cNvSpPr txBox="1"/>
+          <p:nvPr/>
+        </p:nvSpPr>
+        <p:spPr>
+          <a:xfrm>
+            <a:off x="6519672" y="3575304"/>
+            <a:ext cx="4846320" cy="384048"/>
           </a:xfrm>
           <a:prstGeom prst="rect">
             <a:avLst/>
@@ -9668,31 +7903,31 @@
           <a:p>
             <a:pPr algn="l">
               <a:lnSpc>
-                <a:spcPct val="115000"/>
-              </a:lnSpc>
-            </a:pPr>
-            <a:r>
-              <a:rPr sz="1500" b="1" i="0">
+                <a:spcPct val="120000"/>
+              </a:lnSpc>
+            </a:pPr>
+            <a:r>
+              <a:rPr sz="1200" b="0" i="0">
                 <a:solidFill>
                   <a:srgbClr val="181F2B"/>
                 </a:solidFill>
                 <a:latin typeface="Helvetica Neue"/>
               </a:rPr>
-              <a:t>Assumption-literal IIS pays off</a:t>
-            </a:r>
-          </a:p>
-        </p:txBody>
-      </p:sp>
-      <p:sp>
-        <p:nvSpPr>
-          <p:cNvPr id="12" name="TextBox 11"/>
-          <p:cNvSpPr txBox="1"/>
-          <p:nvPr/>
-        </p:nvSpPr>
-        <p:spPr>
-          <a:xfrm>
-            <a:off x="548640" y="4297680"/>
-            <a:ext cx="11091672" cy="777240"/>
+              <a:t>•  Six pre-made user scenarios + a synthetic generator</a:t>
+            </a:r>
+          </a:p>
+        </p:txBody>
+      </p:sp>
+      <p:sp>
+        <p:nvSpPr>
+          <p:cNvPr id="21" name="TextBox 20"/>
+          <p:cNvSpPr txBox="1"/>
+          <p:nvPr/>
+        </p:nvSpPr>
+        <p:spPr>
+          <a:xfrm>
+            <a:off x="6519672" y="3959352"/>
+            <a:ext cx="4846320" cy="384048"/>
           </a:xfrm>
           <a:prstGeom prst="rect">
             <a:avLst/>
@@ -9707,31 +7942,31 @@
           <a:p>
             <a:pPr algn="l">
               <a:lnSpc>
-                <a:spcPct val="140000"/>
+                <a:spcPct val="120000"/>
               </a:lnSpc>
             </a:pPr>
             <a:r>
               <a:rPr sz="1200" b="0" i="0">
                 <a:solidFill>
-                  <a:srgbClr val="555F6D"/>
-                </a:solidFill>
-                <a:latin typeface="Helvetica Neue"/>
-              </a:rPr>
-              <a:t>When the joint model is infeasible, SufficientAssumptionsForInfeasibility() returns the smallest group(s) the user must relax: calorie band, protein floor, budget, workout count, or scheduling overlaps.</a:t>
-            </a:r>
-          </a:p>
-        </p:txBody>
-      </p:sp>
-      <p:sp>
-        <p:nvSpPr>
-          <p:cNvPr id="13" name="TextBox 12"/>
-          <p:cNvSpPr txBox="1"/>
-          <p:nvPr/>
-        </p:nvSpPr>
-        <p:spPr>
-          <a:xfrm>
-            <a:off x="548640" y="5120640"/>
-            <a:ext cx="10972800" cy="365760"/>
+                  <a:srgbClr val="181F2B"/>
+                </a:solidFill>
+                <a:latin typeface="Helvetica Neue"/>
+              </a:rPr>
+              <a:t>•  Penn Dining + USDA + curated food data</a:t>
+            </a:r>
+          </a:p>
+        </p:txBody>
+      </p:sp>
+      <p:sp>
+        <p:nvSpPr>
+          <p:cNvPr id="22" name="TextBox 21"/>
+          <p:cNvSpPr txBox="1"/>
+          <p:nvPr/>
+        </p:nvSpPr>
+        <p:spPr>
+          <a:xfrm>
+            <a:off x="6519672" y="4343400"/>
+            <a:ext cx="4846320" cy="384048"/>
           </a:xfrm>
           <a:prstGeom prst="rect">
             <a:avLst/>
@@ -9746,31 +7981,31 @@
           <a:p>
             <a:pPr algn="l">
               <a:lnSpc>
-                <a:spcPct val="115000"/>
-              </a:lnSpc>
-            </a:pPr>
-            <a:r>
-              <a:rPr sz="1500" b="1" i="0">
+                <a:spcPct val="120000"/>
+              </a:lnSpc>
+            </a:pPr>
+            <a:r>
+              <a:rPr sz="1200" b="0" i="0">
                 <a:solidFill>
                   <a:srgbClr val="181F2B"/>
                 </a:solidFill>
                 <a:latin typeface="Helvetica Neue"/>
               </a:rPr>
-              <a:t>Hydration was free</a:t>
-            </a:r>
-          </a:p>
-        </p:txBody>
-      </p:sp>
-      <p:sp>
-        <p:nvSpPr>
-          <p:cNvPr id="14" name="TextBox 13"/>
-          <p:cNvSpPr txBox="1"/>
-          <p:nvPr/>
-        </p:nvSpPr>
-        <p:spPr>
-          <a:xfrm>
-            <a:off x="548640" y="5440680"/>
-            <a:ext cx="11091672" cy="777240"/>
+              <a:t>•  A streamlit UI and a command-line tool</a:t>
+            </a:r>
+          </a:p>
+        </p:txBody>
+      </p:sp>
+      <p:sp>
+        <p:nvSpPr>
+          <p:cNvPr id="23" name="TextBox 22"/>
+          <p:cNvSpPr txBox="1"/>
+          <p:nvPr/>
+        </p:nvSpPr>
+        <p:spPr>
+          <a:xfrm>
+            <a:off x="6519672" y="4727448"/>
+            <a:ext cx="4846320" cy="384048"/>
           </a:xfrm>
           <a:prstGeom prst="rect">
             <a:avLst/>
@@ -9785,17 +8020,141 @@
           <a:p>
             <a:pPr algn="l">
               <a:lnSpc>
-                <a:spcPct val="140000"/>
+                <a:spcPct val="120000"/>
               </a:lnSpc>
             </a:pPr>
             <a:r>
               <a:rPr sz="1200" b="0" i="0">
                 <a:solidFill>
-                  <a:srgbClr val="555F6D"/>
-                </a:solidFill>
-                <a:latin typeface="Helvetica Neue"/>
-              </a:rPr>
-              <a:t>Sliding-window pairwise spacing on a daytime window with a soft shortfall term — never increased runtime past the time limit on any feasible instance.</a:t>
+                  <a:srgbClr val="181F2B"/>
+                </a:solidFill>
+                <a:latin typeface="Helvetica Neue"/>
+              </a:rPr>
+              <a:t>•  Final report with runtime, feasibility, and objective figures</a:t>
+            </a:r>
+          </a:p>
+        </p:txBody>
+      </p:sp>
+      <p:sp>
+        <p:nvSpPr>
+          <p:cNvPr id="24" name="Rounded Rectangle 23"/>
+          <p:cNvSpPr/>
+          <p:nvPr/>
+        </p:nvSpPr>
+        <p:spPr>
+          <a:xfrm>
+            <a:off x="548640" y="5532120"/>
+            <a:ext cx="11091672" cy="1005840"/>
+          </a:xfrm>
+          <a:prstGeom prst="roundRect">
+            <a:avLst>
+              <a:gd name="adj" fmla="val 6000"/>
+            </a:avLst>
+          </a:prstGeom>
+          <a:solidFill>
+            <a:srgbClr val="181F2B"/>
+          </a:solidFill>
+          <a:ln>
+            <a:noFill/>
+          </a:ln>
+          <a:effectLst/>
+        </p:spPr>
+        <p:style>
+          <a:lnRef idx="1">
+            <a:schemeClr val="accent1"/>
+          </a:lnRef>
+          <a:fillRef idx="3">
+            <a:schemeClr val="accent1"/>
+          </a:fillRef>
+          <a:effectRef idx="2">
+            <a:schemeClr val="accent1"/>
+          </a:effectRef>
+          <a:fontRef idx="minor">
+            <a:schemeClr val="lt1"/>
+          </a:fontRef>
+        </p:style>
+        <p:txBody>
+          <a:bodyPr rtlCol="0" anchor="ctr"/>
+          <a:lstStyle/>
+          <a:p>
+            <a:pPr algn="ctr"/>
+          </a:p>
+        </p:txBody>
+      </p:sp>
+      <p:sp>
+        <p:nvSpPr>
+          <p:cNvPr id="25" name="TextBox 24"/>
+          <p:cNvSpPr txBox="1"/>
+          <p:nvPr/>
+        </p:nvSpPr>
+        <p:spPr>
+          <a:xfrm>
+            <a:off x="548640" y="5696712"/>
+            <a:ext cx="11091672" cy="365760"/>
+          </a:xfrm>
+          <a:prstGeom prst="rect">
+            <a:avLst/>
+          </a:prstGeom>
+          <a:noFill/>
+        </p:spPr>
+        <p:txBody>
+          <a:bodyPr wrap="square" lIns="0" rIns="0" tIns="0" bIns="0" anchor="t">
+            <a:spAutoFit/>
+          </a:bodyPr>
+          <a:lstStyle/>
+          <a:p>
+            <a:pPr algn="ctr">
+              <a:lnSpc>
+                <a:spcPct val="120000"/>
+              </a:lnSpc>
+            </a:pPr>
+            <a:r>
+              <a:rPr sz="2200" b="1" i="0">
+                <a:solidFill>
+                  <a:srgbClr val="FAFAF7"/>
+                </a:solidFill>
+                <a:latin typeface="Helvetica Neue"/>
+              </a:rPr>
+              <a:t>Thank you  —  questions?</a:t>
+            </a:r>
+          </a:p>
+        </p:txBody>
+      </p:sp>
+      <p:sp>
+        <p:nvSpPr>
+          <p:cNvPr id="26" name="TextBox 25"/>
+          <p:cNvSpPr txBox="1"/>
+          <p:nvPr/>
+        </p:nvSpPr>
+        <p:spPr>
+          <a:xfrm>
+            <a:off x="548640" y="6126480"/>
+            <a:ext cx="11091672" cy="365760"/>
+          </a:xfrm>
+          <a:prstGeom prst="rect">
+            <a:avLst/>
+          </a:prstGeom>
+          <a:noFill/>
+        </p:spPr>
+        <p:txBody>
+          <a:bodyPr wrap="square" lIns="0" rIns="0" tIns="0" bIns="0" anchor="t">
+            <a:spAutoFit/>
+          </a:bodyPr>
+          <a:lstStyle/>
+          <a:p>
+            <a:pPr algn="ctr">
+              <a:lnSpc>
+                <a:spcPct val="120000"/>
+              </a:lnSpc>
+            </a:pPr>
+            <a:r>
+              <a:rPr sz="1200" b="0" i="0">
+                <a:solidFill>
+                  <a:srgbClr val="CFCFCF"/>
+                </a:solidFill>
+                <a:latin typeface="Helvetica Neue"/>
+              </a:rPr>
+              <a:t>github.com/aryan-jeena/CIS1921Project   ·   Aryan Jeena &amp; Aadithya Srinivasan</a:t>
             </a:r>
           </a:p>
         </p:txBody>
